--- a/output/LINK. voorstel CentreBlock.pptx
+++ b/output/LINK. voorstel CentreBlock.pptx
@@ -15,9 +15,10 @@
     <p:sldId id="263" r:id="rId9"/>
     <p:sldId id="264" r:id="rId10"/>
     <p:sldId id="265" r:id="rId11"/>
+    <p:sldId id="266" r:id="rId12"/>
   </p:sldIdLst>
   <p:notesMasterIdLst>
-    <p:notesMasterId r:id="rId12"/>
+    <p:notesMasterId r:id="rId13"/>
   </p:notesMasterIdLst>
   <p:sldSz cx="12191970" cy="6858000"/>
   <p:notesSz cx="6858000" cy="12191970"/>
@@ -623,6 +624,94 @@
             <a:fld id="{F7021451-1387-4CA6-816F-3879F97B5CBC}" type="slidenum">
               <a:rPr lang="en-US"/>
               <a:t>10</a:t>
+            </a:fld>
+            <a:endParaRPr lang="en-US"/>
+          </a:p>
+        </p:txBody>
+      </p:sp>
+    </p:spTree>
+    <p:extLst>
+      <p:ext uri="{BB962C8B-B14F-4D97-AF65-F5344CB8AC3E}">
+        <p14:creationId xmlns:p14="http://schemas.microsoft.com/office/powerpoint/2010/main" val="1024086991"/>
+      </p:ext>
+    </p:extLst>
+  </p:cSld>
+  <p:clrMapOvr>
+    <a:masterClrMapping/>
+  </p:clrMapOvr>
+</p:notes>
+</file>
+
+<file path=ppt/notesSlides/notesSlide11.xml><?xml version="1.0" encoding="utf-8"?>
+<p:notes xmlns:a="http://schemas.openxmlformats.org/drawingml/2006/main" xmlns:r="http://schemas.openxmlformats.org/officeDocument/2006/relationships" xmlns:p="http://schemas.openxmlformats.org/presentationml/2006/main">
+  <p:cSld>
+    <p:spTree>
+      <p:nvGrpSpPr>
+        <p:cNvPr id="1" name=""/>
+        <p:cNvGrpSpPr/>
+        <p:nvPr/>
+      </p:nvGrpSpPr>
+      <p:grpSpPr>
+        <a:xfrm>
+          <a:off x="0" y="0"/>
+          <a:ext cx="0" cy="0"/>
+          <a:chOff x="0" y="0"/>
+          <a:chExt cx="0" cy="0"/>
+        </a:xfrm>
+      </p:grpSpPr>
+      <p:sp>
+        <p:nvSpPr>
+          <p:cNvPr id="2" name="Slide Image Placeholder 1"/>
+          <p:cNvSpPr>
+            <a:spLocks noGrp="1" noRot="1" noChangeAspect="1"/>
+          </p:cNvSpPr>
+          <p:nvPr>
+            <p:ph type="sldImg"/>
+          </p:nvPr>
+        </p:nvSpPr>
+        <p:spPr/>
+      </p:sp>
+      <p:sp>
+        <p:nvSpPr>
+          <p:cNvPr id="3" name="Notes Placeholder 2"/>
+          <p:cNvSpPr>
+            <a:spLocks noGrp="1"/>
+          </p:cNvSpPr>
+          <p:nvPr>
+            <p:ph type="body" idx="1"/>
+          </p:nvPr>
+        </p:nvSpPr>
+        <p:spPr/>
+        <p:txBody>
+          <a:bodyPr/>
+          <a:lstStyle/>
+          <a:p>
+            <a:r>
+              <a:rPr lang="en-US" dirty="0"/>
+              <a:t/>
+            </a:r>
+            <a:endParaRPr lang="en-US" dirty="0"/>
+          </a:p>
+        </p:txBody>
+      </p:sp>
+      <p:sp>
+        <p:nvSpPr>
+          <p:cNvPr id="4" name="Slide Number Placeholder 3"/>
+          <p:cNvSpPr>
+            <a:spLocks noGrp="1"/>
+          </p:cNvSpPr>
+          <p:nvPr>
+            <p:ph type="sldNum" sz="quarter" idx="10"/>
+          </p:nvPr>
+        </p:nvSpPr>
+        <p:spPr/>
+        <p:txBody>
+          <a:bodyPr/>
+          <a:lstStyle/>
+          <a:p>
+            <a:fld id="{F7021451-1387-4CA6-816F-3879F97B5CBC}" type="slidenum">
+              <a:rPr lang="en-US"/>
+              <a:t>11</a:t>
             </a:fld>
             <a:endParaRPr lang="en-US"/>
           </a:p>
@@ -2362,7 +2451,7 @@
                 <a:ea typeface="Arial" pitchFamily="34" charset="-122"/>
                 <a:cs typeface="Arial" pitchFamily="34" charset="-120"/>
               </a:rPr>
-              <a:t>1 / 10</a:t>
+              <a:t>1 / 11</a:t>
             </a:r>
             <a:endParaRPr lang="en-US" sz="750" dirty="0"/>
           </a:p>
@@ -2674,6 +2763,1438 @@
 <file path=ppt/slides/slide10.xml><?xml version="1.0" encoding="utf-8"?>
 <p:sld xmlns:a="http://schemas.openxmlformats.org/drawingml/2006/main" xmlns:r="http://schemas.openxmlformats.org/officeDocument/2006/relationships" xmlns:p="http://schemas.openxmlformats.org/presentationml/2006/main">
   <p:cSld name="Slide 10">
+    <p:bg>
+      <p:bgPr>
+        <a:solidFill>
+          <a:srgbClr val="E9E0CD"/>
+        </a:solidFill>
+      </p:bgPr>
+    </p:bg>
+    <p:spTree>
+      <p:nvGrpSpPr>
+        <p:cNvPr id="1" name=""/>
+        <p:cNvGrpSpPr/>
+        <p:nvPr/>
+      </p:nvGrpSpPr>
+      <p:grpSpPr>
+        <a:xfrm>
+          <a:off x="0" y="0"/>
+          <a:ext cx="0" cy="0"/>
+          <a:chOff x="0" y="0"/>
+          <a:chExt cx="0" cy="0"/>
+        </a:xfrm>
+      </p:grpSpPr>
+      <p:sp>
+        <p:nvSpPr>
+          <p:cNvPr id="2" name="Text 0"/>
+          <p:cNvSpPr txBox="1"/>
+          <p:nvPr/>
+        </p:nvSpPr>
+        <p:spPr>
+          <a:xfrm>
+            <a:off x="596899" y="368299"/>
+            <a:ext cx="1904995" cy="330199"/>
+          </a:xfrm>
+          <a:prstGeom prst="rect">
+            <a:avLst/>
+          </a:prstGeom>
+          <a:noFill/>
+          <a:ln/>
+        </p:spPr>
+        <p:txBody>
+          <a:bodyPr wrap="square" lIns="0" tIns="0" rIns="0" bIns="0" rtlCol="0" anchor="ctr"/>
+          <a:lstStyle/>
+          <a:p>
+            <a:pPr algn="l" indent="0" marL="0">
+              <a:buNone/>
+            </a:pPr>
+            <a:r>
+              <a:rPr lang="en-US" sz="1800" b="1" dirty="0">
+                <a:solidFill>
+                  <a:srgbClr val="1C2230"/>
+                </a:solidFill>
+                <a:latin typeface="Arial" pitchFamily="34" charset="0"/>
+                <a:ea typeface="Arial" pitchFamily="34" charset="-122"/>
+                <a:cs typeface="Arial" pitchFamily="34" charset="-120"/>
+              </a:rPr>
+              <a:t>LINK</a:t>
+            </a:r>
+            <a:pPr algn="l" indent="0" marL="0">
+              <a:buNone/>
+            </a:pPr>
+            <a:r>
+              <a:rPr lang="en-US" sz="1800" b="1" dirty="0">
+                <a:solidFill>
+                  <a:srgbClr val="38B6FF"/>
+                </a:solidFill>
+                <a:latin typeface="Arial" pitchFamily="34" charset="0"/>
+                <a:ea typeface="Arial" pitchFamily="34" charset="-122"/>
+                <a:cs typeface="Arial" pitchFamily="34" charset="-120"/>
+              </a:rPr>
+              <a:t>.</a:t>
+            </a:r>
+            <a:endParaRPr lang="en-US" sz="1800" dirty="0"/>
+          </a:p>
+        </p:txBody>
+      </p:sp>
+      <p:sp>
+        <p:nvSpPr>
+          <p:cNvPr id="3" name="Text 1"/>
+          <p:cNvSpPr txBox="1"/>
+          <p:nvPr/>
+        </p:nvSpPr>
+        <p:spPr>
+          <a:xfrm>
+            <a:off x="609598" y="6381734"/>
+            <a:ext cx="5714986" cy="228599"/>
+          </a:xfrm>
+          <a:prstGeom prst="rect">
+            <a:avLst/>
+          </a:prstGeom>
+          <a:noFill/>
+          <a:ln/>
+        </p:spPr>
+        <p:txBody>
+          <a:bodyPr wrap="square" lIns="0" tIns="0" rIns="0" bIns="0" rtlCol="0" anchor="ctr"/>
+          <a:lstStyle/>
+          <a:p>
+            <a:pPr algn="l" indent="0" marL="0">
+              <a:buNone/>
+            </a:pPr>
+            <a:r>
+              <a:rPr lang="en-US" sz="750" b="1" spc="100" kern="0" dirty="0">
+                <a:solidFill>
+                  <a:srgbClr val="6F6A5C"/>
+                </a:solidFill>
+                <a:latin typeface="Arial" pitchFamily="34" charset="0"/>
+                <a:ea typeface="Arial" pitchFamily="34" charset="-122"/>
+                <a:cs typeface="Arial" pitchFamily="34" charset="-120"/>
+              </a:rPr>
+              <a:t>LINK. · Voorstel CentreBlock</a:t>
+            </a:r>
+            <a:endParaRPr lang="en-US" sz="750" dirty="0"/>
+          </a:p>
+        </p:txBody>
+      </p:sp>
+      <p:sp>
+        <p:nvSpPr>
+          <p:cNvPr id="4" name="Text 2"/>
+          <p:cNvSpPr txBox="1"/>
+          <p:nvPr/>
+        </p:nvSpPr>
+        <p:spPr>
+          <a:xfrm>
+            <a:off x="9677376" y="6381734"/>
+            <a:ext cx="1904995" cy="228599"/>
+          </a:xfrm>
+          <a:prstGeom prst="rect">
+            <a:avLst/>
+          </a:prstGeom>
+          <a:noFill/>
+          <a:ln/>
+        </p:spPr>
+        <p:txBody>
+          <a:bodyPr wrap="square" lIns="0" tIns="0" rIns="0" bIns="0" rtlCol="0" anchor="ctr"/>
+          <a:lstStyle/>
+          <a:p>
+            <a:pPr algn="r" indent="0" marL="0">
+              <a:buNone/>
+            </a:pPr>
+            <a:r>
+              <a:rPr lang="en-US" sz="750" b="1" spc="100" kern="0" dirty="0">
+                <a:solidFill>
+                  <a:srgbClr val="6F6A5C"/>
+                </a:solidFill>
+                <a:latin typeface="Arial" pitchFamily="34" charset="0"/>
+                <a:ea typeface="Arial" pitchFamily="34" charset="-122"/>
+                <a:cs typeface="Arial" pitchFamily="34" charset="-120"/>
+              </a:rPr>
+              <a:t>10 / 11</a:t>
+            </a:r>
+            <a:endParaRPr lang="en-US" sz="750" dirty="0"/>
+          </a:p>
+        </p:txBody>
+      </p:sp>
+      <p:sp>
+        <p:nvSpPr>
+          <p:cNvPr id="5" name="Text 3"/>
+          <p:cNvSpPr txBox="1"/>
+          <p:nvPr/>
+        </p:nvSpPr>
+        <p:spPr>
+          <a:xfrm>
+            <a:off x="609598" y="1206497"/>
+            <a:ext cx="10159975" cy="215899"/>
+          </a:xfrm>
+          <a:prstGeom prst="rect">
+            <a:avLst/>
+          </a:prstGeom>
+          <a:noFill/>
+          <a:ln/>
+        </p:spPr>
+        <p:txBody>
+          <a:bodyPr wrap="square" lIns="0" tIns="0" rIns="0" bIns="0" rtlCol="0" anchor="ctr"/>
+          <a:lstStyle/>
+          <a:p>
+            <a:pPr algn="l" indent="0" marL="0">
+              <a:buNone/>
+            </a:pPr>
+            <a:r>
+              <a:rPr lang="en-US" sz="950" b="1" spc="400" kern="0" dirty="0">
+                <a:solidFill>
+                  <a:srgbClr val="38B6FF"/>
+                </a:solidFill>
+                <a:latin typeface="Arial" pitchFamily="34" charset="0"/>
+                <a:ea typeface="Arial" pitchFamily="34" charset="-122"/>
+                <a:cs typeface="Arial" pitchFamily="34" charset="-120"/>
+              </a:rPr>
+              <a:t>SPELREGELS</a:t>
+            </a:r>
+            <a:endParaRPr lang="en-US" sz="950" dirty="0"/>
+          </a:p>
+        </p:txBody>
+      </p:sp>
+      <p:sp>
+        <p:nvSpPr>
+          <p:cNvPr id="6" name="Text 4"/>
+          <p:cNvSpPr txBox="1"/>
+          <p:nvPr/>
+        </p:nvSpPr>
+        <p:spPr>
+          <a:xfrm>
+            <a:off x="609598" y="1511296"/>
+            <a:ext cx="10972773" cy="1142997"/>
+          </a:xfrm>
+          <a:prstGeom prst="rect">
+            <a:avLst/>
+          </a:prstGeom>
+          <a:noFill/>
+          <a:ln/>
+        </p:spPr>
+        <p:txBody>
+          <a:bodyPr wrap="square" lIns="0" tIns="0" rIns="0" bIns="0" rtlCol="0" anchor="t"/>
+          <a:lstStyle/>
+          <a:p>
+            <a:pPr algn="l" indent="0" marL="0">
+              <a:lnSpc>
+                <a:spcPct val="108000"/>
+              </a:lnSpc>
+              <a:buNone/>
+            </a:pPr>
+            <a:r>
+              <a:rPr lang="en-US" sz="3200" b="1" dirty="0">
+                <a:solidFill>
+                  <a:srgbClr val="1C2230"/>
+                </a:solidFill>
+                <a:latin typeface="Arial" pitchFamily="34" charset="0"/>
+                <a:ea typeface="Arial" pitchFamily="34" charset="-122"/>
+                <a:cs typeface="Arial" pitchFamily="34" charset="-120"/>
+              </a:rPr>
+              <a:t>Transparant en zonder </a:t>
+            </a:r>
+            <a:pPr algn="l" indent="0" marL="0">
+              <a:lnSpc>
+                <a:spcPct val="108000"/>
+              </a:lnSpc>
+              <a:buNone/>
+            </a:pPr>
+            <a:r>
+              <a:rPr lang="en-US" sz="3000" i="1" dirty="0">
+                <a:solidFill>
+                  <a:srgbClr val="1C2230"/>
+                </a:solidFill>
+                <a:latin typeface="Georgia" pitchFamily="34" charset="0"/>
+                <a:ea typeface="Georgia" pitchFamily="34" charset="-122"/>
+                <a:cs typeface="Georgia" pitchFamily="34" charset="-120"/>
+              </a:rPr>
+              <a:t>kleine lettertjes</a:t>
+            </a:r>
+            <a:pPr algn="l" indent="0" marL="0">
+              <a:lnSpc>
+                <a:spcPct val="108000"/>
+              </a:lnSpc>
+              <a:buNone/>
+            </a:pPr>
+            <a:r>
+              <a:rPr lang="en-US" sz="3200" b="1" dirty="0">
+                <a:solidFill>
+                  <a:srgbClr val="1C2230"/>
+                </a:solidFill>
+                <a:latin typeface="Arial" pitchFamily="34" charset="0"/>
+                <a:ea typeface="Arial" pitchFamily="34" charset="-122"/>
+                <a:cs typeface="Arial" pitchFamily="34" charset="-120"/>
+              </a:rPr>
+              <a:t>.</a:t>
+            </a:r>
+            <a:endParaRPr lang="en-US" sz="3200" dirty="0"/>
+          </a:p>
+        </p:txBody>
+      </p:sp>
+      <p:sp>
+        <p:nvSpPr>
+          <p:cNvPr id="7" name="Shape 5"/>
+          <p:cNvSpPr/>
+          <p:nvPr/>
+        </p:nvSpPr>
+        <p:spPr>
+          <a:xfrm>
+            <a:off x="609598" y="2819393"/>
+            <a:ext cx="253999" cy="253999"/>
+          </a:xfrm>
+          <a:prstGeom prst="roundRect">
+            <a:avLst>
+              <a:gd name="adj" fmla="val 25000"/>
+            </a:avLst>
+          </a:prstGeom>
+          <a:solidFill>
+            <a:srgbClr val="DDEBF3"/>
+          </a:solidFill>
+          <a:ln/>
+        </p:spPr>
+      </p:sp>
+      <p:pic>
+        <p:nvPicPr>
+          <p:cNvPr id="8" name="Image 0" descr="preencoded.png">    </p:cNvPr>
+          <p:cNvPicPr>
+            <a:picLocks noChangeAspect="1"/>
+          </p:cNvPicPr>
+          <p:nvPr/>
+        </p:nvPicPr>
+        <p:blipFill>
+          <a:blip r:embed="rId1"/>
+          <a:stretch>
+            <a:fillRect/>
+          </a:stretch>
+        </p:blipFill>
+        <p:spPr>
+          <a:xfrm>
+            <a:off x="666748" y="2876543"/>
+            <a:ext cx="139700" cy="139700"/>
+          </a:xfrm>
+          <a:prstGeom prst="rect">
+            <a:avLst/>
+          </a:prstGeom>
+        </p:spPr>
+      </p:pic>
+      <p:sp>
+        <p:nvSpPr>
+          <p:cNvPr id="9" name="Text 6"/>
+          <p:cNvSpPr txBox="1"/>
+          <p:nvPr/>
+        </p:nvSpPr>
+        <p:spPr>
+          <a:xfrm>
+            <a:off x="1015997" y="2793993"/>
+            <a:ext cx="4825988" cy="228599"/>
+          </a:xfrm>
+          <a:prstGeom prst="rect">
+            <a:avLst/>
+          </a:prstGeom>
+          <a:noFill/>
+          <a:ln/>
+        </p:spPr>
+        <p:txBody>
+          <a:bodyPr wrap="square" lIns="0" tIns="0" rIns="0" bIns="0" rtlCol="0" anchor="ctr"/>
+          <a:lstStyle/>
+          <a:p>
+            <a:pPr indent="0" marL="0">
+              <a:buNone/>
+            </a:pPr>
+            <a:r>
+              <a:rPr lang="en-US" sz="1200" b="1" dirty="0">
+                <a:solidFill>
+                  <a:srgbClr val="1C2230"/>
+                </a:solidFill>
+                <a:latin typeface="Arial" pitchFamily="34" charset="0"/>
+                <a:ea typeface="Arial" pitchFamily="34" charset="-122"/>
+                <a:cs typeface="Arial" pitchFamily="34" charset="-120"/>
+              </a:rPr>
+              <a:t>Geen pilot vooraf</a:t>
+            </a:r>
+            <a:endParaRPr lang="en-US" sz="1200" dirty="0"/>
+          </a:p>
+        </p:txBody>
+      </p:sp>
+      <p:sp>
+        <p:nvSpPr>
+          <p:cNvPr id="10" name="Text 7"/>
+          <p:cNvSpPr txBox="1"/>
+          <p:nvPr/>
+        </p:nvSpPr>
+        <p:spPr>
+          <a:xfrm>
+            <a:off x="1015997" y="3035292"/>
+            <a:ext cx="4825988" cy="355599"/>
+          </a:xfrm>
+          <a:prstGeom prst="rect">
+            <a:avLst/>
+          </a:prstGeom>
+          <a:noFill/>
+          <a:ln/>
+        </p:spPr>
+        <p:txBody>
+          <a:bodyPr wrap="square" lIns="0" tIns="0" rIns="0" bIns="0" rtlCol="0" anchor="t"/>
+          <a:lstStyle/>
+          <a:p>
+            <a:pPr indent="0" marL="0">
+              <a:lnSpc>
+                <a:spcPct val="130000"/>
+              </a:lnSpc>
+              <a:buNone/>
+            </a:pPr>
+            <a:r>
+              <a:rPr lang="en-US" sz="950" dirty="0">
+                <a:solidFill>
+                  <a:srgbClr val="6F6A5C"/>
+                </a:solidFill>
+                <a:latin typeface="Arial" pitchFamily="34" charset="0"/>
+                <a:ea typeface="Arial" pitchFamily="34" charset="-122"/>
+                <a:cs typeface="Arial" pitchFamily="34" charset="-120"/>
+              </a:rPr>
+              <a:t>Normaal starten we met een pilot van € 4.950. Voor klanten van CentreBlock vervalt die, tegen een opstart van € 695.</a:t>
+            </a:r>
+            <a:endParaRPr lang="en-US" sz="950" dirty="0"/>
+          </a:p>
+        </p:txBody>
+      </p:sp>
+      <p:sp>
+        <p:nvSpPr>
+          <p:cNvPr id="11" name="Shape 8"/>
+          <p:cNvSpPr/>
+          <p:nvPr/>
+        </p:nvSpPr>
+        <p:spPr>
+          <a:xfrm>
+            <a:off x="6349984" y="2819393"/>
+            <a:ext cx="253999" cy="253999"/>
+          </a:xfrm>
+          <a:prstGeom prst="roundRect">
+            <a:avLst>
+              <a:gd name="adj" fmla="val 25000"/>
+            </a:avLst>
+          </a:prstGeom>
+          <a:solidFill>
+            <a:srgbClr val="DDEBF3"/>
+          </a:solidFill>
+          <a:ln/>
+        </p:spPr>
+      </p:sp>
+      <p:pic>
+        <p:nvPicPr>
+          <p:cNvPr id="12" name="Image 1" descr="preencoded.png">    </p:cNvPr>
+          <p:cNvPicPr>
+            <a:picLocks noChangeAspect="1"/>
+          </p:cNvPicPr>
+          <p:nvPr/>
+        </p:nvPicPr>
+        <p:blipFill>
+          <a:blip r:embed="rId2"/>
+          <a:stretch>
+            <a:fillRect/>
+          </a:stretch>
+        </p:blipFill>
+        <p:spPr>
+          <a:xfrm>
+            <a:off x="6407134" y="2876543"/>
+            <a:ext cx="139700" cy="139700"/>
+          </a:xfrm>
+          <a:prstGeom prst="rect">
+            <a:avLst/>
+          </a:prstGeom>
+        </p:spPr>
+      </p:pic>
+      <p:sp>
+        <p:nvSpPr>
+          <p:cNvPr id="13" name="Text 9"/>
+          <p:cNvSpPr txBox="1"/>
+          <p:nvPr/>
+        </p:nvSpPr>
+        <p:spPr>
+          <a:xfrm>
+            <a:off x="6756383" y="2793993"/>
+            <a:ext cx="4825988" cy="228599"/>
+          </a:xfrm>
+          <a:prstGeom prst="rect">
+            <a:avLst/>
+          </a:prstGeom>
+          <a:noFill/>
+          <a:ln/>
+        </p:spPr>
+        <p:txBody>
+          <a:bodyPr wrap="square" lIns="0" tIns="0" rIns="0" bIns="0" rtlCol="0" anchor="ctr"/>
+          <a:lstStyle/>
+          <a:p>
+            <a:pPr indent="0" marL="0">
+              <a:buNone/>
+            </a:pPr>
+            <a:r>
+              <a:rPr lang="en-US" sz="1200" b="1" dirty="0">
+                <a:solidFill>
+                  <a:srgbClr val="1C2230"/>
+                </a:solidFill>
+                <a:latin typeface="Arial" pitchFamily="34" charset="0"/>
+                <a:ea typeface="Arial" pitchFamily="34" charset="-122"/>
+                <a:cs typeface="Arial" pitchFamily="34" charset="-120"/>
+              </a:rPr>
+              <a:t>Maand opzegtermijn</a:t>
+            </a:r>
+            <a:endParaRPr lang="en-US" sz="1200" dirty="0"/>
+          </a:p>
+        </p:txBody>
+      </p:sp>
+      <p:sp>
+        <p:nvSpPr>
+          <p:cNvPr id="14" name="Text 10"/>
+          <p:cNvSpPr txBox="1"/>
+          <p:nvPr/>
+        </p:nvSpPr>
+        <p:spPr>
+          <a:xfrm>
+            <a:off x="6756383" y="3035292"/>
+            <a:ext cx="4825988" cy="355599"/>
+          </a:xfrm>
+          <a:prstGeom prst="rect">
+            <a:avLst/>
+          </a:prstGeom>
+          <a:noFill/>
+          <a:ln/>
+        </p:spPr>
+        <p:txBody>
+          <a:bodyPr wrap="square" lIns="0" tIns="0" rIns="0" bIns="0" rtlCol="0" anchor="t"/>
+          <a:lstStyle/>
+          <a:p>
+            <a:pPr indent="0" marL="0">
+              <a:lnSpc>
+                <a:spcPct val="130000"/>
+              </a:lnSpc>
+              <a:buNone/>
+            </a:pPr>
+            <a:r>
+              <a:rPr lang="en-US" sz="950" dirty="0">
+                <a:solidFill>
+                  <a:srgbClr val="6F6A5C"/>
+                </a:solidFill>
+                <a:latin typeface="Arial" pitchFamily="34" charset="0"/>
+                <a:ea typeface="Arial" pitchFamily="34" charset="-122"/>
+                <a:cs typeface="Arial" pitchFamily="34" charset="-120"/>
+              </a:rPr>
+              <a:t>Vastgelegd, met een maand opzegtermijn. Geen jaarcontract.</a:t>
+            </a:r>
+            <a:endParaRPr lang="en-US" sz="950" dirty="0"/>
+          </a:p>
+        </p:txBody>
+      </p:sp>
+      <p:sp>
+        <p:nvSpPr>
+          <p:cNvPr id="15" name="Shape 11"/>
+          <p:cNvSpPr/>
+          <p:nvPr/>
+        </p:nvSpPr>
+        <p:spPr>
+          <a:xfrm>
+            <a:off x="609598" y="3428991"/>
+            <a:ext cx="5232387" cy="0"/>
+          </a:xfrm>
+          <a:prstGeom prst="line">
+            <a:avLst/>
+          </a:prstGeom>
+          <a:noFill/>
+          <a:ln w="6350">
+            <a:solidFill>
+              <a:srgbClr val="C9C2B2"/>
+            </a:solidFill>
+            <a:prstDash val="solid"/>
+          </a:ln>
+        </p:spPr>
+      </p:sp>
+      <p:sp>
+        <p:nvSpPr>
+          <p:cNvPr id="16" name="Shape 12"/>
+          <p:cNvSpPr/>
+          <p:nvPr/>
+        </p:nvSpPr>
+        <p:spPr>
+          <a:xfrm>
+            <a:off x="609598" y="3530591"/>
+            <a:ext cx="253999" cy="253999"/>
+          </a:xfrm>
+          <a:prstGeom prst="roundRect">
+            <a:avLst>
+              <a:gd name="adj" fmla="val 25000"/>
+            </a:avLst>
+          </a:prstGeom>
+          <a:solidFill>
+            <a:srgbClr val="DDEBF3"/>
+          </a:solidFill>
+          <a:ln/>
+        </p:spPr>
+      </p:sp>
+      <p:pic>
+        <p:nvPicPr>
+          <p:cNvPr id="17" name="Image 2" descr="preencoded.png">    </p:cNvPr>
+          <p:cNvPicPr>
+            <a:picLocks noChangeAspect="1"/>
+          </p:cNvPicPr>
+          <p:nvPr/>
+        </p:nvPicPr>
+        <p:blipFill>
+          <a:blip r:embed="rId3"/>
+          <a:stretch>
+            <a:fillRect/>
+          </a:stretch>
+        </p:blipFill>
+        <p:spPr>
+          <a:xfrm>
+            <a:off x="666748" y="3587741"/>
+            <a:ext cx="139700" cy="139700"/>
+          </a:xfrm>
+          <a:prstGeom prst="rect">
+            <a:avLst/>
+          </a:prstGeom>
+        </p:spPr>
+      </p:pic>
+      <p:sp>
+        <p:nvSpPr>
+          <p:cNvPr id="18" name="Text 13"/>
+          <p:cNvSpPr txBox="1"/>
+          <p:nvPr/>
+        </p:nvSpPr>
+        <p:spPr>
+          <a:xfrm>
+            <a:off x="1015997" y="3505191"/>
+            <a:ext cx="4825988" cy="228599"/>
+          </a:xfrm>
+          <a:prstGeom prst="rect">
+            <a:avLst/>
+          </a:prstGeom>
+          <a:noFill/>
+          <a:ln/>
+        </p:spPr>
+        <p:txBody>
+          <a:bodyPr wrap="square" lIns="0" tIns="0" rIns="0" bIns="0" rtlCol="0" anchor="ctr"/>
+          <a:lstStyle/>
+          <a:p>
+            <a:pPr indent="0" marL="0">
+              <a:buNone/>
+            </a:pPr>
+            <a:r>
+              <a:rPr lang="en-US" sz="1200" b="1" dirty="0">
+                <a:solidFill>
+                  <a:srgbClr val="1C2230"/>
+                </a:solidFill>
+                <a:latin typeface="Arial" pitchFamily="34" charset="0"/>
+                <a:ea typeface="Arial" pitchFamily="34" charset="-122"/>
+                <a:cs typeface="Arial" pitchFamily="34" charset="-120"/>
+              </a:rPr>
+              <a:t>Vanaf 2 beldagen per 4 weken</a:t>
+            </a:r>
+            <a:endParaRPr lang="en-US" sz="1200" dirty="0"/>
+          </a:p>
+        </p:txBody>
+      </p:sp>
+      <p:sp>
+        <p:nvSpPr>
+          <p:cNvPr id="19" name="Text 14"/>
+          <p:cNvSpPr txBox="1"/>
+          <p:nvPr/>
+        </p:nvSpPr>
+        <p:spPr>
+          <a:xfrm>
+            <a:off x="1015997" y="3746491"/>
+            <a:ext cx="4825988" cy="355599"/>
+          </a:xfrm>
+          <a:prstGeom prst="rect">
+            <a:avLst/>
+          </a:prstGeom>
+          <a:noFill/>
+          <a:ln/>
+        </p:spPr>
+        <p:txBody>
+          <a:bodyPr wrap="square" lIns="0" tIns="0" rIns="0" bIns="0" rtlCol="0" anchor="t"/>
+          <a:lstStyle/>
+          <a:p>
+            <a:pPr indent="0" marL="0">
+              <a:lnSpc>
+                <a:spcPct val="130000"/>
+              </a:lnSpc>
+              <a:buNone/>
+            </a:pPr>
+            <a:r>
+              <a:rPr lang="en-US" sz="950" dirty="0">
+                <a:solidFill>
+                  <a:srgbClr val="6F6A5C"/>
+                </a:solidFill>
+                <a:latin typeface="Arial" pitchFamily="34" charset="0"/>
+                <a:ea typeface="Arial" pitchFamily="34" charset="-122"/>
+                <a:cs typeface="Arial" pitchFamily="34" charset="-120"/>
+              </a:rPr>
+              <a:t>Onze ondergrens is normaal vier. Voor dit partnership twee. Vooraf gefactureerd.</a:t>
+            </a:r>
+            <a:endParaRPr lang="en-US" sz="950" dirty="0"/>
+          </a:p>
+        </p:txBody>
+      </p:sp>
+      <p:sp>
+        <p:nvSpPr>
+          <p:cNvPr id="20" name="Shape 15"/>
+          <p:cNvSpPr/>
+          <p:nvPr/>
+        </p:nvSpPr>
+        <p:spPr>
+          <a:xfrm>
+            <a:off x="6349984" y="3428991"/>
+            <a:ext cx="5232387" cy="0"/>
+          </a:xfrm>
+          <a:prstGeom prst="line">
+            <a:avLst/>
+          </a:prstGeom>
+          <a:noFill/>
+          <a:ln w="6350">
+            <a:solidFill>
+              <a:srgbClr val="C9C2B2"/>
+            </a:solidFill>
+            <a:prstDash val="solid"/>
+          </a:ln>
+        </p:spPr>
+      </p:sp>
+      <p:sp>
+        <p:nvSpPr>
+          <p:cNvPr id="21" name="Shape 16"/>
+          <p:cNvSpPr/>
+          <p:nvPr/>
+        </p:nvSpPr>
+        <p:spPr>
+          <a:xfrm>
+            <a:off x="6349984" y="3530591"/>
+            <a:ext cx="253999" cy="253999"/>
+          </a:xfrm>
+          <a:prstGeom prst="roundRect">
+            <a:avLst>
+              <a:gd name="adj" fmla="val 25000"/>
+            </a:avLst>
+          </a:prstGeom>
+          <a:solidFill>
+            <a:srgbClr val="DDEBF3"/>
+          </a:solidFill>
+          <a:ln/>
+        </p:spPr>
+      </p:sp>
+      <p:pic>
+        <p:nvPicPr>
+          <p:cNvPr id="22" name="Image 3" descr="preencoded.png">    </p:cNvPr>
+          <p:cNvPicPr>
+            <a:picLocks noChangeAspect="1"/>
+          </p:cNvPicPr>
+          <p:nvPr/>
+        </p:nvPicPr>
+        <p:blipFill>
+          <a:blip r:embed="rId4"/>
+          <a:stretch>
+            <a:fillRect/>
+          </a:stretch>
+        </p:blipFill>
+        <p:spPr>
+          <a:xfrm>
+            <a:off x="6407134" y="3587741"/>
+            <a:ext cx="139700" cy="139700"/>
+          </a:xfrm>
+          <a:prstGeom prst="rect">
+            <a:avLst/>
+          </a:prstGeom>
+        </p:spPr>
+      </p:pic>
+      <p:sp>
+        <p:nvSpPr>
+          <p:cNvPr id="23" name="Text 17"/>
+          <p:cNvSpPr txBox="1"/>
+          <p:nvPr/>
+        </p:nvSpPr>
+        <p:spPr>
+          <a:xfrm>
+            <a:off x="6756383" y="3505191"/>
+            <a:ext cx="4825988" cy="228599"/>
+          </a:xfrm>
+          <a:prstGeom prst="rect">
+            <a:avLst/>
+          </a:prstGeom>
+          <a:noFill/>
+          <a:ln/>
+        </p:spPr>
+        <p:txBody>
+          <a:bodyPr wrap="square" lIns="0" tIns="0" rIns="0" bIns="0" rtlCol="0" anchor="ctr"/>
+          <a:lstStyle/>
+          <a:p>
+            <a:pPr indent="0" marL="0">
+              <a:buNone/>
+            </a:pPr>
+            <a:r>
+              <a:rPr lang="en-US" sz="1200" b="1" dirty="0">
+                <a:solidFill>
+                  <a:srgbClr val="1C2230"/>
+                </a:solidFill>
+                <a:latin typeface="Arial" pitchFamily="34" charset="0"/>
+                <a:ea typeface="Arial" pitchFamily="34" charset="-122"/>
+                <a:cs typeface="Arial" pitchFamily="34" charset="-120"/>
+              </a:rPr>
+              <a:t>Bestaande relaties blijven van de klant</a:t>
+            </a:r>
+            <a:endParaRPr lang="en-US" sz="1200" dirty="0"/>
+          </a:p>
+        </p:txBody>
+      </p:sp>
+      <p:sp>
+        <p:nvSpPr>
+          <p:cNvPr id="24" name="Text 18"/>
+          <p:cNvSpPr txBox="1"/>
+          <p:nvPr/>
+        </p:nvSpPr>
+        <p:spPr>
+          <a:xfrm>
+            <a:off x="6756383" y="3746491"/>
+            <a:ext cx="4825988" cy="355599"/>
+          </a:xfrm>
+          <a:prstGeom prst="rect">
+            <a:avLst/>
+          </a:prstGeom>
+          <a:noFill/>
+          <a:ln/>
+        </p:spPr>
+        <p:txBody>
+          <a:bodyPr wrap="square" lIns="0" tIns="0" rIns="0" bIns="0" rtlCol="0" anchor="t"/>
+          <a:lstStyle/>
+          <a:p>
+            <a:pPr indent="0" marL="0">
+              <a:lnSpc>
+                <a:spcPct val="130000"/>
+              </a:lnSpc>
+              <a:buNone/>
+            </a:pPr>
+            <a:r>
+              <a:rPr lang="en-US" sz="950" dirty="0">
+                <a:solidFill>
+                  <a:srgbClr val="6F6A5C"/>
+                </a:solidFill>
+                <a:latin typeface="Arial" pitchFamily="34" charset="0"/>
+                <a:ea typeface="Arial" pitchFamily="34" charset="-122"/>
+                <a:cs typeface="Arial" pitchFamily="34" charset="-120"/>
+              </a:rPr>
+              <a:t>Uitsluitlijst vooraf, die bedrijven benaderen wij niet.</a:t>
+            </a:r>
+            <a:endParaRPr lang="en-US" sz="950" dirty="0"/>
+          </a:p>
+        </p:txBody>
+      </p:sp>
+      <p:sp>
+        <p:nvSpPr>
+          <p:cNvPr id="25" name="Shape 19"/>
+          <p:cNvSpPr/>
+          <p:nvPr/>
+        </p:nvSpPr>
+        <p:spPr>
+          <a:xfrm>
+            <a:off x="609598" y="4140190"/>
+            <a:ext cx="5232387" cy="0"/>
+          </a:xfrm>
+          <a:prstGeom prst="line">
+            <a:avLst/>
+          </a:prstGeom>
+          <a:noFill/>
+          <a:ln w="6350">
+            <a:solidFill>
+              <a:srgbClr val="C9C2B2"/>
+            </a:solidFill>
+            <a:prstDash val="solid"/>
+          </a:ln>
+        </p:spPr>
+      </p:sp>
+      <p:sp>
+        <p:nvSpPr>
+          <p:cNvPr id="26" name="Shape 20"/>
+          <p:cNvSpPr/>
+          <p:nvPr/>
+        </p:nvSpPr>
+        <p:spPr>
+          <a:xfrm>
+            <a:off x="609598" y="4241789"/>
+            <a:ext cx="253999" cy="253999"/>
+          </a:xfrm>
+          <a:prstGeom prst="roundRect">
+            <a:avLst>
+              <a:gd name="adj" fmla="val 25000"/>
+            </a:avLst>
+          </a:prstGeom>
+          <a:solidFill>
+            <a:srgbClr val="DDEBF3"/>
+          </a:solidFill>
+          <a:ln/>
+        </p:spPr>
+      </p:sp>
+      <p:pic>
+        <p:nvPicPr>
+          <p:cNvPr id="27" name="Image 4" descr="preencoded.png">    </p:cNvPr>
+          <p:cNvPicPr>
+            <a:picLocks noChangeAspect="1"/>
+          </p:cNvPicPr>
+          <p:nvPr/>
+        </p:nvPicPr>
+        <p:blipFill>
+          <a:blip r:embed="rId5"/>
+          <a:stretch>
+            <a:fillRect/>
+          </a:stretch>
+        </p:blipFill>
+        <p:spPr>
+          <a:xfrm>
+            <a:off x="666748" y="4298939"/>
+            <a:ext cx="139700" cy="139700"/>
+          </a:xfrm>
+          <a:prstGeom prst="rect">
+            <a:avLst/>
+          </a:prstGeom>
+        </p:spPr>
+      </p:pic>
+      <p:sp>
+        <p:nvSpPr>
+          <p:cNvPr id="28" name="Text 21"/>
+          <p:cNvSpPr txBox="1"/>
+          <p:nvPr/>
+        </p:nvSpPr>
+        <p:spPr>
+          <a:xfrm>
+            <a:off x="1015997" y="4216389"/>
+            <a:ext cx="4825988" cy="228599"/>
+          </a:xfrm>
+          <a:prstGeom prst="rect">
+            <a:avLst/>
+          </a:prstGeom>
+          <a:noFill/>
+          <a:ln/>
+        </p:spPr>
+        <p:txBody>
+          <a:bodyPr wrap="square" lIns="0" tIns="0" rIns="0" bIns="0" rtlCol="0" anchor="ctr"/>
+          <a:lstStyle/>
+          <a:p>
+            <a:pPr indent="0" marL="0">
+              <a:buNone/>
+            </a:pPr>
+            <a:r>
+              <a:rPr lang="en-US" sz="1200" b="1" dirty="0">
+                <a:solidFill>
+                  <a:srgbClr val="1C2230"/>
+                </a:solidFill>
+                <a:latin typeface="Arial" pitchFamily="34" charset="0"/>
+                <a:ea typeface="Arial" pitchFamily="34" charset="-122"/>
+                <a:cs typeface="Arial" pitchFamily="34" charset="-120"/>
+              </a:rPr>
+              <a:t>Wekelijkse rapportage</a:t>
+            </a:r>
+            <a:endParaRPr lang="en-US" sz="1200" dirty="0"/>
+          </a:p>
+        </p:txBody>
+      </p:sp>
+      <p:sp>
+        <p:nvSpPr>
+          <p:cNvPr id="29" name="Text 22"/>
+          <p:cNvSpPr txBox="1"/>
+          <p:nvPr/>
+        </p:nvSpPr>
+        <p:spPr>
+          <a:xfrm>
+            <a:off x="1015997" y="4457689"/>
+            <a:ext cx="4825988" cy="355599"/>
+          </a:xfrm>
+          <a:prstGeom prst="rect">
+            <a:avLst/>
+          </a:prstGeom>
+          <a:noFill/>
+          <a:ln/>
+        </p:spPr>
+        <p:txBody>
+          <a:bodyPr wrap="square" lIns="0" tIns="0" rIns="0" bIns="0" rtlCol="0" anchor="t"/>
+          <a:lstStyle/>
+          <a:p>
+            <a:pPr indent="0" marL="0">
+              <a:lnSpc>
+                <a:spcPct val="130000"/>
+              </a:lnSpc>
+              <a:buNone/>
+            </a:pPr>
+            <a:r>
+              <a:rPr lang="en-US" sz="950" dirty="0">
+                <a:solidFill>
+                  <a:srgbClr val="6F6A5C"/>
+                </a:solidFill>
+                <a:latin typeface="Arial" pitchFamily="34" charset="0"/>
+                <a:ea typeface="Arial" pitchFamily="34" charset="-122"/>
+                <a:cs typeface="Arial" pitchFamily="34" charset="-120"/>
+              </a:rPr>
+              <a:t>Elke week zicht op wat er gebeurd is, voor de klant en voor CentreBlock.</a:t>
+            </a:r>
+            <a:endParaRPr lang="en-US" sz="950" dirty="0"/>
+          </a:p>
+        </p:txBody>
+      </p:sp>
+      <p:sp>
+        <p:nvSpPr>
+          <p:cNvPr id="30" name="Shape 23"/>
+          <p:cNvSpPr/>
+          <p:nvPr/>
+        </p:nvSpPr>
+        <p:spPr>
+          <a:xfrm>
+            <a:off x="6349984" y="4140190"/>
+            <a:ext cx="5232387" cy="0"/>
+          </a:xfrm>
+          <a:prstGeom prst="line">
+            <a:avLst/>
+          </a:prstGeom>
+          <a:noFill/>
+          <a:ln w="6350">
+            <a:solidFill>
+              <a:srgbClr val="C9C2B2"/>
+            </a:solidFill>
+            <a:prstDash val="solid"/>
+          </a:ln>
+        </p:spPr>
+      </p:sp>
+      <p:sp>
+        <p:nvSpPr>
+          <p:cNvPr id="31" name="Shape 24"/>
+          <p:cNvSpPr/>
+          <p:nvPr/>
+        </p:nvSpPr>
+        <p:spPr>
+          <a:xfrm>
+            <a:off x="6349984" y="4241789"/>
+            <a:ext cx="253999" cy="253999"/>
+          </a:xfrm>
+          <a:prstGeom prst="roundRect">
+            <a:avLst>
+              <a:gd name="adj" fmla="val 25000"/>
+            </a:avLst>
+          </a:prstGeom>
+          <a:solidFill>
+            <a:srgbClr val="DDEBF3"/>
+          </a:solidFill>
+          <a:ln/>
+        </p:spPr>
+      </p:sp>
+      <p:pic>
+        <p:nvPicPr>
+          <p:cNvPr id="32" name="Image 5" descr="preencoded.png">    </p:cNvPr>
+          <p:cNvPicPr>
+            <a:picLocks noChangeAspect="1"/>
+          </p:cNvPicPr>
+          <p:nvPr/>
+        </p:nvPicPr>
+        <p:blipFill>
+          <a:blip r:embed="rId6"/>
+          <a:stretch>
+            <a:fillRect/>
+          </a:stretch>
+        </p:blipFill>
+        <p:spPr>
+          <a:xfrm>
+            <a:off x="6407134" y="4298939"/>
+            <a:ext cx="139700" cy="139700"/>
+          </a:xfrm>
+          <a:prstGeom prst="rect">
+            <a:avLst/>
+          </a:prstGeom>
+        </p:spPr>
+      </p:pic>
+      <p:sp>
+        <p:nvSpPr>
+          <p:cNvPr id="33" name="Text 25"/>
+          <p:cNvSpPr txBox="1"/>
+          <p:nvPr/>
+        </p:nvSpPr>
+        <p:spPr>
+          <a:xfrm>
+            <a:off x="6756383" y="4216389"/>
+            <a:ext cx="4825988" cy="228599"/>
+          </a:xfrm>
+          <a:prstGeom prst="rect">
+            <a:avLst/>
+          </a:prstGeom>
+          <a:noFill/>
+          <a:ln/>
+        </p:spPr>
+        <p:txBody>
+          <a:bodyPr wrap="square" lIns="0" tIns="0" rIns="0" bIns="0" rtlCol="0" anchor="ctr"/>
+          <a:lstStyle/>
+          <a:p>
+            <a:pPr indent="0" marL="0">
+              <a:buNone/>
+            </a:pPr>
+            <a:r>
+              <a:rPr lang="en-US" sz="1200" b="1" dirty="0">
+                <a:solidFill>
+                  <a:srgbClr val="1C2230"/>
+                </a:solidFill>
+                <a:latin typeface="Arial" pitchFamily="34" charset="0"/>
+                <a:ea typeface="Arial" pitchFamily="34" charset="-122"/>
+                <a:cs typeface="Arial" pitchFamily="34" charset="-120"/>
+              </a:rPr>
+              <a:t>Hun naam, onze uitvoering</a:t>
+            </a:r>
+            <a:endParaRPr lang="en-US" sz="1200" dirty="0"/>
+          </a:p>
+        </p:txBody>
+      </p:sp>
+      <p:sp>
+        <p:nvSpPr>
+          <p:cNvPr id="34" name="Text 26"/>
+          <p:cNvSpPr txBox="1"/>
+          <p:nvPr/>
+        </p:nvSpPr>
+        <p:spPr>
+          <a:xfrm>
+            <a:off x="6756383" y="4457689"/>
+            <a:ext cx="4825988" cy="355599"/>
+          </a:xfrm>
+          <a:prstGeom prst="rect">
+            <a:avLst/>
+          </a:prstGeom>
+          <a:noFill/>
+          <a:ln/>
+        </p:spPr>
+        <p:txBody>
+          <a:bodyPr wrap="square" lIns="0" tIns="0" rIns="0" bIns="0" rtlCol="0" anchor="t"/>
+          <a:lstStyle/>
+          <a:p>
+            <a:pPr indent="0" marL="0">
+              <a:lnSpc>
+                <a:spcPct val="130000"/>
+              </a:lnSpc>
+              <a:buNone/>
+            </a:pPr>
+            <a:r>
+              <a:rPr lang="en-US" sz="950" dirty="0">
+                <a:solidFill>
+                  <a:srgbClr val="6F6A5C"/>
+                </a:solidFill>
+                <a:latin typeface="Arial" pitchFamily="34" charset="0"/>
+                <a:ea typeface="Arial" pitchFamily="34" charset="-122"/>
+                <a:cs typeface="Arial" pitchFamily="34" charset="-120"/>
+              </a:rPr>
+              <a:t>Regionaal nummer en de stijl van de klant, wij voeren uit.</a:t>
+            </a:r>
+            <a:endParaRPr lang="en-US" sz="950" dirty="0"/>
+          </a:p>
+        </p:txBody>
+      </p:sp>
+      <p:sp>
+        <p:nvSpPr>
+          <p:cNvPr id="35" name="Shape 27"/>
+          <p:cNvSpPr/>
+          <p:nvPr/>
+        </p:nvSpPr>
+        <p:spPr>
+          <a:xfrm>
+            <a:off x="609598" y="4851388"/>
+            <a:ext cx="5232387" cy="0"/>
+          </a:xfrm>
+          <a:prstGeom prst="line">
+            <a:avLst/>
+          </a:prstGeom>
+          <a:noFill/>
+          <a:ln w="6350">
+            <a:solidFill>
+              <a:srgbClr val="C9C2B2"/>
+            </a:solidFill>
+            <a:prstDash val="solid"/>
+          </a:ln>
+        </p:spPr>
+      </p:sp>
+      <p:sp>
+        <p:nvSpPr>
+          <p:cNvPr id="36" name="Shape 28"/>
+          <p:cNvSpPr/>
+          <p:nvPr/>
+        </p:nvSpPr>
+        <p:spPr>
+          <a:xfrm>
+            <a:off x="609598" y="4952988"/>
+            <a:ext cx="253999" cy="253999"/>
+          </a:xfrm>
+          <a:prstGeom prst="roundRect">
+            <a:avLst>
+              <a:gd name="adj" fmla="val 25000"/>
+            </a:avLst>
+          </a:prstGeom>
+          <a:solidFill>
+            <a:srgbClr val="DDEBF3"/>
+          </a:solidFill>
+          <a:ln/>
+        </p:spPr>
+      </p:sp>
+      <p:pic>
+        <p:nvPicPr>
+          <p:cNvPr id="37" name="Image 6" descr="preencoded.png">    </p:cNvPr>
+          <p:cNvPicPr>
+            <a:picLocks noChangeAspect="1"/>
+          </p:cNvPicPr>
+          <p:nvPr/>
+        </p:nvPicPr>
+        <p:blipFill>
+          <a:blip r:embed="rId7"/>
+          <a:stretch>
+            <a:fillRect/>
+          </a:stretch>
+        </p:blipFill>
+        <p:spPr>
+          <a:xfrm>
+            <a:off x="666748" y="5010137"/>
+            <a:ext cx="139700" cy="139700"/>
+          </a:xfrm>
+          <a:prstGeom prst="rect">
+            <a:avLst/>
+          </a:prstGeom>
+        </p:spPr>
+      </p:pic>
+      <p:sp>
+        <p:nvSpPr>
+          <p:cNvPr id="38" name="Text 29"/>
+          <p:cNvSpPr txBox="1"/>
+          <p:nvPr/>
+        </p:nvSpPr>
+        <p:spPr>
+          <a:xfrm>
+            <a:off x="1015997" y="4927588"/>
+            <a:ext cx="4825988" cy="228599"/>
+          </a:xfrm>
+          <a:prstGeom prst="rect">
+            <a:avLst/>
+          </a:prstGeom>
+          <a:noFill/>
+          <a:ln/>
+        </p:spPr>
+        <p:txBody>
+          <a:bodyPr wrap="square" lIns="0" tIns="0" rIns="0" bIns="0" rtlCol="0" anchor="ctr"/>
+          <a:lstStyle/>
+          <a:p>
+            <a:pPr indent="0" marL="0">
+              <a:buNone/>
+            </a:pPr>
+            <a:r>
+              <a:rPr lang="en-US" sz="1200" b="1" dirty="0">
+                <a:solidFill>
+                  <a:srgbClr val="1C2230"/>
+                </a:solidFill>
+                <a:latin typeface="Arial" pitchFamily="34" charset="0"/>
+                <a:ea typeface="Arial" pitchFamily="34" charset="-122"/>
+                <a:cs typeface="Arial" pitchFamily="34" charset="-120"/>
+              </a:rPr>
+              <a:t>Gegevens veilig</a:t>
+            </a:r>
+            <a:endParaRPr lang="en-US" sz="1200" dirty="0"/>
+          </a:p>
+        </p:txBody>
+      </p:sp>
+      <p:sp>
+        <p:nvSpPr>
+          <p:cNvPr id="39" name="Text 30"/>
+          <p:cNvSpPr txBox="1"/>
+          <p:nvPr/>
+        </p:nvSpPr>
+        <p:spPr>
+          <a:xfrm>
+            <a:off x="1015997" y="5168887"/>
+            <a:ext cx="4825988" cy="355599"/>
+          </a:xfrm>
+          <a:prstGeom prst="rect">
+            <a:avLst/>
+          </a:prstGeom>
+          <a:noFill/>
+          <a:ln/>
+        </p:spPr>
+        <p:txBody>
+          <a:bodyPr wrap="square" lIns="0" tIns="0" rIns="0" bIns="0" rtlCol="0" anchor="t"/>
+          <a:lstStyle/>
+          <a:p>
+            <a:pPr indent="0" marL="0">
+              <a:lnSpc>
+                <a:spcPct val="130000"/>
+              </a:lnSpc>
+              <a:buNone/>
+            </a:pPr>
+            <a:r>
+              <a:rPr lang="en-US" sz="950" dirty="0">
+                <a:solidFill>
+                  <a:srgbClr val="6F6A5C"/>
+                </a:solidFill>
+                <a:latin typeface="Arial" pitchFamily="34" charset="0"/>
+                <a:ea typeface="Arial" pitchFamily="34" charset="-122"/>
+                <a:cs typeface="Arial" pitchFamily="34" charset="-120"/>
+              </a:rPr>
+              <a:t>Vastgelegd in een verwerkersovereenkomst, per klant.</a:t>
+            </a:r>
+            <a:endParaRPr lang="en-US" sz="950" dirty="0"/>
+          </a:p>
+        </p:txBody>
+      </p:sp>
+      <p:sp>
+        <p:nvSpPr>
+          <p:cNvPr id="40" name="Shape 31"/>
+          <p:cNvSpPr/>
+          <p:nvPr/>
+        </p:nvSpPr>
+        <p:spPr>
+          <a:xfrm>
+            <a:off x="6349984" y="4851388"/>
+            <a:ext cx="5232387" cy="0"/>
+          </a:xfrm>
+          <a:prstGeom prst="line">
+            <a:avLst/>
+          </a:prstGeom>
+          <a:noFill/>
+          <a:ln w="6350">
+            <a:solidFill>
+              <a:srgbClr val="C9C2B2"/>
+            </a:solidFill>
+            <a:prstDash val="solid"/>
+          </a:ln>
+        </p:spPr>
+      </p:sp>
+      <p:sp>
+        <p:nvSpPr>
+          <p:cNvPr id="41" name="Shape 32"/>
+          <p:cNvSpPr/>
+          <p:nvPr/>
+        </p:nvSpPr>
+        <p:spPr>
+          <a:xfrm>
+            <a:off x="6349984" y="4952988"/>
+            <a:ext cx="253999" cy="253999"/>
+          </a:xfrm>
+          <a:prstGeom prst="roundRect">
+            <a:avLst>
+              <a:gd name="adj" fmla="val 25000"/>
+            </a:avLst>
+          </a:prstGeom>
+          <a:solidFill>
+            <a:srgbClr val="DDEBF3"/>
+          </a:solidFill>
+          <a:ln/>
+        </p:spPr>
+      </p:sp>
+      <p:pic>
+        <p:nvPicPr>
+          <p:cNvPr id="42" name="Image 7" descr="preencoded.png">    </p:cNvPr>
+          <p:cNvPicPr>
+            <a:picLocks noChangeAspect="1"/>
+          </p:cNvPicPr>
+          <p:nvPr/>
+        </p:nvPicPr>
+        <p:blipFill>
+          <a:blip r:embed="rId8"/>
+          <a:stretch>
+            <a:fillRect/>
+          </a:stretch>
+        </p:blipFill>
+        <p:spPr>
+          <a:xfrm>
+            <a:off x="6407134" y="5010137"/>
+            <a:ext cx="139700" cy="139700"/>
+          </a:xfrm>
+          <a:prstGeom prst="rect">
+            <a:avLst/>
+          </a:prstGeom>
+        </p:spPr>
+      </p:pic>
+      <p:sp>
+        <p:nvSpPr>
+          <p:cNvPr id="43" name="Text 33"/>
+          <p:cNvSpPr txBox="1"/>
+          <p:nvPr/>
+        </p:nvSpPr>
+        <p:spPr>
+          <a:xfrm>
+            <a:off x="6756383" y="4927588"/>
+            <a:ext cx="4825988" cy="228599"/>
+          </a:xfrm>
+          <a:prstGeom prst="rect">
+            <a:avLst/>
+          </a:prstGeom>
+          <a:noFill/>
+          <a:ln/>
+        </p:spPr>
+        <p:txBody>
+          <a:bodyPr wrap="square" lIns="0" tIns="0" rIns="0" bIns="0" rtlCol="0" anchor="ctr"/>
+          <a:lstStyle/>
+          <a:p>
+            <a:pPr indent="0" marL="0">
+              <a:buNone/>
+            </a:pPr>
+            <a:r>
+              <a:rPr lang="en-US" sz="1200" b="1" dirty="0">
+                <a:solidFill>
+                  <a:srgbClr val="1C2230"/>
+                </a:solidFill>
+                <a:latin typeface="Arial" pitchFamily="34" charset="0"/>
+                <a:ea typeface="Arial" pitchFamily="34" charset="-122"/>
+                <a:cs typeface="Arial" pitchFamily="34" charset="-120"/>
+              </a:rPr>
+              <a:t>Alles op papier</a:t>
+            </a:r>
+            <a:endParaRPr lang="en-US" sz="1200" dirty="0"/>
+          </a:p>
+        </p:txBody>
+      </p:sp>
+      <p:sp>
+        <p:nvSpPr>
+          <p:cNvPr id="44" name="Text 34"/>
+          <p:cNvSpPr txBox="1"/>
+          <p:nvPr/>
+        </p:nvSpPr>
+        <p:spPr>
+          <a:xfrm>
+            <a:off x="6756383" y="5168887"/>
+            <a:ext cx="4825988" cy="355599"/>
+          </a:xfrm>
+          <a:prstGeom prst="rect">
+            <a:avLst/>
+          </a:prstGeom>
+          <a:noFill/>
+          <a:ln/>
+        </p:spPr>
+        <p:txBody>
+          <a:bodyPr wrap="square" lIns="0" tIns="0" rIns="0" bIns="0" rtlCol="0" anchor="t"/>
+          <a:lstStyle/>
+          <a:p>
+            <a:pPr indent="0" marL="0">
+              <a:lnSpc>
+                <a:spcPct val="130000"/>
+              </a:lnSpc>
+              <a:buNone/>
+            </a:pPr>
+            <a:r>
+              <a:rPr lang="en-US" sz="950" dirty="0">
+                <a:solidFill>
+                  <a:srgbClr val="6F6A5C"/>
+                </a:solidFill>
+                <a:latin typeface="Arial" pitchFamily="34" charset="0"/>
+                <a:ea typeface="Arial" pitchFamily="34" charset="-122"/>
+                <a:cs typeface="Arial" pitchFamily="34" charset="-120"/>
+              </a:rPr>
+              <a:t>Vastgelegd in een korte samenwerkingsovereenkomst met CentreBlock.</a:t>
+            </a:r>
+            <a:endParaRPr lang="en-US" sz="950" dirty="0"/>
+          </a:p>
+        </p:txBody>
+      </p:sp>
+    </p:spTree>
+  </p:cSld>
+  <p:clrMapOvr>
+    <a:masterClrMapping/>
+  </p:clrMapOvr>
+</p:sld>
+</file>
+
+<file path=ppt/slides/slide11.xml><?xml version="1.0" encoding="utf-8"?>
+<p:sld xmlns:a="http://schemas.openxmlformats.org/drawingml/2006/main" xmlns:r="http://schemas.openxmlformats.org/officeDocument/2006/relationships" xmlns:p="http://schemas.openxmlformats.org/presentationml/2006/main">
+  <p:cSld name="Slide 11">
     <p:bg>
       <p:bgPr>
         <a:solidFill>
@@ -2820,7 +4341,7 @@
                 <a:ea typeface="Arial" pitchFamily="34" charset="-122"/>
                 <a:cs typeface="Arial" pitchFamily="34" charset="-120"/>
               </a:rPr>
-              <a:t>10 / 10</a:t>
+              <a:t>11 / 11</a:t>
             </a:r>
             <a:endParaRPr lang="en-US" sz="750" dirty="0"/>
           </a:p>
@@ -3746,7 +5267,7 @@
                 <a:ea typeface="Arial" pitchFamily="34" charset="-122"/>
                 <a:cs typeface="Arial" pitchFamily="34" charset="-120"/>
               </a:rPr>
-              <a:t>2 / 10</a:t>
+              <a:t>2 / 11</a:t>
             </a:r>
             <a:endParaRPr lang="en-US" sz="750" dirty="0"/>
           </a:p>
@@ -4373,7 +5894,7 @@
                 <a:ea typeface="Arial" pitchFamily="34" charset="-122"/>
                 <a:cs typeface="Arial" pitchFamily="34" charset="-120"/>
               </a:rPr>
-              <a:t>3 / 10</a:t>
+              <a:t>3 / 11</a:t>
             </a:r>
             <a:endParaRPr lang="en-US" sz="750" dirty="0"/>
           </a:p>
@@ -5259,7 +6780,7 @@
                 <a:ea typeface="Arial" pitchFamily="34" charset="-122"/>
                 <a:cs typeface="Arial" pitchFamily="34" charset="-120"/>
               </a:rPr>
-              <a:t>4 / 10</a:t>
+              <a:t>4 / 11</a:t>
             </a:r>
             <a:endParaRPr lang="en-US" sz="750" dirty="0"/>
           </a:p>
@@ -6498,7 +8019,7 @@
                 <a:ea typeface="Arial" pitchFamily="34" charset="-122"/>
                 <a:cs typeface="Arial" pitchFamily="34" charset="-120"/>
               </a:rPr>
-              <a:t>5 / 10</a:t>
+              <a:t>5 / 11</a:t>
             </a:r>
             <a:endParaRPr lang="en-US" sz="750" dirty="0"/>
           </a:p>
@@ -7139,7 +8660,7 @@
     <p:bg>
       <p:bgPr>
         <a:solidFill>
-          <a:srgbClr val="141821"/>
+          <a:srgbClr val="E9E0CD"/>
         </a:solidFill>
       </p:bgPr>
     </p:bg>
@@ -7184,7 +8705,7 @@
             <a:r>
               <a:rPr lang="en-US" sz="1800" b="1" dirty="0">
                 <a:solidFill>
-                  <a:srgbClr val="F2EFE6"/>
+                  <a:srgbClr val="1C2230"/>
                 </a:solidFill>
                 <a:latin typeface="Arial" pitchFamily="34" charset="0"/>
                 <a:ea typeface="Arial" pitchFamily="34" charset="-122"/>
@@ -7237,7 +8758,7 @@
             <a:r>
               <a:rPr lang="en-US" sz="750" b="1" spc="100" kern="0" dirty="0">
                 <a:solidFill>
-                  <a:srgbClr val="BDC3CE"/>
+                  <a:srgbClr val="6F6A5C"/>
                 </a:solidFill>
                 <a:latin typeface="Arial" pitchFamily="34" charset="0"/>
                 <a:ea typeface="Arial" pitchFamily="34" charset="-122"/>
@@ -7276,13 +8797,13 @@
             <a:r>
               <a:rPr lang="en-US" sz="750" b="1" spc="100" kern="0" dirty="0">
                 <a:solidFill>
-                  <a:srgbClr val="BDC3CE"/>
-                </a:solidFill>
-                <a:latin typeface="Arial" pitchFamily="34" charset="0"/>
-                <a:ea typeface="Arial" pitchFamily="34" charset="-122"/>
-                <a:cs typeface="Arial" pitchFamily="34" charset="-120"/>
-              </a:rPr>
-              <a:t>6 / 10</a:t>
+                  <a:srgbClr val="6F6A5C"/>
+                </a:solidFill>
+                <a:latin typeface="Arial" pitchFamily="34" charset="0"/>
+                <a:ea typeface="Arial" pitchFamily="34" charset="-122"/>
+                <a:cs typeface="Arial" pitchFamily="34" charset="-120"/>
+              </a:rPr>
+              <a:t>6 / 11</a:t>
             </a:r>
             <a:endParaRPr lang="en-US" sz="750" dirty="0"/>
           </a:p>
@@ -7321,7 +8842,7 @@
                 <a:ea typeface="Arial" pitchFamily="34" charset="-122"/>
                 <a:cs typeface="Arial" pitchFamily="34" charset="-120"/>
               </a:rPr>
-              <a:t>HET MODEL</a:t>
+              <a:t>WAT WE VOOR JULLIE AANPASSEN</a:t>
             </a:r>
             <a:endParaRPr lang="en-US" sz="950" dirty="0"/>
           </a:p>
@@ -7357,13 +8878,13 @@
             <a:r>
               <a:rPr lang="en-US" sz="3200" b="1" dirty="0">
                 <a:solidFill>
-                  <a:srgbClr val="F2EFE6"/>
-                </a:solidFill>
-                <a:latin typeface="Arial" pitchFamily="34" charset="0"/>
-                <a:ea typeface="Arial" pitchFamily="34" charset="-122"/>
-                <a:cs typeface="Arial" pitchFamily="34" charset="-120"/>
-              </a:rPr>
-              <a:t>Geen pilot. </a:t>
+                  <a:srgbClr val="1C2230"/>
+                </a:solidFill>
+                <a:latin typeface="Arial" pitchFamily="34" charset="0"/>
+                <a:ea typeface="Arial" pitchFamily="34" charset="-122"/>
+                <a:cs typeface="Arial" pitchFamily="34" charset="-120"/>
+              </a:rPr>
+              <a:t>Normaal werken we zo. Voor CentreBlock </a:t>
             </a:r>
             <a:pPr algn="l" indent="0" marL="0">
               <a:lnSpc>
@@ -7374,13 +8895,13 @@
             <a:r>
               <a:rPr lang="en-US" sz="3000" i="1" dirty="0">
                 <a:solidFill>
-                  <a:srgbClr val="F2EFE6"/>
+                  <a:srgbClr val="1C2230"/>
                 </a:solidFill>
                 <a:latin typeface="Georgia" pitchFamily="34" charset="0"/>
                 <a:ea typeface="Georgia" pitchFamily="34" charset="-122"/>
                 <a:cs typeface="Georgia" pitchFamily="34" charset="-120"/>
               </a:rPr>
-              <a:t>Meteen</a:t>
+              <a:t>anders</a:t>
             </a:r>
             <a:pPr algn="l" indent="0" marL="0">
               <a:lnSpc>
@@ -7391,13 +8912,13 @@
             <a:r>
               <a:rPr lang="en-US" sz="3200" b="1" dirty="0">
                 <a:solidFill>
-                  <a:srgbClr val="F2EFE6"/>
-                </a:solidFill>
-                <a:latin typeface="Arial" pitchFamily="34" charset="0"/>
-                <a:ea typeface="Arial" pitchFamily="34" charset="-122"/>
-                <a:cs typeface="Arial" pitchFamily="34" charset="-120"/>
-              </a:rPr>
-              <a:t> beldagen.</a:t>
+                  <a:srgbClr val="1C2230"/>
+                </a:solidFill>
+                <a:latin typeface="Arial" pitchFamily="34" charset="0"/>
+                <a:ea typeface="Arial" pitchFamily="34" charset="-122"/>
+                <a:cs typeface="Arial" pitchFamily="34" charset="-120"/>
+              </a:rPr>
+              <a:t>.</a:t>
             </a:r>
             <a:endParaRPr lang="en-US" sz="3200" dirty="0"/>
           </a:p>
@@ -7411,17 +8932,779 @@
         </p:nvSpPr>
         <p:spPr>
           <a:xfrm>
-            <a:off x="609598" y="2463794"/>
-            <a:ext cx="2628893" cy="2362194"/>
+            <a:off x="609598" y="2489194"/>
+            <a:ext cx="5384787" cy="2768593"/>
           </a:xfrm>
           <a:prstGeom prst="roundRect">
             <a:avLst>
-              <a:gd name="adj" fmla="val 4301"/>
+              <a:gd name="adj" fmla="val 3670"/>
             </a:avLst>
           </a:prstGeom>
           <a:solidFill>
-            <a:srgbClr val="1B2130"/>
+            <a:srgbClr val="F8F4EB"/>
           </a:solidFill>
+          <a:ln/>
+        </p:spPr>
+      </p:sp>
+      <p:sp>
+        <p:nvSpPr>
+          <p:cNvPr id="8" name="Text 6"/>
+          <p:cNvSpPr txBox="1"/>
+          <p:nvPr/>
+        </p:nvSpPr>
+        <p:spPr>
+          <a:xfrm>
+            <a:off x="939798" y="2743193"/>
+            <a:ext cx="4724388" cy="190500"/>
+          </a:xfrm>
+          <a:prstGeom prst="rect">
+            <a:avLst/>
+          </a:prstGeom>
+          <a:noFill/>
+          <a:ln/>
+        </p:spPr>
+        <p:txBody>
+          <a:bodyPr wrap="square" lIns="0" tIns="0" rIns="0" bIns="0" rtlCol="0" anchor="ctr"/>
+          <a:lstStyle/>
+          <a:p>
+            <a:pPr indent="0" marL="0">
+              <a:buNone/>
+            </a:pPr>
+            <a:r>
+              <a:rPr lang="en-US" sz="800" b="1" spc="180" kern="0" dirty="0">
+                <a:solidFill>
+                  <a:srgbClr val="6F6A5C"/>
+                </a:solidFill>
+                <a:latin typeface="Arial" pitchFamily="34" charset="0"/>
+                <a:ea typeface="Arial" pitchFamily="34" charset="-122"/>
+                <a:cs typeface="Arial" pitchFamily="34" charset="-120"/>
+              </a:rPr>
+              <a:t>ONZE STANDAARD</a:t>
+            </a:r>
+            <a:endParaRPr lang="en-US" sz="800" dirty="0"/>
+          </a:p>
+        </p:txBody>
+      </p:sp>
+      <p:sp>
+        <p:nvSpPr>
+          <p:cNvPr id="9" name="Text 7"/>
+          <p:cNvSpPr txBox="1"/>
+          <p:nvPr/>
+        </p:nvSpPr>
+        <p:spPr>
+          <a:xfrm>
+            <a:off x="939798" y="2959093"/>
+            <a:ext cx="4724388" cy="355599"/>
+          </a:xfrm>
+          <a:prstGeom prst="rect">
+            <a:avLst/>
+          </a:prstGeom>
+          <a:noFill/>
+          <a:ln/>
+        </p:spPr>
+        <p:txBody>
+          <a:bodyPr wrap="square" lIns="0" tIns="0" rIns="0" bIns="0" rtlCol="0" anchor="ctr"/>
+          <a:lstStyle/>
+          <a:p>
+            <a:pPr indent="0" marL="0">
+              <a:lnSpc>
+                <a:spcPct val="115000"/>
+              </a:lnSpc>
+              <a:buNone/>
+            </a:pPr>
+            <a:r>
+              <a:rPr lang="en-US" sz="1500" b="1" dirty="0">
+                <a:solidFill>
+                  <a:srgbClr val="1C2230"/>
+                </a:solidFill>
+                <a:latin typeface="Arial" pitchFamily="34" charset="0"/>
+                <a:ea typeface="Arial" pitchFamily="34" charset="-122"/>
+                <a:cs typeface="Arial" pitchFamily="34" charset="-120"/>
+              </a:rPr>
+              <a:t>Pilot van twaalf weken</a:t>
+            </a:r>
+            <a:endParaRPr lang="en-US" sz="1500" dirty="0"/>
+          </a:p>
+        </p:txBody>
+      </p:sp>
+      <p:sp>
+        <p:nvSpPr>
+          <p:cNvPr id="10" name="Text 8"/>
+          <p:cNvSpPr txBox="1"/>
+          <p:nvPr/>
+        </p:nvSpPr>
+        <p:spPr>
+          <a:xfrm>
+            <a:off x="939798" y="3378192"/>
+            <a:ext cx="4292589" cy="350519"/>
+          </a:xfrm>
+          <a:prstGeom prst="rect">
+            <a:avLst/>
+          </a:prstGeom>
+          <a:noFill/>
+          <a:ln/>
+        </p:spPr>
+        <p:txBody>
+          <a:bodyPr wrap="square" lIns="0" tIns="0" rIns="0" bIns="0" rtlCol="0" anchor="ctr"/>
+          <a:lstStyle/>
+          <a:p>
+            <a:pPr indent="0" marL="0">
+              <a:buNone/>
+            </a:pPr>
+            <a:r>
+              <a:rPr lang="en-US" sz="1100" dirty="0">
+                <a:solidFill>
+                  <a:srgbClr val="6F6A5C"/>
+                </a:solidFill>
+                <a:latin typeface="Arial" pitchFamily="34" charset="0"/>
+                <a:ea typeface="Arial" pitchFamily="34" charset="-122"/>
+                <a:cs typeface="Arial" pitchFamily="34" charset="-120"/>
+              </a:rPr>
+              <a:t>Start</a:t>
+            </a:r>
+            <a:endParaRPr lang="en-US" sz="1100" dirty="0"/>
+          </a:p>
+        </p:txBody>
+      </p:sp>
+      <p:sp>
+        <p:nvSpPr>
+          <p:cNvPr id="11" name="Text 9"/>
+          <p:cNvSpPr txBox="1"/>
+          <p:nvPr/>
+        </p:nvSpPr>
+        <p:spPr>
+          <a:xfrm>
+            <a:off x="4838688" y="3378192"/>
+            <a:ext cx="825498" cy="350519"/>
+          </a:xfrm>
+          <a:prstGeom prst="rect">
+            <a:avLst/>
+          </a:prstGeom>
+          <a:noFill/>
+          <a:ln/>
+        </p:spPr>
+        <p:txBody>
+          <a:bodyPr wrap="square" lIns="0" tIns="0" rIns="0" bIns="0" rtlCol="0" anchor="ctr"/>
+          <a:lstStyle/>
+          <a:p>
+            <a:pPr algn="r" indent="0" marL="0">
+              <a:buNone/>
+            </a:pPr>
+            <a:r>
+              <a:rPr lang="en-US" sz="1350" b="1" dirty="0">
+                <a:solidFill>
+                  <a:srgbClr val="1C2230"/>
+                </a:solidFill>
+                <a:latin typeface="Arial" pitchFamily="34" charset="0"/>
+                <a:ea typeface="Arial" pitchFamily="34" charset="-122"/>
+                <a:cs typeface="Arial" pitchFamily="34" charset="-120"/>
+              </a:rPr>
+              <a:t>Pilot € 4.950</a:t>
+            </a:r>
+            <a:endParaRPr lang="en-US" sz="1350" dirty="0"/>
+          </a:p>
+        </p:txBody>
+      </p:sp>
+      <p:sp>
+        <p:nvSpPr>
+          <p:cNvPr id="12" name="Shape 10"/>
+          <p:cNvSpPr/>
+          <p:nvPr/>
+        </p:nvSpPr>
+        <p:spPr>
+          <a:xfrm>
+            <a:off x="939798" y="3728711"/>
+            <a:ext cx="4724388" cy="0"/>
+          </a:xfrm>
+          <a:prstGeom prst="line">
+            <a:avLst/>
+          </a:prstGeom>
+          <a:noFill/>
+          <a:ln w="9525">
+            <a:solidFill>
+              <a:srgbClr val="D8D2C4"/>
+            </a:solidFill>
+            <a:prstDash val="solid"/>
+          </a:ln>
+        </p:spPr>
+      </p:sp>
+      <p:sp>
+        <p:nvSpPr>
+          <p:cNvPr id="13" name="Text 11"/>
+          <p:cNvSpPr txBox="1"/>
+          <p:nvPr/>
+        </p:nvSpPr>
+        <p:spPr>
+          <a:xfrm>
+            <a:off x="939798" y="3728711"/>
+            <a:ext cx="4292589" cy="350519"/>
+          </a:xfrm>
+          <a:prstGeom prst="rect">
+            <a:avLst/>
+          </a:prstGeom>
+          <a:noFill/>
+          <a:ln/>
+        </p:spPr>
+        <p:txBody>
+          <a:bodyPr wrap="square" lIns="0" tIns="0" rIns="0" bIns="0" rtlCol="0" anchor="ctr"/>
+          <a:lstStyle/>
+          <a:p>
+            <a:pPr indent="0" marL="0">
+              <a:buNone/>
+            </a:pPr>
+            <a:r>
+              <a:rPr lang="en-US" sz="1100" dirty="0">
+                <a:solidFill>
+                  <a:srgbClr val="6F6A5C"/>
+                </a:solidFill>
+                <a:latin typeface="Arial" pitchFamily="34" charset="0"/>
+                <a:ea typeface="Arial" pitchFamily="34" charset="-122"/>
+                <a:cs typeface="Arial" pitchFamily="34" charset="-120"/>
+              </a:rPr>
+              <a:t>Looptijd</a:t>
+            </a:r>
+            <a:endParaRPr lang="en-US" sz="1100" dirty="0"/>
+          </a:p>
+        </p:txBody>
+      </p:sp>
+      <p:sp>
+        <p:nvSpPr>
+          <p:cNvPr id="14" name="Text 12"/>
+          <p:cNvSpPr txBox="1"/>
+          <p:nvPr/>
+        </p:nvSpPr>
+        <p:spPr>
+          <a:xfrm>
+            <a:off x="4838688" y="3728711"/>
+            <a:ext cx="825498" cy="350519"/>
+          </a:xfrm>
+          <a:prstGeom prst="rect">
+            <a:avLst/>
+          </a:prstGeom>
+          <a:noFill/>
+          <a:ln/>
+        </p:spPr>
+        <p:txBody>
+          <a:bodyPr wrap="square" lIns="0" tIns="0" rIns="0" bIns="0" rtlCol="0" anchor="ctr"/>
+          <a:lstStyle/>
+          <a:p>
+            <a:pPr algn="r" indent="0" marL="0">
+              <a:buNone/>
+            </a:pPr>
+            <a:r>
+              <a:rPr lang="en-US" sz="1350" b="1" dirty="0">
+                <a:solidFill>
+                  <a:srgbClr val="1C2230"/>
+                </a:solidFill>
+                <a:latin typeface="Arial" pitchFamily="34" charset="0"/>
+                <a:ea typeface="Arial" pitchFamily="34" charset="-122"/>
+                <a:cs typeface="Arial" pitchFamily="34" charset="-120"/>
+              </a:rPr>
+              <a:t>12 weken vast</a:t>
+            </a:r>
+            <a:endParaRPr lang="en-US" sz="1350" dirty="0"/>
+          </a:p>
+        </p:txBody>
+      </p:sp>
+      <p:sp>
+        <p:nvSpPr>
+          <p:cNvPr id="15" name="Shape 13"/>
+          <p:cNvSpPr/>
+          <p:nvPr/>
+        </p:nvSpPr>
+        <p:spPr>
+          <a:xfrm>
+            <a:off x="939798" y="4079230"/>
+            <a:ext cx="4724388" cy="0"/>
+          </a:xfrm>
+          <a:prstGeom prst="line">
+            <a:avLst/>
+          </a:prstGeom>
+          <a:noFill/>
+          <a:ln w="9525">
+            <a:solidFill>
+              <a:srgbClr val="D8D2C4"/>
+            </a:solidFill>
+            <a:prstDash val="solid"/>
+          </a:ln>
+        </p:spPr>
+      </p:sp>
+      <p:sp>
+        <p:nvSpPr>
+          <p:cNvPr id="16" name="Text 14"/>
+          <p:cNvSpPr txBox="1"/>
+          <p:nvPr/>
+        </p:nvSpPr>
+        <p:spPr>
+          <a:xfrm>
+            <a:off x="939798" y="4079230"/>
+            <a:ext cx="4292589" cy="350519"/>
+          </a:xfrm>
+          <a:prstGeom prst="rect">
+            <a:avLst/>
+          </a:prstGeom>
+          <a:noFill/>
+          <a:ln/>
+        </p:spPr>
+        <p:txBody>
+          <a:bodyPr wrap="square" lIns="0" tIns="0" rIns="0" bIns="0" rtlCol="0" anchor="ctr"/>
+          <a:lstStyle/>
+          <a:p>
+            <a:pPr indent="0" marL="0">
+              <a:buNone/>
+            </a:pPr>
+            <a:r>
+              <a:rPr lang="en-US" sz="1100" dirty="0">
+                <a:solidFill>
+                  <a:srgbClr val="6F6A5C"/>
+                </a:solidFill>
+                <a:latin typeface="Arial" pitchFamily="34" charset="0"/>
+                <a:ea typeface="Arial" pitchFamily="34" charset="-122"/>
+                <a:cs typeface="Arial" pitchFamily="34" charset="-120"/>
+              </a:rPr>
+              <a:t>Afspraak vooraf</a:t>
+            </a:r>
+            <a:endParaRPr lang="en-US" sz="1100" dirty="0"/>
+          </a:p>
+        </p:txBody>
+      </p:sp>
+      <p:sp>
+        <p:nvSpPr>
+          <p:cNvPr id="17" name="Text 15"/>
+          <p:cNvSpPr txBox="1"/>
+          <p:nvPr/>
+        </p:nvSpPr>
+        <p:spPr>
+          <a:xfrm>
+            <a:off x="4838688" y="4079230"/>
+            <a:ext cx="825498" cy="350519"/>
+          </a:xfrm>
+          <a:prstGeom prst="rect">
+            <a:avLst/>
+          </a:prstGeom>
+          <a:noFill/>
+          <a:ln/>
+        </p:spPr>
+        <p:txBody>
+          <a:bodyPr wrap="square" lIns="0" tIns="0" rIns="0" bIns="0" rtlCol="0" anchor="ctr"/>
+          <a:lstStyle/>
+          <a:p>
+            <a:pPr algn="r" indent="0" marL="0">
+              <a:buNone/>
+            </a:pPr>
+            <a:r>
+              <a:rPr lang="en-US" sz="1350" b="1" dirty="0">
+                <a:solidFill>
+                  <a:srgbClr val="1C2230"/>
+                </a:solidFill>
+                <a:latin typeface="Arial" pitchFamily="34" charset="0"/>
+                <a:ea typeface="Arial" pitchFamily="34" charset="-122"/>
+                <a:cs typeface="Arial" pitchFamily="34" charset="-120"/>
+              </a:rPr>
+              <a:t>10 gekwalificeerd</a:t>
+            </a:r>
+            <a:endParaRPr lang="en-US" sz="1350" dirty="0"/>
+          </a:p>
+        </p:txBody>
+      </p:sp>
+      <p:sp>
+        <p:nvSpPr>
+          <p:cNvPr id="18" name="Shape 16"/>
+          <p:cNvSpPr/>
+          <p:nvPr/>
+        </p:nvSpPr>
+        <p:spPr>
+          <a:xfrm>
+            <a:off x="939798" y="4429749"/>
+            <a:ext cx="4724388" cy="0"/>
+          </a:xfrm>
+          <a:prstGeom prst="line">
+            <a:avLst/>
+          </a:prstGeom>
+          <a:noFill/>
+          <a:ln w="9525">
+            <a:solidFill>
+              <a:srgbClr val="D8D2C4"/>
+            </a:solidFill>
+            <a:prstDash val="solid"/>
+          </a:ln>
+        </p:spPr>
+      </p:sp>
+      <p:sp>
+        <p:nvSpPr>
+          <p:cNvPr id="19" name="Text 17"/>
+          <p:cNvSpPr txBox="1"/>
+          <p:nvPr/>
+        </p:nvSpPr>
+        <p:spPr>
+          <a:xfrm>
+            <a:off x="939798" y="4429749"/>
+            <a:ext cx="4292589" cy="350519"/>
+          </a:xfrm>
+          <a:prstGeom prst="rect">
+            <a:avLst/>
+          </a:prstGeom>
+          <a:noFill/>
+          <a:ln/>
+        </p:spPr>
+        <p:txBody>
+          <a:bodyPr wrap="square" lIns="0" tIns="0" rIns="0" bIns="0" rtlCol="0" anchor="ctr"/>
+          <a:lstStyle/>
+          <a:p>
+            <a:pPr indent="0" marL="0">
+              <a:buNone/>
+            </a:pPr>
+            <a:r>
+              <a:rPr lang="en-US" sz="1100" dirty="0">
+                <a:solidFill>
+                  <a:srgbClr val="6F6A5C"/>
+                </a:solidFill>
+                <a:latin typeface="Arial" pitchFamily="34" charset="0"/>
+                <a:ea typeface="Arial" pitchFamily="34" charset="-122"/>
+                <a:cs typeface="Arial" pitchFamily="34" charset="-120"/>
+              </a:rPr>
+              <a:t>Minimum daarna</a:t>
+            </a:r>
+            <a:endParaRPr lang="en-US" sz="1100" dirty="0"/>
+          </a:p>
+        </p:txBody>
+      </p:sp>
+      <p:sp>
+        <p:nvSpPr>
+          <p:cNvPr id="20" name="Text 18"/>
+          <p:cNvSpPr txBox="1"/>
+          <p:nvPr/>
+        </p:nvSpPr>
+        <p:spPr>
+          <a:xfrm>
+            <a:off x="4838688" y="4429749"/>
+            <a:ext cx="825498" cy="350519"/>
+          </a:xfrm>
+          <a:prstGeom prst="rect">
+            <a:avLst/>
+          </a:prstGeom>
+          <a:noFill/>
+          <a:ln/>
+        </p:spPr>
+        <p:txBody>
+          <a:bodyPr wrap="square" lIns="0" tIns="0" rIns="0" bIns="0" rtlCol="0" anchor="ctr"/>
+          <a:lstStyle/>
+          <a:p>
+            <a:pPr algn="r" indent="0" marL="0">
+              <a:buNone/>
+            </a:pPr>
+            <a:r>
+              <a:rPr lang="en-US" sz="1350" b="1" dirty="0">
+                <a:solidFill>
+                  <a:srgbClr val="1C2230"/>
+                </a:solidFill>
+                <a:latin typeface="Arial" pitchFamily="34" charset="0"/>
+                <a:ea typeface="Arial" pitchFamily="34" charset="-122"/>
+                <a:cs typeface="Arial" pitchFamily="34" charset="-120"/>
+              </a:rPr>
+              <a:t>4 beldagen</a:t>
+            </a:r>
+            <a:endParaRPr lang="en-US" sz="1350" dirty="0"/>
+          </a:p>
+        </p:txBody>
+      </p:sp>
+      <p:sp>
+        <p:nvSpPr>
+          <p:cNvPr id="21" name="Shape 19"/>
+          <p:cNvSpPr/>
+          <p:nvPr/>
+        </p:nvSpPr>
+        <p:spPr>
+          <a:xfrm>
+            <a:off x="939798" y="4780268"/>
+            <a:ext cx="4724388" cy="0"/>
+          </a:xfrm>
+          <a:prstGeom prst="line">
+            <a:avLst/>
+          </a:prstGeom>
+          <a:noFill/>
+          <a:ln w="9525">
+            <a:solidFill>
+              <a:srgbClr val="D8D2C4"/>
+            </a:solidFill>
+            <a:prstDash val="solid"/>
+          </a:ln>
+        </p:spPr>
+      </p:sp>
+      <p:sp>
+        <p:nvSpPr>
+          <p:cNvPr id="22" name="Text 20"/>
+          <p:cNvSpPr txBox="1"/>
+          <p:nvPr/>
+        </p:nvSpPr>
+        <p:spPr>
+          <a:xfrm>
+            <a:off x="939798" y="4780268"/>
+            <a:ext cx="4292589" cy="350519"/>
+          </a:xfrm>
+          <a:prstGeom prst="rect">
+            <a:avLst/>
+          </a:prstGeom>
+          <a:noFill/>
+          <a:ln/>
+        </p:spPr>
+        <p:txBody>
+          <a:bodyPr wrap="square" lIns="0" tIns="0" rIns="0" bIns="0" rtlCol="0" anchor="ctr"/>
+          <a:lstStyle/>
+          <a:p>
+            <a:pPr indent="0" marL="0">
+              <a:buNone/>
+            </a:pPr>
+            <a:r>
+              <a:rPr lang="en-US" sz="1100" dirty="0">
+                <a:solidFill>
+                  <a:srgbClr val="6F6A5C"/>
+                </a:solidFill>
+                <a:latin typeface="Arial" pitchFamily="34" charset="0"/>
+                <a:ea typeface="Arial" pitchFamily="34" charset="-122"/>
+                <a:cs typeface="Arial" pitchFamily="34" charset="-120"/>
+              </a:rPr>
+              <a:t>Beslissen</a:t>
+            </a:r>
+            <a:endParaRPr lang="en-US" sz="1100" dirty="0"/>
+          </a:p>
+        </p:txBody>
+      </p:sp>
+      <p:sp>
+        <p:nvSpPr>
+          <p:cNvPr id="23" name="Text 21"/>
+          <p:cNvSpPr txBox="1"/>
+          <p:nvPr/>
+        </p:nvSpPr>
+        <p:spPr>
+          <a:xfrm>
+            <a:off x="4838688" y="4780268"/>
+            <a:ext cx="825498" cy="350519"/>
+          </a:xfrm>
+          <a:prstGeom prst="rect">
+            <a:avLst/>
+          </a:prstGeom>
+          <a:noFill/>
+          <a:ln/>
+        </p:spPr>
+        <p:txBody>
+          <a:bodyPr wrap="square" lIns="0" tIns="0" rIns="0" bIns="0" rtlCol="0" anchor="ctr"/>
+          <a:lstStyle/>
+          <a:p>
+            <a:pPr algn="r" indent="0" marL="0">
+              <a:buNone/>
+            </a:pPr>
+            <a:r>
+              <a:rPr lang="en-US" sz="1350" b="1" dirty="0">
+                <a:solidFill>
+                  <a:srgbClr val="1C2230"/>
+                </a:solidFill>
+                <a:latin typeface="Arial" pitchFamily="34" charset="0"/>
+                <a:ea typeface="Arial" pitchFamily="34" charset="-122"/>
+                <a:cs typeface="Arial" pitchFamily="34" charset="-120"/>
+              </a:rPr>
+              <a:t>Na de pilot</a:t>
+            </a:r>
+            <a:endParaRPr lang="en-US" sz="1350" dirty="0"/>
+          </a:p>
+        </p:txBody>
+      </p:sp>
+      <p:sp>
+        <p:nvSpPr>
+          <p:cNvPr id="24" name="Shape 22"/>
+          <p:cNvSpPr/>
+          <p:nvPr/>
+        </p:nvSpPr>
+        <p:spPr>
+          <a:xfrm>
+            <a:off x="6197585" y="2489194"/>
+            <a:ext cx="5384787" cy="2768593"/>
+          </a:xfrm>
+          <a:prstGeom prst="roundRect">
+            <a:avLst>
+              <a:gd name="adj" fmla="val 3670"/>
+            </a:avLst>
+          </a:prstGeom>
+          <a:solidFill>
+            <a:srgbClr val="000000"/>
+          </a:solidFill>
+          <a:ln/>
+        </p:spPr>
+      </p:sp>
+      <p:sp>
+        <p:nvSpPr>
+          <p:cNvPr id="25" name="Text 23"/>
+          <p:cNvSpPr txBox="1"/>
+          <p:nvPr/>
+        </p:nvSpPr>
+        <p:spPr>
+          <a:xfrm>
+            <a:off x="6527784" y="2743193"/>
+            <a:ext cx="4724388" cy="190500"/>
+          </a:xfrm>
+          <a:prstGeom prst="rect">
+            <a:avLst/>
+          </a:prstGeom>
+          <a:noFill/>
+          <a:ln/>
+        </p:spPr>
+        <p:txBody>
+          <a:bodyPr wrap="square" lIns="0" tIns="0" rIns="0" bIns="0" rtlCol="0" anchor="ctr"/>
+          <a:lstStyle/>
+          <a:p>
+            <a:pPr indent="0" marL="0">
+              <a:buNone/>
+            </a:pPr>
+            <a:r>
+              <a:rPr lang="en-US" sz="800" b="1" spc="180" kern="0" dirty="0">
+                <a:solidFill>
+                  <a:srgbClr val="38B6FF"/>
+                </a:solidFill>
+                <a:latin typeface="Arial" pitchFamily="34" charset="0"/>
+                <a:ea typeface="Arial" pitchFamily="34" charset="-122"/>
+                <a:cs typeface="Arial" pitchFamily="34" charset="-120"/>
+              </a:rPr>
+              <a:t>VOOR CENTREBLOCK</a:t>
+            </a:r>
+            <a:endParaRPr lang="en-US" sz="800" dirty="0"/>
+          </a:p>
+        </p:txBody>
+      </p:sp>
+      <p:sp>
+        <p:nvSpPr>
+          <p:cNvPr id="26" name="Text 24"/>
+          <p:cNvSpPr txBox="1"/>
+          <p:nvPr/>
+        </p:nvSpPr>
+        <p:spPr>
+          <a:xfrm>
+            <a:off x="6527784" y="2959093"/>
+            <a:ext cx="4724388" cy="355599"/>
+          </a:xfrm>
+          <a:prstGeom prst="rect">
+            <a:avLst/>
+          </a:prstGeom>
+          <a:noFill/>
+          <a:ln/>
+        </p:spPr>
+        <p:txBody>
+          <a:bodyPr wrap="square" lIns="0" tIns="0" rIns="0" bIns="0" rtlCol="0" anchor="ctr"/>
+          <a:lstStyle/>
+          <a:p>
+            <a:pPr indent="0" marL="0">
+              <a:lnSpc>
+                <a:spcPct val="115000"/>
+              </a:lnSpc>
+              <a:buNone/>
+            </a:pPr>
+            <a:r>
+              <a:rPr lang="en-US" sz="1500" b="1" dirty="0">
+                <a:solidFill>
+                  <a:srgbClr val="F2EFE6"/>
+                </a:solidFill>
+                <a:latin typeface="Arial" pitchFamily="34" charset="0"/>
+                <a:ea typeface="Arial" pitchFamily="34" charset="-122"/>
+                <a:cs typeface="Arial" pitchFamily="34" charset="-120"/>
+              </a:rPr>
+              <a:t>Direct beldagen, per klant</a:t>
+            </a:r>
+            <a:endParaRPr lang="en-US" sz="1500" dirty="0"/>
+          </a:p>
+        </p:txBody>
+      </p:sp>
+      <p:sp>
+        <p:nvSpPr>
+          <p:cNvPr id="27" name="Text 25"/>
+          <p:cNvSpPr txBox="1"/>
+          <p:nvPr/>
+        </p:nvSpPr>
+        <p:spPr>
+          <a:xfrm>
+            <a:off x="6527784" y="3378192"/>
+            <a:ext cx="4292589" cy="350519"/>
+          </a:xfrm>
+          <a:prstGeom prst="rect">
+            <a:avLst/>
+          </a:prstGeom>
+          <a:noFill/>
+          <a:ln/>
+        </p:spPr>
+        <p:txBody>
+          <a:bodyPr wrap="square" lIns="0" tIns="0" rIns="0" bIns="0" rtlCol="0" anchor="ctr"/>
+          <a:lstStyle/>
+          <a:p>
+            <a:pPr indent="0" marL="0">
+              <a:buNone/>
+            </a:pPr>
+            <a:r>
+              <a:rPr lang="en-US" sz="1100" dirty="0">
+                <a:solidFill>
+                  <a:srgbClr val="C2C8D2"/>
+                </a:solidFill>
+                <a:latin typeface="Arial" pitchFamily="34" charset="0"/>
+                <a:ea typeface="Arial" pitchFamily="34" charset="-122"/>
+                <a:cs typeface="Arial" pitchFamily="34" charset="-120"/>
+              </a:rPr>
+              <a:t>Start</a:t>
+            </a:r>
+            <a:endParaRPr lang="en-US" sz="1100" dirty="0"/>
+          </a:p>
+        </p:txBody>
+      </p:sp>
+      <p:sp>
+        <p:nvSpPr>
+          <p:cNvPr id="28" name="Text 26"/>
+          <p:cNvSpPr txBox="1"/>
+          <p:nvPr/>
+        </p:nvSpPr>
+        <p:spPr>
+          <a:xfrm>
+            <a:off x="10426674" y="3378192"/>
+            <a:ext cx="825498" cy="350519"/>
+          </a:xfrm>
+          <a:prstGeom prst="rect">
+            <a:avLst/>
+          </a:prstGeom>
+          <a:noFill/>
+          <a:ln/>
+        </p:spPr>
+        <p:txBody>
+          <a:bodyPr wrap="square" lIns="0" tIns="0" rIns="0" bIns="0" rtlCol="0" anchor="ctr"/>
+          <a:lstStyle/>
+          <a:p>
+            <a:pPr algn="r" indent="0" marL="0">
+              <a:buNone/>
+            </a:pPr>
+            <a:r>
+              <a:rPr lang="en-US" sz="1350" b="1" dirty="0">
+                <a:solidFill>
+                  <a:srgbClr val="38B6FF"/>
+                </a:solidFill>
+                <a:latin typeface="Arial" pitchFamily="34" charset="0"/>
+                <a:ea typeface="Arial" pitchFamily="34" charset="-122"/>
+                <a:cs typeface="Arial" pitchFamily="34" charset="-120"/>
+              </a:rPr>
+              <a:t>Opstart € 695</a:t>
+            </a:r>
+            <a:endParaRPr lang="en-US" sz="1350" dirty="0"/>
+          </a:p>
+        </p:txBody>
+      </p:sp>
+      <p:sp>
+        <p:nvSpPr>
+          <p:cNvPr id="29" name="Shape 27"/>
+          <p:cNvSpPr/>
+          <p:nvPr/>
+        </p:nvSpPr>
+        <p:spPr>
+          <a:xfrm>
+            <a:off x="6527784" y="3728711"/>
+            <a:ext cx="4724388" cy="0"/>
+          </a:xfrm>
+          <a:prstGeom prst="line">
+            <a:avLst/>
+          </a:prstGeom>
+          <a:noFill/>
           <a:ln w="9525">
             <a:solidFill>
               <a:srgbClr val="3A4152"/>
@@ -7432,168 +9715,97 @@
       </p:sp>
       <p:sp>
         <p:nvSpPr>
-          <p:cNvPr id="8" name="Shape 6"/>
+          <p:cNvPr id="30" name="Text 28"/>
+          <p:cNvSpPr txBox="1"/>
+          <p:nvPr/>
+        </p:nvSpPr>
+        <p:spPr>
+          <a:xfrm>
+            <a:off x="6527784" y="3728711"/>
+            <a:ext cx="4292589" cy="350519"/>
+          </a:xfrm>
+          <a:prstGeom prst="rect">
+            <a:avLst/>
+          </a:prstGeom>
+          <a:noFill/>
+          <a:ln/>
+        </p:spPr>
+        <p:txBody>
+          <a:bodyPr wrap="square" lIns="0" tIns="0" rIns="0" bIns="0" rtlCol="0" anchor="ctr"/>
+          <a:lstStyle/>
+          <a:p>
+            <a:pPr indent="0" marL="0">
+              <a:buNone/>
+            </a:pPr>
+            <a:r>
+              <a:rPr lang="en-US" sz="1100" dirty="0">
+                <a:solidFill>
+                  <a:srgbClr val="C2C8D2"/>
+                </a:solidFill>
+                <a:latin typeface="Arial" pitchFamily="34" charset="0"/>
+                <a:ea typeface="Arial" pitchFamily="34" charset="-122"/>
+                <a:cs typeface="Arial" pitchFamily="34" charset="-120"/>
+              </a:rPr>
+              <a:t>Looptijd</a:t>
+            </a:r>
+            <a:endParaRPr lang="en-US" sz="1100" dirty="0"/>
+          </a:p>
+        </p:txBody>
+      </p:sp>
+      <p:sp>
+        <p:nvSpPr>
+          <p:cNvPr id="31" name="Text 29"/>
+          <p:cNvSpPr txBox="1"/>
+          <p:nvPr/>
+        </p:nvSpPr>
+        <p:spPr>
+          <a:xfrm>
+            <a:off x="10426674" y="3728711"/>
+            <a:ext cx="825498" cy="350519"/>
+          </a:xfrm>
+          <a:prstGeom prst="rect">
+            <a:avLst/>
+          </a:prstGeom>
+          <a:noFill/>
+          <a:ln/>
+        </p:spPr>
+        <p:txBody>
+          <a:bodyPr wrap="square" lIns="0" tIns="0" rIns="0" bIns="0" rtlCol="0" anchor="ctr"/>
+          <a:lstStyle/>
+          <a:p>
+            <a:pPr algn="r" indent="0" marL="0">
+              <a:buNone/>
+            </a:pPr>
+            <a:r>
+              <a:rPr lang="en-US" sz="1350" b="1" dirty="0">
+                <a:solidFill>
+                  <a:srgbClr val="38B6FF"/>
+                </a:solidFill>
+                <a:latin typeface="Arial" pitchFamily="34" charset="0"/>
+                <a:ea typeface="Arial" pitchFamily="34" charset="-122"/>
+                <a:cs typeface="Arial" pitchFamily="34" charset="-120"/>
+              </a:rPr>
+              <a:t>Maand opzegtermijn</a:t>
+            </a:r>
+            <a:endParaRPr lang="en-US" sz="1350" dirty="0"/>
+          </a:p>
+        </p:txBody>
+      </p:sp>
+      <p:sp>
+        <p:nvSpPr>
+          <p:cNvPr id="32" name="Shape 30"/>
           <p:cNvSpPr/>
           <p:nvPr/>
         </p:nvSpPr>
         <p:spPr>
           <a:xfrm>
-            <a:off x="825498" y="2692393"/>
-            <a:ext cx="292099" cy="292099"/>
-          </a:xfrm>
-          <a:prstGeom prst="ellipse">
-            <a:avLst/>
-          </a:prstGeom>
-          <a:ln w="15240">
-            <a:solidFill>
-              <a:srgbClr val="38B6FF"/>
-            </a:solidFill>
-            <a:prstDash val="solid"/>
-          </a:ln>
-        </p:spPr>
-      </p:sp>
-      <p:sp>
-        <p:nvSpPr>
-          <p:cNvPr id="9" name="Text 7"/>
-          <p:cNvSpPr txBox="1"/>
-          <p:nvPr/>
-        </p:nvSpPr>
-        <p:spPr>
-          <a:xfrm>
-            <a:off x="825498" y="2692393"/>
-            <a:ext cx="292099" cy="292099"/>
-          </a:xfrm>
-          <a:prstGeom prst="rect">
-            <a:avLst/>
-          </a:prstGeom>
-          <a:noFill/>
-          <a:ln/>
-        </p:spPr>
-        <p:txBody>
-          <a:bodyPr wrap="square" lIns="0" tIns="0" rIns="0" bIns="0" rtlCol="0" anchor="ctr"/>
-          <a:lstStyle/>
-          <a:p>
-            <a:pPr algn="ctr" indent="0" marL="0">
-              <a:buNone/>
-            </a:pPr>
-            <a:r>
-              <a:rPr lang="en-US" sz="1000" b="1" dirty="0">
-                <a:solidFill>
-                  <a:srgbClr val="38B6FF"/>
-                </a:solidFill>
-                <a:latin typeface="Arial" pitchFamily="34" charset="0"/>
-                <a:ea typeface="Arial" pitchFamily="34" charset="-122"/>
-                <a:cs typeface="Arial" pitchFamily="34" charset="-120"/>
-              </a:rPr>
-              <a:t>1</a:t>
-            </a:r>
-            <a:endParaRPr lang="en-US" sz="1000" dirty="0"/>
-          </a:p>
-        </p:txBody>
-      </p:sp>
-      <p:sp>
-        <p:nvSpPr>
-          <p:cNvPr id="10" name="Text 8"/>
-          <p:cNvSpPr txBox="1"/>
-          <p:nvPr/>
-        </p:nvSpPr>
-        <p:spPr>
-          <a:xfrm>
-            <a:off x="825498" y="3136892"/>
-            <a:ext cx="2197095" cy="406399"/>
-          </a:xfrm>
-          <a:prstGeom prst="rect">
-            <a:avLst/>
-          </a:prstGeom>
-          <a:noFill/>
-          <a:ln/>
-        </p:spPr>
-        <p:txBody>
-          <a:bodyPr wrap="square" lIns="0" tIns="0" rIns="0" bIns="0" rtlCol="0" anchor="t"/>
-          <a:lstStyle/>
-          <a:p>
-            <a:pPr indent="0" marL="0">
-              <a:lnSpc>
-                <a:spcPct val="115000"/>
-              </a:lnSpc>
-              <a:buNone/>
-            </a:pPr>
-            <a:r>
-              <a:rPr lang="en-US" sz="1150" b="1" dirty="0">
-                <a:solidFill>
-                  <a:srgbClr val="F2EFE6"/>
-                </a:solidFill>
-                <a:latin typeface="Arial" pitchFamily="34" charset="0"/>
-                <a:ea typeface="Arial" pitchFamily="34" charset="-122"/>
-                <a:cs typeface="Arial" pitchFamily="34" charset="-120"/>
-              </a:rPr>
-              <a:t>Eenmalige opstart</a:t>
-            </a:r>
-            <a:endParaRPr lang="en-US" sz="1150" dirty="0"/>
-          </a:p>
-        </p:txBody>
-      </p:sp>
-      <p:sp>
-        <p:nvSpPr>
-          <p:cNvPr id="11" name="Text 9"/>
-          <p:cNvSpPr txBox="1"/>
-          <p:nvPr/>
-        </p:nvSpPr>
-        <p:spPr>
-          <a:xfrm>
-            <a:off x="825498" y="3594091"/>
-            <a:ext cx="2197095" cy="1079497"/>
-          </a:xfrm>
-          <a:prstGeom prst="rect">
-            <a:avLst/>
-          </a:prstGeom>
-          <a:noFill/>
-          <a:ln/>
-        </p:spPr>
-        <p:txBody>
-          <a:bodyPr wrap="square" lIns="0" tIns="0" rIns="0" bIns="0" rtlCol="0" anchor="t"/>
-          <a:lstStyle/>
-          <a:p>
-            <a:pPr indent="0" marL="0">
-              <a:lnSpc>
-                <a:spcPct val="130000"/>
-              </a:lnSpc>
-              <a:buNone/>
-            </a:pPr>
-            <a:r>
-              <a:rPr lang="en-US" sz="875" dirty="0">
-                <a:solidFill>
-                  <a:srgbClr val="C2C8D2"/>
-                </a:solidFill>
-                <a:latin typeface="Arial" pitchFamily="34" charset="0"/>
-                <a:ea typeface="Arial" pitchFamily="34" charset="-122"/>
-                <a:cs typeface="Arial" pitchFamily="34" charset="-120"/>
-              </a:rPr>
-              <a:t>€ 695 per klant. Kick-off, belscript, inrichting van het belsysteem en een regionaal nummer op naam van de klant. Eén keer, daarna nooit meer.</a:t>
-            </a:r>
-            <a:endParaRPr lang="en-US" sz="875" dirty="0"/>
-          </a:p>
-        </p:txBody>
-      </p:sp>
-      <p:sp>
-        <p:nvSpPr>
-          <p:cNvPr id="12" name="Shape 10"/>
-          <p:cNvSpPr/>
-          <p:nvPr/>
-        </p:nvSpPr>
-        <p:spPr>
-          <a:xfrm>
-            <a:off x="3390892" y="2463794"/>
-            <a:ext cx="2628893" cy="2362194"/>
-          </a:xfrm>
-          <a:prstGeom prst="roundRect">
-            <a:avLst>
-              <a:gd name="adj" fmla="val 4301"/>
-            </a:avLst>
-          </a:prstGeom>
-          <a:solidFill>
-            <a:srgbClr val="1B2130"/>
-          </a:solidFill>
+            <a:off x="6527784" y="4079230"/>
+            <a:ext cx="4724388" cy="0"/>
+          </a:xfrm>
+          <a:prstGeom prst="line">
+            <a:avLst/>
+          </a:prstGeom>
+          <a:noFill/>
           <a:ln w="9525">
             <a:solidFill>
               <a:srgbClr val="3A4152"/>
@@ -7604,168 +9816,97 @@
       </p:sp>
       <p:sp>
         <p:nvSpPr>
-          <p:cNvPr id="13" name="Shape 11"/>
+          <p:cNvPr id="33" name="Text 31"/>
+          <p:cNvSpPr txBox="1"/>
+          <p:nvPr/>
+        </p:nvSpPr>
+        <p:spPr>
+          <a:xfrm>
+            <a:off x="6527784" y="4079230"/>
+            <a:ext cx="4292589" cy="350519"/>
+          </a:xfrm>
+          <a:prstGeom prst="rect">
+            <a:avLst/>
+          </a:prstGeom>
+          <a:noFill/>
+          <a:ln/>
+        </p:spPr>
+        <p:txBody>
+          <a:bodyPr wrap="square" lIns="0" tIns="0" rIns="0" bIns="0" rtlCol="0" anchor="ctr"/>
+          <a:lstStyle/>
+          <a:p>
+            <a:pPr indent="0" marL="0">
+              <a:buNone/>
+            </a:pPr>
+            <a:r>
+              <a:rPr lang="en-US" sz="1100" dirty="0">
+                <a:solidFill>
+                  <a:srgbClr val="C2C8D2"/>
+                </a:solidFill>
+                <a:latin typeface="Arial" pitchFamily="34" charset="0"/>
+                <a:ea typeface="Arial" pitchFamily="34" charset="-122"/>
+                <a:cs typeface="Arial" pitchFamily="34" charset="-120"/>
+              </a:rPr>
+              <a:t>Afspraak vooraf</a:t>
+            </a:r>
+            <a:endParaRPr lang="en-US" sz="1100" dirty="0"/>
+          </a:p>
+        </p:txBody>
+      </p:sp>
+      <p:sp>
+        <p:nvSpPr>
+          <p:cNvPr id="34" name="Text 32"/>
+          <p:cNvSpPr txBox="1"/>
+          <p:nvPr/>
+        </p:nvSpPr>
+        <p:spPr>
+          <a:xfrm>
+            <a:off x="10426674" y="4079230"/>
+            <a:ext cx="825498" cy="350519"/>
+          </a:xfrm>
+          <a:prstGeom prst="rect">
+            <a:avLst/>
+          </a:prstGeom>
+          <a:noFill/>
+          <a:ln/>
+        </p:spPr>
+        <p:txBody>
+          <a:bodyPr wrap="square" lIns="0" tIns="0" rIns="0" bIns="0" rtlCol="0" anchor="ctr"/>
+          <a:lstStyle/>
+          <a:p>
+            <a:pPr algn="r" indent="0" marL="0">
+              <a:buNone/>
+            </a:pPr>
+            <a:r>
+              <a:rPr lang="en-US" sz="1350" b="1" dirty="0">
+                <a:solidFill>
+                  <a:srgbClr val="38B6FF"/>
+                </a:solidFill>
+                <a:latin typeface="Arial" pitchFamily="34" charset="0"/>
+                <a:ea typeface="Arial" pitchFamily="34" charset="-122"/>
+                <a:cs typeface="Arial" pitchFamily="34" charset="-120"/>
+              </a:rPr>
+              <a:t>Geen, we tellen</a:t>
+            </a:r>
+            <a:endParaRPr lang="en-US" sz="1350" dirty="0"/>
+          </a:p>
+        </p:txBody>
+      </p:sp>
+      <p:sp>
+        <p:nvSpPr>
+          <p:cNvPr id="35" name="Shape 33"/>
           <p:cNvSpPr/>
           <p:nvPr/>
         </p:nvSpPr>
         <p:spPr>
           <a:xfrm>
-            <a:off x="3606791" y="2692393"/>
-            <a:ext cx="292099" cy="292099"/>
-          </a:xfrm>
-          <a:prstGeom prst="ellipse">
-            <a:avLst/>
-          </a:prstGeom>
-          <a:ln w="15240">
-            <a:solidFill>
-              <a:srgbClr val="38B6FF"/>
-            </a:solidFill>
-            <a:prstDash val="solid"/>
-          </a:ln>
-        </p:spPr>
-      </p:sp>
-      <p:sp>
-        <p:nvSpPr>
-          <p:cNvPr id="14" name="Text 12"/>
-          <p:cNvSpPr txBox="1"/>
-          <p:nvPr/>
-        </p:nvSpPr>
-        <p:spPr>
-          <a:xfrm>
-            <a:off x="3606791" y="2692393"/>
-            <a:ext cx="292099" cy="292099"/>
-          </a:xfrm>
-          <a:prstGeom prst="rect">
-            <a:avLst/>
-          </a:prstGeom>
-          <a:noFill/>
-          <a:ln/>
-        </p:spPr>
-        <p:txBody>
-          <a:bodyPr wrap="square" lIns="0" tIns="0" rIns="0" bIns="0" rtlCol="0" anchor="ctr"/>
-          <a:lstStyle/>
-          <a:p>
-            <a:pPr algn="ctr" indent="0" marL="0">
-              <a:buNone/>
-            </a:pPr>
-            <a:r>
-              <a:rPr lang="en-US" sz="1000" b="1" dirty="0">
-                <a:solidFill>
-                  <a:srgbClr val="38B6FF"/>
-                </a:solidFill>
-                <a:latin typeface="Arial" pitchFamily="34" charset="0"/>
-                <a:ea typeface="Arial" pitchFamily="34" charset="-122"/>
-                <a:cs typeface="Arial" pitchFamily="34" charset="-120"/>
-              </a:rPr>
-              <a:t>2</a:t>
-            </a:r>
-            <a:endParaRPr lang="en-US" sz="1000" dirty="0"/>
-          </a:p>
-        </p:txBody>
-      </p:sp>
-      <p:sp>
-        <p:nvSpPr>
-          <p:cNvPr id="15" name="Text 13"/>
-          <p:cNvSpPr txBox="1"/>
-          <p:nvPr/>
-        </p:nvSpPr>
-        <p:spPr>
-          <a:xfrm>
-            <a:off x="3606791" y="3136892"/>
-            <a:ext cx="2197095" cy="406399"/>
-          </a:xfrm>
-          <a:prstGeom prst="rect">
-            <a:avLst/>
-          </a:prstGeom>
-          <a:noFill/>
-          <a:ln/>
-        </p:spPr>
-        <p:txBody>
-          <a:bodyPr wrap="square" lIns="0" tIns="0" rIns="0" bIns="0" rtlCol="0" anchor="t"/>
-          <a:lstStyle/>
-          <a:p>
-            <a:pPr indent="0" marL="0">
-              <a:lnSpc>
-                <a:spcPct val="115000"/>
-              </a:lnSpc>
-              <a:buNone/>
-            </a:pPr>
-            <a:r>
-              <a:rPr lang="en-US" sz="1150" b="1" dirty="0">
-                <a:solidFill>
-                  <a:srgbClr val="F2EFE6"/>
-                </a:solidFill>
-                <a:latin typeface="Arial" pitchFamily="34" charset="0"/>
-                <a:ea typeface="Arial" pitchFamily="34" charset="-122"/>
-                <a:cs typeface="Arial" pitchFamily="34" charset="-120"/>
-              </a:rPr>
-              <a:t>Beldagen per vier weken</a:t>
-            </a:r>
-            <a:endParaRPr lang="en-US" sz="1150" dirty="0"/>
-          </a:p>
-        </p:txBody>
-      </p:sp>
-      <p:sp>
-        <p:nvSpPr>
-          <p:cNvPr id="16" name="Text 14"/>
-          <p:cNvSpPr txBox="1"/>
-          <p:nvPr/>
-        </p:nvSpPr>
-        <p:spPr>
-          <a:xfrm>
-            <a:off x="3606791" y="3594091"/>
-            <a:ext cx="2197095" cy="1079497"/>
-          </a:xfrm>
-          <a:prstGeom prst="rect">
-            <a:avLst/>
-          </a:prstGeom>
-          <a:noFill/>
-          <a:ln/>
-        </p:spPr>
-        <p:txBody>
-          <a:bodyPr wrap="square" lIns="0" tIns="0" rIns="0" bIns="0" rtlCol="0" anchor="t"/>
-          <a:lstStyle/>
-          <a:p>
-            <a:pPr indent="0" marL="0">
-              <a:lnSpc>
-                <a:spcPct val="130000"/>
-              </a:lnSpc>
-              <a:buNone/>
-            </a:pPr>
-            <a:r>
-              <a:rPr lang="en-US" sz="875" dirty="0">
-                <a:solidFill>
-                  <a:srgbClr val="C2C8D2"/>
-                </a:solidFill>
-                <a:latin typeface="Arial" pitchFamily="34" charset="0"/>
-                <a:ea typeface="Arial" pitchFamily="34" charset="-122"/>
-                <a:cs typeface="Arial" pitchFamily="34" charset="-120"/>
-              </a:rPr>
-              <a:t>Daarna reken je per beldag. De klant kiest zelf hoeveel dagen er per periode gebeld wordt, vanaf vier.</a:t>
-            </a:r>
-            <a:endParaRPr lang="en-US" sz="875" dirty="0"/>
-          </a:p>
-        </p:txBody>
-      </p:sp>
-      <p:sp>
-        <p:nvSpPr>
-          <p:cNvPr id="17" name="Shape 15"/>
-          <p:cNvSpPr/>
-          <p:nvPr/>
-        </p:nvSpPr>
-        <p:spPr>
-          <a:xfrm>
-            <a:off x="6172185" y="2463794"/>
-            <a:ext cx="2628893" cy="2362194"/>
-          </a:xfrm>
-          <a:prstGeom prst="roundRect">
-            <a:avLst>
-              <a:gd name="adj" fmla="val 4301"/>
-            </a:avLst>
-          </a:prstGeom>
-          <a:solidFill>
-            <a:srgbClr val="1B2130"/>
-          </a:solidFill>
+            <a:off x="6527784" y="4429749"/>
+            <a:ext cx="4724388" cy="0"/>
+          </a:xfrm>
+          <a:prstGeom prst="line">
+            <a:avLst/>
+          </a:prstGeom>
+          <a:noFill/>
           <a:ln w="9525">
             <a:solidFill>
               <a:srgbClr val="3A4152"/>
@@ -7776,21 +9917,100 @@
       </p:sp>
       <p:sp>
         <p:nvSpPr>
-          <p:cNvPr id="18" name="Shape 16"/>
+          <p:cNvPr id="36" name="Text 34"/>
+          <p:cNvSpPr txBox="1"/>
+          <p:nvPr/>
+        </p:nvSpPr>
+        <p:spPr>
+          <a:xfrm>
+            <a:off x="6527784" y="4429749"/>
+            <a:ext cx="4292589" cy="350519"/>
+          </a:xfrm>
+          <a:prstGeom prst="rect">
+            <a:avLst/>
+          </a:prstGeom>
+          <a:noFill/>
+          <a:ln/>
+        </p:spPr>
+        <p:txBody>
+          <a:bodyPr wrap="square" lIns="0" tIns="0" rIns="0" bIns="0" rtlCol="0" anchor="ctr"/>
+          <a:lstStyle/>
+          <a:p>
+            <a:pPr indent="0" marL="0">
+              <a:buNone/>
+            </a:pPr>
+            <a:r>
+              <a:rPr lang="en-US" sz="1100" dirty="0">
+                <a:solidFill>
+                  <a:srgbClr val="C2C8D2"/>
+                </a:solidFill>
+                <a:latin typeface="Arial" pitchFamily="34" charset="0"/>
+                <a:ea typeface="Arial" pitchFamily="34" charset="-122"/>
+                <a:cs typeface="Arial" pitchFamily="34" charset="-120"/>
+              </a:rPr>
+              <a:t>Minimum daarna</a:t>
+            </a:r>
+            <a:endParaRPr lang="en-US" sz="1100" dirty="0"/>
+          </a:p>
+        </p:txBody>
+      </p:sp>
+      <p:sp>
+        <p:nvSpPr>
+          <p:cNvPr id="37" name="Text 35"/>
+          <p:cNvSpPr txBox="1"/>
+          <p:nvPr/>
+        </p:nvSpPr>
+        <p:spPr>
+          <a:xfrm>
+            <a:off x="10426674" y="4429749"/>
+            <a:ext cx="825498" cy="350519"/>
+          </a:xfrm>
+          <a:prstGeom prst="rect">
+            <a:avLst/>
+          </a:prstGeom>
+          <a:noFill/>
+          <a:ln/>
+        </p:spPr>
+        <p:txBody>
+          <a:bodyPr wrap="square" lIns="0" tIns="0" rIns="0" bIns="0" rtlCol="0" anchor="ctr"/>
+          <a:lstStyle/>
+          <a:p>
+            <a:pPr algn="r" indent="0" marL="0">
+              <a:buNone/>
+            </a:pPr>
+            <a:r>
+              <a:rPr lang="en-US" sz="1350" b="1" dirty="0">
+                <a:solidFill>
+                  <a:srgbClr val="38B6FF"/>
+                </a:solidFill>
+                <a:latin typeface="Arial" pitchFamily="34" charset="0"/>
+                <a:ea typeface="Arial" pitchFamily="34" charset="-122"/>
+                <a:cs typeface="Arial" pitchFamily="34" charset="-120"/>
+              </a:rPr>
+              <a:t>2 beldagen</a:t>
+            </a:r>
+            <a:endParaRPr lang="en-US" sz="1350" dirty="0"/>
+          </a:p>
+        </p:txBody>
+      </p:sp>
+      <p:sp>
+        <p:nvSpPr>
+          <p:cNvPr id="38" name="Shape 36"/>
           <p:cNvSpPr/>
           <p:nvPr/>
         </p:nvSpPr>
         <p:spPr>
           <a:xfrm>
-            <a:off x="6388084" y="2692393"/>
-            <a:ext cx="292099" cy="292099"/>
-          </a:xfrm>
-          <a:prstGeom prst="ellipse">
-            <a:avLst/>
-          </a:prstGeom>
-          <a:ln w="15240">
+            <a:off x="6527784" y="4780268"/>
+            <a:ext cx="4724388" cy="0"/>
+          </a:xfrm>
+          <a:prstGeom prst="line">
+            <a:avLst/>
+          </a:prstGeom>
+          <a:noFill/>
+          <a:ln w="9525">
             <a:solidFill>
-              <a:srgbClr val="38B6FF"/>
+              <a:srgbClr val="3A4152"/>
             </a:solidFill>
             <a:prstDash val="solid"/>
           </a:ln>
@@ -7798,30 +10018,69 @@
       </p:sp>
       <p:sp>
         <p:nvSpPr>
-          <p:cNvPr id="19" name="Text 17"/>
-          <p:cNvSpPr txBox="1"/>
-          <p:nvPr/>
-        </p:nvSpPr>
-        <p:spPr>
-          <a:xfrm>
-            <a:off x="6388084" y="2692393"/>
-            <a:ext cx="292099" cy="292099"/>
-          </a:xfrm>
-          <a:prstGeom prst="rect">
-            <a:avLst/>
-          </a:prstGeom>
-          <a:noFill/>
-          <a:ln/>
-        </p:spPr>
-        <p:txBody>
-          <a:bodyPr wrap="square" lIns="0" tIns="0" rIns="0" bIns="0" rtlCol="0" anchor="ctr"/>
-          <a:lstStyle/>
-          <a:p>
-            <a:pPr algn="ctr" indent="0" marL="0">
-              <a:buNone/>
-            </a:pPr>
-            <a:r>
-              <a:rPr lang="en-US" sz="1000" b="1" dirty="0">
+          <p:cNvPr id="39" name="Text 37"/>
+          <p:cNvSpPr txBox="1"/>
+          <p:nvPr/>
+        </p:nvSpPr>
+        <p:spPr>
+          <a:xfrm>
+            <a:off x="6527784" y="4780268"/>
+            <a:ext cx="4292589" cy="350519"/>
+          </a:xfrm>
+          <a:prstGeom prst="rect">
+            <a:avLst/>
+          </a:prstGeom>
+          <a:noFill/>
+          <a:ln/>
+        </p:spPr>
+        <p:txBody>
+          <a:bodyPr wrap="square" lIns="0" tIns="0" rIns="0" bIns="0" rtlCol="0" anchor="ctr"/>
+          <a:lstStyle/>
+          <a:p>
+            <a:pPr indent="0" marL="0">
+              <a:buNone/>
+            </a:pPr>
+            <a:r>
+              <a:rPr lang="en-US" sz="1100" dirty="0">
+                <a:solidFill>
+                  <a:srgbClr val="C2C8D2"/>
+                </a:solidFill>
+                <a:latin typeface="Arial" pitchFamily="34" charset="0"/>
+                <a:ea typeface="Arial" pitchFamily="34" charset="-122"/>
+                <a:cs typeface="Arial" pitchFamily="34" charset="-120"/>
+              </a:rPr>
+              <a:t>Beslissen</a:t>
+            </a:r>
+            <a:endParaRPr lang="en-US" sz="1100" dirty="0"/>
+          </a:p>
+        </p:txBody>
+      </p:sp>
+      <p:sp>
+        <p:nvSpPr>
+          <p:cNvPr id="40" name="Text 38"/>
+          <p:cNvSpPr txBox="1"/>
+          <p:nvPr/>
+        </p:nvSpPr>
+        <p:spPr>
+          <a:xfrm>
+            <a:off x="10426674" y="4780268"/>
+            <a:ext cx="825498" cy="350519"/>
+          </a:xfrm>
+          <a:prstGeom prst="rect">
+            <a:avLst/>
+          </a:prstGeom>
+          <a:noFill/>
+          <a:ln/>
+        </p:spPr>
+        <p:txBody>
+          <a:bodyPr wrap="square" lIns="0" tIns="0" rIns="0" bIns="0" rtlCol="0" anchor="ctr"/>
+          <a:lstStyle/>
+          <a:p>
+            <a:pPr algn="r" indent="0" marL="0">
+              <a:buNone/>
+            </a:pPr>
+            <a:r>
+              <a:rPr lang="en-US" sz="1350" b="1" dirty="0">
                 <a:solidFill>
                   <a:srgbClr val="38B6FF"/>
                 </a:solidFill>
@@ -7829,283 +10088,25 @@
                 <a:ea typeface="Arial" pitchFamily="34" charset="-122"/>
                 <a:cs typeface="Arial" pitchFamily="34" charset="-120"/>
               </a:rPr>
-              <a:t>3</a:t>
-            </a:r>
-            <a:endParaRPr lang="en-US" sz="1000" dirty="0"/>
-          </a:p>
-        </p:txBody>
-      </p:sp>
-      <p:sp>
-        <p:nvSpPr>
-          <p:cNvPr id="20" name="Text 18"/>
-          <p:cNvSpPr txBox="1"/>
-          <p:nvPr/>
-        </p:nvSpPr>
-        <p:spPr>
-          <a:xfrm>
-            <a:off x="6388084" y="3136892"/>
-            <a:ext cx="2197095" cy="406399"/>
-          </a:xfrm>
-          <a:prstGeom prst="rect">
-            <a:avLst/>
-          </a:prstGeom>
-          <a:noFill/>
-          <a:ln/>
-        </p:spPr>
-        <p:txBody>
-          <a:bodyPr wrap="square" lIns="0" tIns="0" rIns="0" bIns="0" rtlCol="0" anchor="t"/>
-          <a:lstStyle/>
-          <a:p>
-            <a:pPr indent="0" marL="0">
-              <a:lnSpc>
-                <a:spcPct val="115000"/>
-              </a:lnSpc>
-              <a:buNone/>
-            </a:pPr>
-            <a:r>
-              <a:rPr lang="en-US" sz="1150" b="1" dirty="0">
-                <a:solidFill>
-                  <a:srgbClr val="F2EFE6"/>
-                </a:solidFill>
-                <a:latin typeface="Arial" pitchFamily="34" charset="0"/>
-                <a:ea typeface="Arial" pitchFamily="34" charset="-122"/>
-                <a:cs typeface="Arial" pitchFamily="34" charset="-120"/>
-              </a:rPr>
-              <a:t>Wat een beldag is</a:t>
-            </a:r>
-            <a:endParaRPr lang="en-US" sz="1150" dirty="0"/>
-          </a:p>
-        </p:txBody>
-      </p:sp>
-      <p:sp>
-        <p:nvSpPr>
-          <p:cNvPr id="21" name="Text 19"/>
-          <p:cNvSpPr txBox="1"/>
-          <p:nvPr/>
-        </p:nvSpPr>
-        <p:spPr>
-          <a:xfrm>
-            <a:off x="6388084" y="3594091"/>
-            <a:ext cx="2197095" cy="1079497"/>
-          </a:xfrm>
-          <a:prstGeom prst="rect">
-            <a:avLst/>
-          </a:prstGeom>
-          <a:noFill/>
-          <a:ln/>
-        </p:spPr>
-        <p:txBody>
-          <a:bodyPr wrap="square" lIns="0" tIns="0" rIns="0" bIns="0" rtlCol="0" anchor="t"/>
-          <a:lstStyle/>
-          <a:p>
-            <a:pPr indent="0" marL="0">
-              <a:lnSpc>
-                <a:spcPct val="130000"/>
-              </a:lnSpc>
-              <a:buNone/>
-            </a:pPr>
-            <a:r>
-              <a:rPr lang="en-US" sz="875" dirty="0">
-                <a:solidFill>
-                  <a:srgbClr val="C2C8D2"/>
-                </a:solidFill>
-                <a:latin typeface="Arial" pitchFamily="34" charset="0"/>
-                <a:ea typeface="Arial" pitchFamily="34" charset="-122"/>
-                <a:cs typeface="Arial" pitchFamily="34" charset="-120"/>
-              </a:rPr>
-              <a:t>Een volle dag bellen door één vaste beller: ongeveer honderd gesprekspogingen, alle notities vastgelegd en dezelfde dag overgedragen.</a:t>
-            </a:r>
-            <a:endParaRPr lang="en-US" sz="875" dirty="0"/>
-          </a:p>
-        </p:txBody>
-      </p:sp>
-      <p:sp>
-        <p:nvSpPr>
-          <p:cNvPr id="22" name="Shape 20"/>
+              <a:t>Elke periode</a:t>
+            </a:r>
+            <a:endParaRPr lang="en-US" sz="1350" dirty="0"/>
+          </a:p>
+        </p:txBody>
+      </p:sp>
+      <p:sp>
+        <p:nvSpPr>
+          <p:cNvPr id="41" name="Shape 39"/>
           <p:cNvSpPr/>
           <p:nvPr/>
         </p:nvSpPr>
         <p:spPr>
           <a:xfrm>
-            <a:off x="8953478" y="2463794"/>
-            <a:ext cx="2628893" cy="2362194"/>
-          </a:xfrm>
-          <a:prstGeom prst="roundRect">
-            <a:avLst>
-              <a:gd name="adj" fmla="val 4301"/>
-            </a:avLst>
-          </a:prstGeom>
-          <a:solidFill>
-            <a:srgbClr val="1B2130"/>
-          </a:solidFill>
-          <a:ln w="15240">
-            <a:solidFill>
-              <a:srgbClr val="38B6FF"/>
-            </a:solidFill>
-            <a:prstDash val="solid"/>
-          </a:ln>
-        </p:spPr>
-      </p:sp>
-      <p:sp>
-        <p:nvSpPr>
-          <p:cNvPr id="23" name="Shape 21"/>
-          <p:cNvSpPr/>
-          <p:nvPr/>
-        </p:nvSpPr>
-        <p:spPr>
-          <a:xfrm>
-            <a:off x="9169377" y="2692393"/>
-            <a:ext cx="292099" cy="292099"/>
+            <a:off x="609598" y="5854685"/>
+            <a:ext cx="76200" cy="76200"/>
           </a:xfrm>
           <a:prstGeom prst="ellipse">
             <a:avLst/>
-          </a:prstGeom>
-          <a:ln w="15240">
-            <a:solidFill>
-              <a:srgbClr val="38B6FF"/>
-            </a:solidFill>
-            <a:prstDash val="solid"/>
-          </a:ln>
-        </p:spPr>
-      </p:sp>
-      <p:sp>
-        <p:nvSpPr>
-          <p:cNvPr id="24" name="Text 22"/>
-          <p:cNvSpPr txBox="1"/>
-          <p:nvPr/>
-        </p:nvSpPr>
-        <p:spPr>
-          <a:xfrm>
-            <a:off x="9169377" y="2692393"/>
-            <a:ext cx="292099" cy="292099"/>
-          </a:xfrm>
-          <a:prstGeom prst="rect">
-            <a:avLst/>
-          </a:prstGeom>
-          <a:noFill/>
-          <a:ln/>
-        </p:spPr>
-        <p:txBody>
-          <a:bodyPr wrap="square" lIns="0" tIns="0" rIns="0" bIns="0" rtlCol="0" anchor="ctr"/>
-          <a:lstStyle/>
-          <a:p>
-            <a:pPr algn="ctr" indent="0" marL="0">
-              <a:buNone/>
-            </a:pPr>
-            <a:r>
-              <a:rPr lang="en-US" sz="1000" b="1" dirty="0">
-                <a:solidFill>
-                  <a:srgbClr val="38B6FF"/>
-                </a:solidFill>
-                <a:latin typeface="Arial" pitchFamily="34" charset="0"/>
-                <a:ea typeface="Arial" pitchFamily="34" charset="-122"/>
-                <a:cs typeface="Arial" pitchFamily="34" charset="-120"/>
-              </a:rPr>
-              <a:t>4</a:t>
-            </a:r>
-            <a:endParaRPr lang="en-US" sz="1000" dirty="0"/>
-          </a:p>
-        </p:txBody>
-      </p:sp>
-      <p:sp>
-        <p:nvSpPr>
-          <p:cNvPr id="25" name="Text 23"/>
-          <p:cNvSpPr txBox="1"/>
-          <p:nvPr/>
-        </p:nvSpPr>
-        <p:spPr>
-          <a:xfrm>
-            <a:off x="9169377" y="3136892"/>
-            <a:ext cx="2197095" cy="406399"/>
-          </a:xfrm>
-          <a:prstGeom prst="rect">
-            <a:avLst/>
-          </a:prstGeom>
-          <a:noFill/>
-          <a:ln/>
-        </p:spPr>
-        <p:txBody>
-          <a:bodyPr wrap="square" lIns="0" tIns="0" rIns="0" bIns="0" rtlCol="0" anchor="t"/>
-          <a:lstStyle/>
-          <a:p>
-            <a:pPr indent="0" marL="0">
-              <a:lnSpc>
-                <a:spcPct val="115000"/>
-              </a:lnSpc>
-              <a:buNone/>
-            </a:pPr>
-            <a:r>
-              <a:rPr lang="en-US" sz="1150" b="1" dirty="0">
-                <a:solidFill>
-                  <a:srgbClr val="38B6FF"/>
-                </a:solidFill>
-                <a:latin typeface="Arial" pitchFamily="34" charset="0"/>
-                <a:ea typeface="Arial" pitchFamily="34" charset="-122"/>
-                <a:cs typeface="Arial" pitchFamily="34" charset="-120"/>
-              </a:rPr>
-              <a:t>Op- en afschalen</a:t>
-            </a:r>
-            <a:endParaRPr lang="en-US" sz="1150" dirty="0"/>
-          </a:p>
-        </p:txBody>
-      </p:sp>
-      <p:sp>
-        <p:nvSpPr>
-          <p:cNvPr id="26" name="Text 24"/>
-          <p:cNvSpPr txBox="1"/>
-          <p:nvPr/>
-        </p:nvSpPr>
-        <p:spPr>
-          <a:xfrm>
-            <a:off x="9169377" y="3594091"/>
-            <a:ext cx="2197095" cy="1079497"/>
-          </a:xfrm>
-          <a:prstGeom prst="rect">
-            <a:avLst/>
-          </a:prstGeom>
-          <a:noFill/>
-          <a:ln/>
-        </p:spPr>
-        <p:txBody>
-          <a:bodyPr wrap="square" lIns="0" tIns="0" rIns="0" bIns="0" rtlCol="0" anchor="t"/>
-          <a:lstStyle/>
-          <a:p>
-            <a:pPr indent="0" marL="0">
-              <a:lnSpc>
-                <a:spcPct val="130000"/>
-              </a:lnSpc>
-              <a:buNone/>
-            </a:pPr>
-            <a:r>
-              <a:rPr lang="en-US" sz="875" dirty="0">
-                <a:solidFill>
-                  <a:srgbClr val="C2C8D2"/>
-                </a:solidFill>
-                <a:latin typeface="Arial" pitchFamily="34" charset="0"/>
-                <a:ea typeface="Arial" pitchFamily="34" charset="-122"/>
-                <a:cs typeface="Arial" pitchFamily="34" charset="-120"/>
-              </a:rPr>
-              <a:t>Loopt het goed, dan zetten we er beldagen bij. Loopt het minder, dan schalen we terug. Vastgelegd met een maand opzegtermijn.</a:t>
-            </a:r>
-            <a:endParaRPr lang="en-US" sz="875" dirty="0"/>
-          </a:p>
-        </p:txBody>
-      </p:sp>
-      <p:sp>
-        <p:nvSpPr>
-          <p:cNvPr id="27" name="Shape 25"/>
-          <p:cNvSpPr/>
-          <p:nvPr/>
-        </p:nvSpPr>
-        <p:spPr>
-          <a:xfrm>
-            <a:off x="609598" y="5079987"/>
-            <a:ext cx="10972773" cy="1028697"/>
-          </a:xfrm>
-          <a:prstGeom prst="roundRect">
-            <a:avLst>
-              <a:gd name="adj" fmla="val 9877"/>
-            </a:avLst>
           </a:prstGeom>
           <a:solidFill>
             <a:srgbClr val="38B6FF"/>
@@ -8115,14 +10116,14 @@
       </p:sp>
       <p:sp>
         <p:nvSpPr>
-          <p:cNvPr id="28" name="Text 26"/>
-          <p:cNvSpPr txBox="1"/>
-          <p:nvPr/>
-        </p:nvSpPr>
-        <p:spPr>
-          <a:xfrm>
-            <a:off x="914398" y="5245087"/>
-            <a:ext cx="1904995" cy="165100"/>
+          <p:cNvPr id="42" name="Text 40"/>
+          <p:cNvSpPr txBox="1"/>
+          <p:nvPr/>
+        </p:nvSpPr>
+        <p:spPr>
+          <a:xfrm>
+            <a:off x="800098" y="5714986"/>
+            <a:ext cx="9905975" cy="355599"/>
           </a:xfrm>
           <a:prstGeom prst="rect">
             <a:avLst/>
@@ -8138,498 +10139,17 @@
               <a:buNone/>
             </a:pPr>
             <a:r>
-              <a:rPr lang="en-US" sz="800" b="1" spc="200" kern="0" dirty="0">
-                <a:solidFill>
-                  <a:srgbClr val="0D1420"/>
-                </a:solidFill>
-                <a:latin typeface="Arial" pitchFamily="34" charset="0"/>
-                <a:ea typeface="Arial" pitchFamily="34" charset="-122"/>
-                <a:cs typeface="Arial" pitchFamily="34" charset="-120"/>
-              </a:rPr>
-              <a:t>OPSTART PER KLANT</a:t>
-            </a:r>
-            <a:endParaRPr lang="en-US" sz="800" dirty="0"/>
-          </a:p>
-        </p:txBody>
-      </p:sp>
-      <p:sp>
-        <p:nvSpPr>
-          <p:cNvPr id="29" name="Text 27"/>
-          <p:cNvSpPr txBox="1"/>
-          <p:nvPr/>
-        </p:nvSpPr>
-        <p:spPr>
-          <a:xfrm>
-            <a:off x="914398" y="5410186"/>
-            <a:ext cx="1904995" cy="406399"/>
-          </a:xfrm>
-          <a:prstGeom prst="rect">
-            <a:avLst/>
-          </a:prstGeom>
-          <a:noFill/>
-          <a:ln/>
-        </p:spPr>
-        <p:txBody>
-          <a:bodyPr wrap="square" lIns="0" tIns="0" rIns="0" bIns="0" rtlCol="0" anchor="ctr"/>
-          <a:lstStyle/>
-          <a:p>
-            <a:pPr indent="0" marL="0">
-              <a:buNone/>
-            </a:pPr>
-            <a:r>
-              <a:rPr lang="en-US" sz="2900" b="1" dirty="0">
-                <a:solidFill>
-                  <a:srgbClr val="0D1420"/>
-                </a:solidFill>
-                <a:latin typeface="Arial" pitchFamily="34" charset="0"/>
-                <a:ea typeface="Arial" pitchFamily="34" charset="-122"/>
-                <a:cs typeface="Arial" pitchFamily="34" charset="-120"/>
-              </a:rPr>
-              <a:t>€ 695</a:t>
-            </a:r>
-            <a:endParaRPr lang="en-US" sz="2900" dirty="0"/>
-          </a:p>
-        </p:txBody>
-      </p:sp>
-      <p:sp>
-        <p:nvSpPr>
-          <p:cNvPr id="30" name="Text 28"/>
-          <p:cNvSpPr txBox="1"/>
-          <p:nvPr/>
-        </p:nvSpPr>
-        <p:spPr>
-          <a:xfrm>
-            <a:off x="914398" y="5829285"/>
-            <a:ext cx="2031995" cy="165100"/>
-          </a:xfrm>
-          <a:prstGeom prst="rect">
-            <a:avLst/>
-          </a:prstGeom>
-          <a:noFill/>
-          <a:ln/>
-        </p:spPr>
-        <p:txBody>
-          <a:bodyPr wrap="square" lIns="0" tIns="0" rIns="0" bIns="0" rtlCol="0" anchor="ctr"/>
-          <a:lstStyle/>
-          <a:p>
-            <a:pPr indent="0" marL="0">
-              <a:buNone/>
-            </a:pPr>
-            <a:r>
-              <a:rPr lang="en-US" sz="800" b="1" dirty="0">
-                <a:solidFill>
-                  <a:srgbClr val="0D1420"/>
-                </a:solidFill>
-                <a:latin typeface="Arial" pitchFamily="34" charset="0"/>
-                <a:ea typeface="Arial" pitchFamily="34" charset="-122"/>
-                <a:cs typeface="Arial" pitchFamily="34" charset="-120"/>
-              </a:rPr>
-              <a:t>eenmalig, excl. btw</a:t>
-            </a:r>
-            <a:endParaRPr lang="en-US" sz="800" dirty="0"/>
-          </a:p>
-        </p:txBody>
-      </p:sp>
-      <p:sp>
-        <p:nvSpPr>
-          <p:cNvPr id="31" name="Shape 29"/>
-          <p:cNvSpPr/>
-          <p:nvPr/>
-        </p:nvSpPr>
-        <p:spPr>
-          <a:xfrm>
-            <a:off x="3174992" y="5257787"/>
-            <a:ext cx="0" cy="673098"/>
-          </a:xfrm>
-          <a:prstGeom prst="line">
-            <a:avLst/>
-          </a:prstGeom>
-          <a:noFill/>
-          <a:ln w="9525">
-            <a:solidFill>
-              <a:srgbClr val="0D1420">
-                <a:alpha val="40000"/>
-              </a:srgbClr>
-            </a:solidFill>
-            <a:prstDash val="solid"/>
-          </a:ln>
-        </p:spPr>
-      </p:sp>
-      <p:pic>
-        <p:nvPicPr>
-          <p:cNvPr id="32" name="Image 0" descr="preencoded.png">    </p:cNvPr>
-          <p:cNvPicPr>
-            <a:picLocks noChangeAspect="1"/>
-          </p:cNvPicPr>
-          <p:nvPr/>
-        </p:nvPicPr>
-        <p:blipFill>
-          <a:blip r:embed="rId1"/>
-          <a:stretch>
-            <a:fillRect/>
-          </a:stretch>
-        </p:blipFill>
-        <p:spPr>
-          <a:xfrm>
-            <a:off x="3530591" y="5276837"/>
-            <a:ext cx="127000" cy="127000"/>
-          </a:xfrm>
-          <a:prstGeom prst="rect">
-            <a:avLst/>
-          </a:prstGeom>
-        </p:spPr>
-      </p:pic>
-      <p:sp>
-        <p:nvSpPr>
-          <p:cNvPr id="33" name="Text 30"/>
-          <p:cNvSpPr txBox="1"/>
-          <p:nvPr/>
-        </p:nvSpPr>
-        <p:spPr>
-          <a:xfrm>
-            <a:off x="3733791" y="5245087"/>
-            <a:ext cx="3555991" cy="215899"/>
-          </a:xfrm>
-          <a:prstGeom prst="rect">
-            <a:avLst/>
-          </a:prstGeom>
-          <a:noFill/>
-          <a:ln/>
-        </p:spPr>
-        <p:txBody>
-          <a:bodyPr wrap="square" lIns="0" tIns="0" rIns="0" bIns="0" rtlCol="0" anchor="ctr"/>
-          <a:lstStyle/>
-          <a:p>
-            <a:pPr indent="0" marL="0">
-              <a:buNone/>
-            </a:pPr>
-            <a:r>
-              <a:rPr lang="en-US" sz="900" b="1" dirty="0">
-                <a:solidFill>
-                  <a:srgbClr val="0D1420"/>
-                </a:solidFill>
-                <a:latin typeface="Arial" pitchFamily="34" charset="0"/>
-                <a:ea typeface="Arial" pitchFamily="34" charset="-122"/>
-                <a:cs typeface="Arial" pitchFamily="34" charset="-120"/>
-              </a:rPr>
-              <a:t>Kick-off met de klant</a:t>
-            </a:r>
-            <a:endParaRPr lang="en-US" sz="900" dirty="0"/>
-          </a:p>
-        </p:txBody>
-      </p:sp>
-      <p:pic>
-        <p:nvPicPr>
-          <p:cNvPr id="34" name="Image 1" descr="preencoded.png">    </p:cNvPr>
-          <p:cNvPicPr>
-            <a:picLocks noChangeAspect="1"/>
-          </p:cNvPicPr>
-          <p:nvPr/>
-        </p:nvPicPr>
-        <p:blipFill>
-          <a:blip r:embed="rId2"/>
-          <a:stretch>
-            <a:fillRect/>
-          </a:stretch>
-        </p:blipFill>
-        <p:spPr>
-          <a:xfrm>
-            <a:off x="7340582" y="5276837"/>
-            <a:ext cx="127000" cy="127000"/>
-          </a:xfrm>
-          <a:prstGeom prst="rect">
-            <a:avLst/>
-          </a:prstGeom>
-        </p:spPr>
-      </p:pic>
-      <p:sp>
-        <p:nvSpPr>
-          <p:cNvPr id="35" name="Text 31"/>
-          <p:cNvSpPr txBox="1"/>
-          <p:nvPr/>
-        </p:nvSpPr>
-        <p:spPr>
-          <a:xfrm>
-            <a:off x="7543781" y="5245087"/>
-            <a:ext cx="3555991" cy="215899"/>
-          </a:xfrm>
-          <a:prstGeom prst="rect">
-            <a:avLst/>
-          </a:prstGeom>
-          <a:noFill/>
-          <a:ln/>
-        </p:spPr>
-        <p:txBody>
-          <a:bodyPr wrap="square" lIns="0" tIns="0" rIns="0" bIns="0" rtlCol="0" anchor="ctr"/>
-          <a:lstStyle/>
-          <a:p>
-            <a:pPr indent="0" marL="0">
-              <a:buNone/>
-            </a:pPr>
-            <a:r>
-              <a:rPr lang="en-US" sz="900" b="1" dirty="0">
-                <a:solidFill>
-                  <a:srgbClr val="0D1420"/>
-                </a:solidFill>
-                <a:latin typeface="Arial" pitchFamily="34" charset="0"/>
-                <a:ea typeface="Arial" pitchFamily="34" charset="-122"/>
-                <a:cs typeface="Arial" pitchFamily="34" charset="-120"/>
-              </a:rPr>
-              <a:t>Belscript en bezwaren</a:t>
-            </a:r>
-            <a:endParaRPr lang="en-US" sz="900" dirty="0"/>
-          </a:p>
-        </p:txBody>
-      </p:sp>
-      <p:pic>
-        <p:nvPicPr>
-          <p:cNvPr id="36" name="Image 2" descr="preencoded.png">    </p:cNvPr>
-          <p:cNvPicPr>
-            <a:picLocks noChangeAspect="1"/>
-          </p:cNvPicPr>
-          <p:nvPr/>
-        </p:nvPicPr>
-        <p:blipFill>
-          <a:blip r:embed="rId3"/>
-          <a:stretch>
-            <a:fillRect/>
-          </a:stretch>
-        </p:blipFill>
-        <p:spPr>
-          <a:xfrm>
-            <a:off x="3530591" y="5530836"/>
-            <a:ext cx="127000" cy="127000"/>
-          </a:xfrm>
-          <a:prstGeom prst="rect">
-            <a:avLst/>
-          </a:prstGeom>
-        </p:spPr>
-      </p:pic>
-      <p:sp>
-        <p:nvSpPr>
-          <p:cNvPr id="37" name="Text 32"/>
-          <p:cNvSpPr txBox="1"/>
-          <p:nvPr/>
-        </p:nvSpPr>
-        <p:spPr>
-          <a:xfrm>
-            <a:off x="3733791" y="5499086"/>
-            <a:ext cx="3555991" cy="215899"/>
-          </a:xfrm>
-          <a:prstGeom prst="rect">
-            <a:avLst/>
-          </a:prstGeom>
-          <a:noFill/>
-          <a:ln/>
-        </p:spPr>
-        <p:txBody>
-          <a:bodyPr wrap="square" lIns="0" tIns="0" rIns="0" bIns="0" rtlCol="0" anchor="ctr"/>
-          <a:lstStyle/>
-          <a:p>
-            <a:pPr indent="0" marL="0">
-              <a:buNone/>
-            </a:pPr>
-            <a:r>
-              <a:rPr lang="en-US" sz="900" b="1" dirty="0">
-                <a:solidFill>
-                  <a:srgbClr val="0D1420"/>
-                </a:solidFill>
-                <a:latin typeface="Arial" pitchFamily="34" charset="0"/>
-                <a:ea typeface="Arial" pitchFamily="34" charset="-122"/>
-                <a:cs typeface="Arial" pitchFamily="34" charset="-120"/>
-              </a:rPr>
-              <a:t>Bellijst en uitsluitingen</a:t>
-            </a:r>
-            <a:endParaRPr lang="en-US" sz="900" dirty="0"/>
-          </a:p>
-        </p:txBody>
-      </p:sp>
-      <p:pic>
-        <p:nvPicPr>
-          <p:cNvPr id="38" name="Image 3" descr="preencoded.png">    </p:cNvPr>
-          <p:cNvPicPr>
-            <a:picLocks noChangeAspect="1"/>
-          </p:cNvPicPr>
-          <p:nvPr/>
-        </p:nvPicPr>
-        <p:blipFill>
-          <a:blip r:embed="rId4"/>
-          <a:stretch>
-            <a:fillRect/>
-          </a:stretch>
-        </p:blipFill>
-        <p:spPr>
-          <a:xfrm>
-            <a:off x="7340582" y="5530836"/>
-            <a:ext cx="127000" cy="127000"/>
-          </a:xfrm>
-          <a:prstGeom prst="rect">
-            <a:avLst/>
-          </a:prstGeom>
-        </p:spPr>
-      </p:pic>
-      <p:sp>
-        <p:nvSpPr>
-          <p:cNvPr id="39" name="Text 33"/>
-          <p:cNvSpPr txBox="1"/>
-          <p:nvPr/>
-        </p:nvSpPr>
-        <p:spPr>
-          <a:xfrm>
-            <a:off x="7543781" y="5499086"/>
-            <a:ext cx="3555991" cy="215899"/>
-          </a:xfrm>
-          <a:prstGeom prst="rect">
-            <a:avLst/>
-          </a:prstGeom>
-          <a:noFill/>
-          <a:ln/>
-        </p:spPr>
-        <p:txBody>
-          <a:bodyPr wrap="square" lIns="0" tIns="0" rIns="0" bIns="0" rtlCol="0" anchor="ctr"/>
-          <a:lstStyle/>
-          <a:p>
-            <a:pPr indent="0" marL="0">
-              <a:buNone/>
-            </a:pPr>
-            <a:r>
-              <a:rPr lang="en-US" sz="900" b="1" dirty="0">
-                <a:solidFill>
-                  <a:srgbClr val="0D1420"/>
-                </a:solidFill>
-                <a:latin typeface="Arial" pitchFamily="34" charset="0"/>
-                <a:ea typeface="Arial" pitchFamily="34" charset="-122"/>
-                <a:cs typeface="Arial" pitchFamily="34" charset="-120"/>
-              </a:rPr>
-              <a:t>Belsysteem en regionaal nummer</a:t>
-            </a:r>
-            <a:endParaRPr lang="en-US" sz="900" dirty="0"/>
-          </a:p>
-        </p:txBody>
-      </p:sp>
-      <p:pic>
-        <p:nvPicPr>
-          <p:cNvPr id="40" name="Image 4" descr="preencoded.png">    </p:cNvPr>
-          <p:cNvPicPr>
-            <a:picLocks noChangeAspect="1"/>
-          </p:cNvPicPr>
-          <p:nvPr/>
-        </p:nvPicPr>
-        <p:blipFill>
-          <a:blip r:embed="rId5"/>
-          <a:stretch>
-            <a:fillRect/>
-          </a:stretch>
-        </p:blipFill>
-        <p:spPr>
-          <a:xfrm>
-            <a:off x="3530591" y="5784836"/>
-            <a:ext cx="127000" cy="127000"/>
-          </a:xfrm>
-          <a:prstGeom prst="rect">
-            <a:avLst/>
-          </a:prstGeom>
-        </p:spPr>
-      </p:pic>
-      <p:sp>
-        <p:nvSpPr>
-          <p:cNvPr id="41" name="Text 34"/>
-          <p:cNvSpPr txBox="1"/>
-          <p:nvPr/>
-        </p:nvSpPr>
-        <p:spPr>
-          <a:xfrm>
-            <a:off x="3733791" y="5753086"/>
-            <a:ext cx="3555991" cy="215899"/>
-          </a:xfrm>
-          <a:prstGeom prst="rect">
-            <a:avLst/>
-          </a:prstGeom>
-          <a:noFill/>
-          <a:ln/>
-        </p:spPr>
-        <p:txBody>
-          <a:bodyPr wrap="square" lIns="0" tIns="0" rIns="0" bIns="0" rtlCol="0" anchor="ctr"/>
-          <a:lstStyle/>
-          <a:p>
-            <a:pPr indent="0" marL="0">
-              <a:buNone/>
-            </a:pPr>
-            <a:r>
-              <a:rPr lang="en-US" sz="900" b="1" dirty="0">
-                <a:solidFill>
-                  <a:srgbClr val="0D1420"/>
-                </a:solidFill>
-                <a:latin typeface="Arial" pitchFamily="34" charset="0"/>
-                <a:ea typeface="Arial" pitchFamily="34" charset="-122"/>
-                <a:cs typeface="Arial" pitchFamily="34" charset="-120"/>
-              </a:rPr>
-              <a:t>Koppeling met jullie leads</a:t>
-            </a:r>
-            <a:endParaRPr lang="en-US" sz="900" dirty="0"/>
-          </a:p>
-        </p:txBody>
-      </p:sp>
-      <p:pic>
-        <p:nvPicPr>
-          <p:cNvPr id="42" name="Image 5" descr="preencoded.png">    </p:cNvPr>
-          <p:cNvPicPr>
-            <a:picLocks noChangeAspect="1"/>
-          </p:cNvPicPr>
-          <p:nvPr/>
-        </p:nvPicPr>
-        <p:blipFill>
-          <a:blip r:embed="rId6"/>
-          <a:stretch>
-            <a:fillRect/>
-          </a:stretch>
-        </p:blipFill>
-        <p:spPr>
-          <a:xfrm>
-            <a:off x="7340582" y="5784836"/>
-            <a:ext cx="127000" cy="127000"/>
-          </a:xfrm>
-          <a:prstGeom prst="rect">
-            <a:avLst/>
-          </a:prstGeom>
-        </p:spPr>
-      </p:pic>
-      <p:sp>
-        <p:nvSpPr>
-          <p:cNvPr id="43" name="Text 35"/>
-          <p:cNvSpPr txBox="1"/>
-          <p:nvPr/>
-        </p:nvSpPr>
-        <p:spPr>
-          <a:xfrm>
-            <a:off x="7543781" y="5753086"/>
-            <a:ext cx="3555991" cy="215899"/>
-          </a:xfrm>
-          <a:prstGeom prst="rect">
-            <a:avLst/>
-          </a:prstGeom>
-          <a:noFill/>
-          <a:ln/>
-        </p:spPr>
-        <p:txBody>
-          <a:bodyPr wrap="square" lIns="0" tIns="0" rIns="0" bIns="0" rtlCol="0" anchor="ctr"/>
-          <a:lstStyle/>
-          <a:p>
-            <a:pPr indent="0" marL="0">
-              <a:buNone/>
-            </a:pPr>
-            <a:r>
-              <a:rPr lang="en-US" sz="900" b="1" dirty="0">
-                <a:solidFill>
-                  <a:srgbClr val="0D1420"/>
-                </a:solidFill>
-                <a:latin typeface="Arial" pitchFamily="34" charset="0"/>
-                <a:ea typeface="Arial" pitchFamily="34" charset="-122"/>
-                <a:cs typeface="Arial" pitchFamily="34" charset="-120"/>
-              </a:rPr>
-              <a:t>Daarna alleen nog beldagen</a:t>
-            </a:r>
-            <a:endParaRPr lang="en-US" sz="900" dirty="0"/>
+              <a:rPr lang="en-US" sz="1200" b="1" dirty="0">
+                <a:solidFill>
+                  <a:srgbClr val="1C2230"/>
+                </a:solidFill>
+                <a:latin typeface="Arial" pitchFamily="34" charset="0"/>
+                <a:ea typeface="Arial" pitchFamily="34" charset="-122"/>
+                <a:cs typeface="Arial" pitchFamily="34" charset="-120"/>
+              </a:rPr>
+              <a:t>Normaal vragen we eerst een pilot. Jullie kennen de klant al, dus die stap slaan we over. De drempel wordt daarmee € 695 in plaats van € 4.950.</a:t>
+            </a:r>
+            <a:endParaRPr lang="en-US" sz="1200" dirty="0"/>
           </a:p>
         </p:txBody>
       </p:sp>
@@ -8790,7 +10310,7 @@
                 <a:ea typeface="Arial" pitchFamily="34" charset="-122"/>
                 <a:cs typeface="Arial" pitchFamily="34" charset="-120"/>
               </a:rPr>
-              <a:t>7 / 10</a:t>
+              <a:t>7 / 11</a:t>
             </a:r>
             <a:endParaRPr lang="en-US" sz="750" dirty="0"/>
           </a:p>
@@ -8829,7 +10349,7 @@
                 <a:ea typeface="Arial" pitchFamily="34" charset="-122"/>
                 <a:cs typeface="Arial" pitchFamily="34" charset="-120"/>
               </a:rPr>
-              <a:t>DE BELDAGEN</a:t>
+              <a:t>HET MODEL</a:t>
             </a:r>
             <a:endParaRPr lang="en-US" sz="950" dirty="0"/>
           </a:p>
@@ -8871,7 +10391,7 @@
                 <a:ea typeface="Arial" pitchFamily="34" charset="-122"/>
                 <a:cs typeface="Arial" pitchFamily="34" charset="-120"/>
               </a:rPr>
-              <a:t>Hoe meer beldagen, hoe lager de </a:t>
+              <a:t>Geen pilot. </a:t>
             </a:r>
             <a:pPr algn="l" indent="0" marL="0">
               <a:lnSpc>
@@ -8888,7 +10408,7 @@
                 <a:ea typeface="Georgia" pitchFamily="34" charset="-122"/>
                 <a:cs typeface="Georgia" pitchFamily="34" charset="-120"/>
               </a:rPr>
-              <a:t>dagprijs</a:t>
+              <a:t>Meteen</a:t>
             </a:r>
             <a:pPr algn="l" indent="0" marL="0">
               <a:lnSpc>
@@ -8905,7 +10425,7 @@
                 <a:ea typeface="Arial" pitchFamily="34" charset="-122"/>
                 <a:cs typeface="Arial" pitchFamily="34" charset="-120"/>
               </a:rPr>
-              <a:t>.</a:t>
+              <a:t> beldagen.</a:t>
             </a:r>
             <a:endParaRPr lang="en-US" sz="3200" dirty="0"/>
           </a:p>
@@ -8919,14 +10439,17 @@
         </p:nvSpPr>
         <p:spPr>
           <a:xfrm>
-            <a:off x="609598" y="2666993"/>
-            <a:ext cx="10972773" cy="2355844"/>
+            <a:off x="609598" y="2463794"/>
+            <a:ext cx="2628893" cy="2362194"/>
           </a:xfrm>
           <a:prstGeom prst="roundRect">
             <a:avLst>
-              <a:gd name="adj" fmla="val 4313"/>
+              <a:gd name="adj" fmla="val 4301"/>
             </a:avLst>
           </a:prstGeom>
+          <a:solidFill>
+            <a:srgbClr val="1B2130"/>
+          </a:solidFill>
           <a:ln w="9525">
             <a:solidFill>
               <a:srgbClr val="3A4152"/>
@@ -8937,30 +10460,136 @@
       </p:sp>
       <p:sp>
         <p:nvSpPr>
-          <p:cNvPr id="8" name="Text 6"/>
-          <p:cNvSpPr txBox="1"/>
-          <p:nvPr/>
-        </p:nvSpPr>
-        <p:spPr>
-          <a:xfrm>
-            <a:off x="888998" y="2666993"/>
-            <a:ext cx="2920993" cy="469899"/>
-          </a:xfrm>
-          <a:prstGeom prst="rect">
-            <a:avLst/>
-          </a:prstGeom>
-          <a:noFill/>
-          <a:ln/>
-        </p:spPr>
-        <p:txBody>
-          <a:bodyPr wrap="square" lIns="0" tIns="0" rIns="0" bIns="0" rtlCol="0" anchor="ctr"/>
+          <p:cNvPr id="8" name="Shape 6"/>
+          <p:cNvSpPr/>
+          <p:nvPr/>
+        </p:nvSpPr>
+        <p:spPr>
+          <a:xfrm>
+            <a:off x="825498" y="2692393"/>
+            <a:ext cx="292099" cy="292099"/>
+          </a:xfrm>
+          <a:prstGeom prst="ellipse">
+            <a:avLst/>
+          </a:prstGeom>
+          <a:ln w="15240">
+            <a:solidFill>
+              <a:srgbClr val="38B6FF"/>
+            </a:solidFill>
+            <a:prstDash val="solid"/>
+          </a:ln>
+        </p:spPr>
+      </p:sp>
+      <p:sp>
+        <p:nvSpPr>
+          <p:cNvPr id="9" name="Text 7"/>
+          <p:cNvSpPr txBox="1"/>
+          <p:nvPr/>
+        </p:nvSpPr>
+        <p:spPr>
+          <a:xfrm>
+            <a:off x="825498" y="2692393"/>
+            <a:ext cx="292099" cy="292099"/>
+          </a:xfrm>
+          <a:prstGeom prst="rect">
+            <a:avLst/>
+          </a:prstGeom>
+          <a:noFill/>
+          <a:ln/>
+        </p:spPr>
+        <p:txBody>
+          <a:bodyPr wrap="square" lIns="0" tIns="0" rIns="0" bIns="0" rtlCol="0" anchor="ctr"/>
+          <a:lstStyle/>
+          <a:p>
+            <a:pPr algn="ctr" indent="0" marL="0">
+              <a:buNone/>
+            </a:pPr>
+            <a:r>
+              <a:rPr lang="en-US" sz="1000" b="1" dirty="0">
+                <a:solidFill>
+                  <a:srgbClr val="38B6FF"/>
+                </a:solidFill>
+                <a:latin typeface="Arial" pitchFamily="34" charset="0"/>
+                <a:ea typeface="Arial" pitchFamily="34" charset="-122"/>
+                <a:cs typeface="Arial" pitchFamily="34" charset="-120"/>
+              </a:rPr>
+              <a:t>1</a:t>
+            </a:r>
+            <a:endParaRPr lang="en-US" sz="1000" dirty="0"/>
+          </a:p>
+        </p:txBody>
+      </p:sp>
+      <p:sp>
+        <p:nvSpPr>
+          <p:cNvPr id="10" name="Text 8"/>
+          <p:cNvSpPr txBox="1"/>
+          <p:nvPr/>
+        </p:nvSpPr>
+        <p:spPr>
+          <a:xfrm>
+            <a:off x="825498" y="3136892"/>
+            <a:ext cx="2197095" cy="406399"/>
+          </a:xfrm>
+          <a:prstGeom prst="rect">
+            <a:avLst/>
+          </a:prstGeom>
+          <a:noFill/>
+          <a:ln/>
+        </p:spPr>
+        <p:txBody>
+          <a:bodyPr wrap="square" lIns="0" tIns="0" rIns="0" bIns="0" rtlCol="0" anchor="t"/>
           <a:lstStyle/>
           <a:p>
             <a:pPr indent="0" marL="0">
-              <a:buNone/>
-            </a:pPr>
-            <a:r>
-              <a:rPr lang="en-US" sz="800" b="1" spc="160" kern="0" dirty="0">
+              <a:lnSpc>
+                <a:spcPct val="115000"/>
+              </a:lnSpc>
+              <a:buNone/>
+            </a:pPr>
+            <a:r>
+              <a:rPr lang="en-US" sz="1150" b="1" dirty="0">
+                <a:solidFill>
+                  <a:srgbClr val="F2EFE6"/>
+                </a:solidFill>
+                <a:latin typeface="Arial" pitchFamily="34" charset="0"/>
+                <a:ea typeface="Arial" pitchFamily="34" charset="-122"/>
+                <a:cs typeface="Arial" pitchFamily="34" charset="-120"/>
+              </a:rPr>
+              <a:t>Eenmalige opstart</a:t>
+            </a:r>
+            <a:endParaRPr lang="en-US" sz="1150" dirty="0"/>
+          </a:p>
+        </p:txBody>
+      </p:sp>
+      <p:sp>
+        <p:nvSpPr>
+          <p:cNvPr id="11" name="Text 9"/>
+          <p:cNvSpPr txBox="1"/>
+          <p:nvPr/>
+        </p:nvSpPr>
+        <p:spPr>
+          <a:xfrm>
+            <a:off x="825498" y="3594091"/>
+            <a:ext cx="2197095" cy="1079497"/>
+          </a:xfrm>
+          <a:prstGeom prst="rect">
+            <a:avLst/>
+          </a:prstGeom>
+          <a:noFill/>
+          <a:ln/>
+        </p:spPr>
+        <p:txBody>
+          <a:bodyPr wrap="square" lIns="0" tIns="0" rIns="0" bIns="0" rtlCol="0" anchor="t"/>
+          <a:lstStyle/>
+          <a:p>
+            <a:pPr indent="0" marL="0">
+              <a:lnSpc>
+                <a:spcPct val="130000"/>
+              </a:lnSpc>
+              <a:buNone/>
+            </a:pPr>
+            <a:r>
+              <a:rPr lang="en-US" sz="875" dirty="0">
                 <a:solidFill>
                   <a:srgbClr val="C2C8D2"/>
                 </a:solidFill>
@@ -8968,105 +10597,31 @@
                 <a:ea typeface="Arial" pitchFamily="34" charset="-122"/>
                 <a:cs typeface="Arial" pitchFamily="34" charset="-120"/>
               </a:rPr>
-              <a:t>BELDAGEN PER 4 WEKEN</a:t>
-            </a:r>
-            <a:endParaRPr lang="en-US" sz="800" dirty="0"/>
-          </a:p>
-        </p:txBody>
-      </p:sp>
-      <p:sp>
-        <p:nvSpPr>
-          <p:cNvPr id="9" name="Text 7"/>
-          <p:cNvSpPr txBox="1"/>
-          <p:nvPr/>
-        </p:nvSpPr>
-        <p:spPr>
-          <a:xfrm>
-            <a:off x="3886190" y="2666993"/>
-            <a:ext cx="2349494" cy="469899"/>
-          </a:xfrm>
-          <a:prstGeom prst="rect">
-            <a:avLst/>
-          </a:prstGeom>
-          <a:noFill/>
-          <a:ln/>
-        </p:spPr>
-        <p:txBody>
-          <a:bodyPr wrap="square" lIns="0" tIns="0" rIns="0" bIns="0" rtlCol="0" anchor="ctr"/>
-          <a:lstStyle/>
-          <a:p>
-            <a:pPr indent="0" marL="0">
-              <a:buNone/>
-            </a:pPr>
-            <a:r>
-              <a:rPr lang="en-US" sz="800" b="1" spc="160" kern="0" dirty="0">
-                <a:solidFill>
-                  <a:srgbClr val="C2C8D2"/>
-                </a:solidFill>
-                <a:latin typeface="Arial" pitchFamily="34" charset="0"/>
-                <a:ea typeface="Arial" pitchFamily="34" charset="-122"/>
-                <a:cs typeface="Arial" pitchFamily="34" charset="-120"/>
-              </a:rPr>
-              <a:t>PRIJS PER BELDAG</a:t>
-            </a:r>
-            <a:endParaRPr lang="en-US" sz="800" dirty="0"/>
-          </a:p>
-        </p:txBody>
-      </p:sp>
-      <p:sp>
-        <p:nvSpPr>
-          <p:cNvPr id="10" name="Text 8"/>
-          <p:cNvSpPr txBox="1"/>
-          <p:nvPr/>
-        </p:nvSpPr>
-        <p:spPr>
-          <a:xfrm>
-            <a:off x="6324584" y="2666993"/>
-            <a:ext cx="2349494" cy="469899"/>
-          </a:xfrm>
-          <a:prstGeom prst="rect">
-            <a:avLst/>
-          </a:prstGeom>
-          <a:noFill/>
-          <a:ln/>
-        </p:spPr>
-        <p:txBody>
-          <a:bodyPr wrap="square" lIns="0" tIns="0" rIns="0" bIns="0" rtlCol="0" anchor="ctr"/>
-          <a:lstStyle/>
-          <a:p>
-            <a:pPr indent="0" marL="0">
-              <a:buNone/>
-            </a:pPr>
-            <a:r>
-              <a:rPr lang="en-US" sz="800" b="1" spc="160" kern="0" dirty="0">
-                <a:solidFill>
-                  <a:srgbClr val="C2C8D2"/>
-                </a:solidFill>
-                <a:latin typeface="Arial" pitchFamily="34" charset="0"/>
-                <a:ea typeface="Arial" pitchFamily="34" charset="-122"/>
-                <a:cs typeface="Arial" pitchFamily="34" charset="-120"/>
-              </a:rPr>
-              <a:t>PER 4 WEKEN</a:t>
-            </a:r>
-            <a:endParaRPr lang="en-US" sz="800" dirty="0"/>
-          </a:p>
-        </p:txBody>
-      </p:sp>
-      <p:sp>
-        <p:nvSpPr>
-          <p:cNvPr id="11" name="Shape 9"/>
+              <a:t>€ 695 per klant. Kick-off, belscript, inrichting van het belsysteem en een regionaal nummer op naam van de klant. Eén keer, daarna nooit meer.</a:t>
+            </a:r>
+            <a:endParaRPr lang="en-US" sz="875" dirty="0"/>
+          </a:p>
+        </p:txBody>
+      </p:sp>
+      <p:sp>
+        <p:nvSpPr>
+          <p:cNvPr id="12" name="Shape 10"/>
           <p:cNvSpPr/>
           <p:nvPr/>
         </p:nvSpPr>
         <p:spPr>
           <a:xfrm>
-            <a:off x="609598" y="3136892"/>
-            <a:ext cx="10972773" cy="0"/>
-          </a:xfrm>
-          <a:prstGeom prst="line">
-            <a:avLst/>
-          </a:prstGeom>
-          <a:noFill/>
+            <a:off x="3390892" y="2463794"/>
+            <a:ext cx="2628893" cy="2362194"/>
+          </a:xfrm>
+          <a:prstGeom prst="roundRect">
+            <a:avLst>
+              <a:gd name="adj" fmla="val 4301"/>
+            </a:avLst>
+          </a:prstGeom>
+          <a:solidFill>
+            <a:srgbClr val="1B2130"/>
+          </a:solidFill>
           <a:ln w="9525">
             <a:solidFill>
               <a:srgbClr val="3A4152"/>
@@ -9077,30 +10632,94 @@
       </p:sp>
       <p:sp>
         <p:nvSpPr>
-          <p:cNvPr id="12" name="Text 10"/>
-          <p:cNvSpPr txBox="1"/>
-          <p:nvPr/>
-        </p:nvSpPr>
-        <p:spPr>
-          <a:xfrm>
-            <a:off x="888998" y="3136892"/>
-            <a:ext cx="2920993" cy="628648"/>
-          </a:xfrm>
-          <a:prstGeom prst="rect">
-            <a:avLst/>
-          </a:prstGeom>
-          <a:noFill/>
-          <a:ln/>
-        </p:spPr>
-        <p:txBody>
-          <a:bodyPr wrap="square" lIns="0" tIns="0" rIns="0" bIns="0" rtlCol="0" anchor="ctr"/>
+          <p:cNvPr id="13" name="Shape 11"/>
+          <p:cNvSpPr/>
+          <p:nvPr/>
+        </p:nvSpPr>
+        <p:spPr>
+          <a:xfrm>
+            <a:off x="3606791" y="2692393"/>
+            <a:ext cx="292099" cy="292099"/>
+          </a:xfrm>
+          <a:prstGeom prst="ellipse">
+            <a:avLst/>
+          </a:prstGeom>
+          <a:ln w="15240">
+            <a:solidFill>
+              <a:srgbClr val="38B6FF"/>
+            </a:solidFill>
+            <a:prstDash val="solid"/>
+          </a:ln>
+        </p:spPr>
+      </p:sp>
+      <p:sp>
+        <p:nvSpPr>
+          <p:cNvPr id="14" name="Text 12"/>
+          <p:cNvSpPr txBox="1"/>
+          <p:nvPr/>
+        </p:nvSpPr>
+        <p:spPr>
+          <a:xfrm>
+            <a:off x="3606791" y="2692393"/>
+            <a:ext cx="292099" cy="292099"/>
+          </a:xfrm>
+          <a:prstGeom prst="rect">
+            <a:avLst/>
+          </a:prstGeom>
+          <a:noFill/>
+          <a:ln/>
+        </p:spPr>
+        <p:txBody>
+          <a:bodyPr wrap="square" lIns="0" tIns="0" rIns="0" bIns="0" rtlCol="0" anchor="ctr"/>
+          <a:lstStyle/>
+          <a:p>
+            <a:pPr algn="ctr" indent="0" marL="0">
+              <a:buNone/>
+            </a:pPr>
+            <a:r>
+              <a:rPr lang="en-US" sz="1000" b="1" dirty="0">
+                <a:solidFill>
+                  <a:srgbClr val="38B6FF"/>
+                </a:solidFill>
+                <a:latin typeface="Arial" pitchFamily="34" charset="0"/>
+                <a:ea typeface="Arial" pitchFamily="34" charset="-122"/>
+                <a:cs typeface="Arial" pitchFamily="34" charset="-120"/>
+              </a:rPr>
+              <a:t>2</a:t>
+            </a:r>
+            <a:endParaRPr lang="en-US" sz="1000" dirty="0"/>
+          </a:p>
+        </p:txBody>
+      </p:sp>
+      <p:sp>
+        <p:nvSpPr>
+          <p:cNvPr id="15" name="Text 13"/>
+          <p:cNvSpPr txBox="1"/>
+          <p:nvPr/>
+        </p:nvSpPr>
+        <p:spPr>
+          <a:xfrm>
+            <a:off x="3606791" y="3136892"/>
+            <a:ext cx="2197095" cy="406399"/>
+          </a:xfrm>
+          <a:prstGeom prst="rect">
+            <a:avLst/>
+          </a:prstGeom>
+          <a:noFill/>
+          <a:ln/>
+        </p:spPr>
+        <p:txBody>
+          <a:bodyPr wrap="square" lIns="0" tIns="0" rIns="0" bIns="0" rtlCol="0" anchor="t"/>
           <a:lstStyle/>
           <a:p>
             <a:pPr indent="0" marL="0">
-              <a:buNone/>
-            </a:pPr>
-            <a:r>
-              <a:rPr lang="en-US" sz="1250" b="1" dirty="0">
+              <a:lnSpc>
+                <a:spcPct val="115000"/>
+              </a:lnSpc>
+              <a:buNone/>
+            </a:pPr>
+            <a:r>
+              <a:rPr lang="en-US" sz="1150" b="1" dirty="0">
                 <a:solidFill>
                   <a:srgbClr val="F2EFE6"/>
                 </a:solidFill>
@@ -9108,105 +10727,73 @@
                 <a:ea typeface="Arial" pitchFamily="34" charset="-122"/>
                 <a:cs typeface="Arial" pitchFamily="34" charset="-120"/>
               </a:rPr>
-              <a:t>4 beldagen</a:t>
-            </a:r>
-            <a:endParaRPr lang="en-US" sz="1250" dirty="0"/>
-          </a:p>
-        </p:txBody>
-      </p:sp>
-      <p:sp>
-        <p:nvSpPr>
-          <p:cNvPr id="13" name="Text 11"/>
-          <p:cNvSpPr txBox="1"/>
-          <p:nvPr/>
-        </p:nvSpPr>
-        <p:spPr>
-          <a:xfrm>
-            <a:off x="3886190" y="3136892"/>
-            <a:ext cx="2349494" cy="628648"/>
-          </a:xfrm>
-          <a:prstGeom prst="rect">
-            <a:avLst/>
-          </a:prstGeom>
-          <a:noFill/>
-          <a:ln/>
-        </p:spPr>
-        <p:txBody>
-          <a:bodyPr wrap="square" lIns="0" tIns="0" rIns="0" bIns="0" rtlCol="0" anchor="ctr"/>
+              <a:t>Beldagen per vier weken</a:t>
+            </a:r>
+            <a:endParaRPr lang="en-US" sz="1150" dirty="0"/>
+          </a:p>
+        </p:txBody>
+      </p:sp>
+      <p:sp>
+        <p:nvSpPr>
+          <p:cNvPr id="16" name="Text 14"/>
+          <p:cNvSpPr txBox="1"/>
+          <p:nvPr/>
+        </p:nvSpPr>
+        <p:spPr>
+          <a:xfrm>
+            <a:off x="3606791" y="3594091"/>
+            <a:ext cx="2197095" cy="1079497"/>
+          </a:xfrm>
+          <a:prstGeom prst="rect">
+            <a:avLst/>
+          </a:prstGeom>
+          <a:noFill/>
+          <a:ln/>
+        </p:spPr>
+        <p:txBody>
+          <a:bodyPr wrap="square" lIns="0" tIns="0" rIns="0" bIns="0" rtlCol="0" anchor="t"/>
           <a:lstStyle/>
           <a:p>
             <a:pPr indent="0" marL="0">
-              <a:buNone/>
-            </a:pPr>
-            <a:r>
-              <a:rPr lang="en-US" sz="1250" b="1" dirty="0">
-                <a:solidFill>
-                  <a:srgbClr val="F2EFE6"/>
-                </a:solidFill>
-                <a:latin typeface="Arial" pitchFamily="34" charset="0"/>
-                <a:ea typeface="Arial" pitchFamily="34" charset="-122"/>
-                <a:cs typeface="Arial" pitchFamily="34" charset="-120"/>
-              </a:rPr>
-              <a:t>€ 600</a:t>
-            </a:r>
-            <a:endParaRPr lang="en-US" sz="1250" dirty="0"/>
-          </a:p>
-        </p:txBody>
-      </p:sp>
-      <p:sp>
-        <p:nvSpPr>
-          <p:cNvPr id="14" name="Text 12"/>
-          <p:cNvSpPr txBox="1"/>
-          <p:nvPr/>
-        </p:nvSpPr>
-        <p:spPr>
-          <a:xfrm>
-            <a:off x="6324584" y="3136892"/>
-            <a:ext cx="2349494" cy="628648"/>
-          </a:xfrm>
-          <a:prstGeom prst="rect">
-            <a:avLst/>
-          </a:prstGeom>
-          <a:noFill/>
-          <a:ln/>
-        </p:spPr>
-        <p:txBody>
-          <a:bodyPr wrap="square" lIns="0" tIns="0" rIns="0" bIns="0" rtlCol="0" anchor="ctr"/>
-          <a:lstStyle/>
-          <a:p>
-            <a:pPr indent="0" marL="0">
-              <a:buNone/>
-            </a:pPr>
-            <a:r>
-              <a:rPr lang="en-US" sz="1250" b="1" dirty="0">
-                <a:solidFill>
-                  <a:srgbClr val="F2EFE6"/>
-                </a:solidFill>
-                <a:latin typeface="Arial" pitchFamily="34" charset="0"/>
-                <a:ea typeface="Arial" pitchFamily="34" charset="-122"/>
-                <a:cs typeface="Arial" pitchFamily="34" charset="-120"/>
-              </a:rPr>
-              <a:t>€ 2.400</a:t>
-            </a:r>
-            <a:endParaRPr lang="en-US" sz="1250" dirty="0"/>
-          </a:p>
-        </p:txBody>
-      </p:sp>
-      <p:sp>
-        <p:nvSpPr>
-          <p:cNvPr id="15" name="Shape 13"/>
+              <a:lnSpc>
+                <a:spcPct val="130000"/>
+              </a:lnSpc>
+              <a:buNone/>
+            </a:pPr>
+            <a:r>
+              <a:rPr lang="en-US" sz="875" dirty="0">
+                <a:solidFill>
+                  <a:srgbClr val="C2C8D2"/>
+                </a:solidFill>
+                <a:latin typeface="Arial" pitchFamily="34" charset="0"/>
+                <a:ea typeface="Arial" pitchFamily="34" charset="-122"/>
+                <a:cs typeface="Arial" pitchFamily="34" charset="-120"/>
+              </a:rPr>
+              <a:t>Daarna reken je per beldag. De klant kiest zelf hoeveel dagen er per periode gebeld wordt, vanaf twee. Normaal is onze ondergrens vier.</a:t>
+            </a:r>
+            <a:endParaRPr lang="en-US" sz="875" dirty="0"/>
+          </a:p>
+        </p:txBody>
+      </p:sp>
+      <p:sp>
+        <p:nvSpPr>
+          <p:cNvPr id="17" name="Shape 15"/>
           <p:cNvSpPr/>
           <p:nvPr/>
         </p:nvSpPr>
         <p:spPr>
           <a:xfrm>
-            <a:off x="609598" y="3765541"/>
-            <a:ext cx="10972773" cy="0"/>
-          </a:xfrm>
-          <a:prstGeom prst="line">
-            <a:avLst/>
-          </a:prstGeom>
-          <a:noFill/>
+            <a:off x="6172185" y="2463794"/>
+            <a:ext cx="2628893" cy="2362194"/>
+          </a:xfrm>
+          <a:prstGeom prst="roundRect">
+            <a:avLst>
+              <a:gd name="adj" fmla="val 4301"/>
+            </a:avLst>
+          </a:prstGeom>
+          <a:solidFill>
+            <a:srgbClr val="1B2130"/>
+          </a:solidFill>
           <a:ln w="9525">
             <a:solidFill>
               <a:srgbClr val="3A4152"/>
@@ -9217,161 +10804,21 @@
       </p:sp>
       <p:sp>
         <p:nvSpPr>
-          <p:cNvPr id="16" name="Text 14"/>
-          <p:cNvSpPr txBox="1"/>
-          <p:nvPr/>
-        </p:nvSpPr>
-        <p:spPr>
-          <a:xfrm>
-            <a:off x="888998" y="3765541"/>
-            <a:ext cx="2920993" cy="628648"/>
-          </a:xfrm>
-          <a:prstGeom prst="rect">
-            <a:avLst/>
-          </a:prstGeom>
-          <a:noFill/>
-          <a:ln/>
-        </p:spPr>
-        <p:txBody>
-          <a:bodyPr wrap="square" lIns="0" tIns="0" rIns="0" bIns="0" rtlCol="0" anchor="ctr"/>
-          <a:lstStyle/>
-          <a:p>
-            <a:pPr indent="0" marL="0">
-              <a:buNone/>
-            </a:pPr>
-            <a:r>
-              <a:rPr lang="en-US" sz="1250" b="1" dirty="0">
-                <a:solidFill>
-                  <a:srgbClr val="F2EFE6"/>
-                </a:solidFill>
-                <a:latin typeface="Arial" pitchFamily="34" charset="0"/>
-                <a:ea typeface="Arial" pitchFamily="34" charset="-122"/>
-                <a:cs typeface="Arial" pitchFamily="34" charset="-120"/>
-              </a:rPr>
-              <a:t>5 tot 7 beldagen</a:t>
-            </a:r>
-            <a:endParaRPr lang="en-US" sz="1250" dirty="0"/>
-          </a:p>
-        </p:txBody>
-      </p:sp>
-      <p:sp>
-        <p:nvSpPr>
-          <p:cNvPr id="17" name="Text 15"/>
-          <p:cNvSpPr txBox="1"/>
-          <p:nvPr/>
-        </p:nvSpPr>
-        <p:spPr>
-          <a:xfrm>
-            <a:off x="3886190" y="3765541"/>
-            <a:ext cx="2349494" cy="628648"/>
-          </a:xfrm>
-          <a:prstGeom prst="rect">
-            <a:avLst/>
-          </a:prstGeom>
-          <a:noFill/>
-          <a:ln/>
-        </p:spPr>
-        <p:txBody>
-          <a:bodyPr wrap="square" lIns="0" tIns="0" rIns="0" bIns="0" rtlCol="0" anchor="ctr"/>
-          <a:lstStyle/>
-          <a:p>
-            <a:pPr indent="0" marL="0">
-              <a:buNone/>
-            </a:pPr>
-            <a:r>
-              <a:rPr lang="en-US" sz="1250" b="1" dirty="0">
-                <a:solidFill>
-                  <a:srgbClr val="F2EFE6"/>
-                </a:solidFill>
-                <a:latin typeface="Arial" pitchFamily="34" charset="0"/>
-                <a:ea typeface="Arial" pitchFamily="34" charset="-122"/>
-                <a:cs typeface="Arial" pitchFamily="34" charset="-120"/>
-              </a:rPr>
-              <a:t>€ 550</a:t>
-            </a:r>
-            <a:endParaRPr lang="en-US" sz="1250" dirty="0"/>
-          </a:p>
-        </p:txBody>
-      </p:sp>
-      <p:sp>
-        <p:nvSpPr>
-          <p:cNvPr id="18" name="Text 16"/>
-          <p:cNvSpPr txBox="1"/>
-          <p:nvPr/>
-        </p:nvSpPr>
-        <p:spPr>
-          <a:xfrm>
-            <a:off x="6324584" y="3765541"/>
-            <a:ext cx="2349494" cy="628648"/>
-          </a:xfrm>
-          <a:prstGeom prst="rect">
-            <a:avLst/>
-          </a:prstGeom>
-          <a:noFill/>
-          <a:ln/>
-        </p:spPr>
-        <p:txBody>
-          <a:bodyPr wrap="square" lIns="0" tIns="0" rIns="0" bIns="0" rtlCol="0" anchor="ctr"/>
-          <a:lstStyle/>
-          <a:p>
-            <a:pPr indent="0" marL="0">
-              <a:buNone/>
-            </a:pPr>
-            <a:r>
-              <a:rPr lang="en-US" sz="1250" b="1" dirty="0">
-                <a:solidFill>
-                  <a:srgbClr val="F2EFE6"/>
-                </a:solidFill>
-                <a:latin typeface="Arial" pitchFamily="34" charset="0"/>
-                <a:ea typeface="Arial" pitchFamily="34" charset="-122"/>
-                <a:cs typeface="Arial" pitchFamily="34" charset="-120"/>
-              </a:rPr>
-              <a:t>€ 2.750 tot € 3.850</a:t>
-            </a:r>
-            <a:endParaRPr lang="en-US" sz="1250" dirty="0"/>
-          </a:p>
-        </p:txBody>
-      </p:sp>
-      <p:sp>
-        <p:nvSpPr>
-          <p:cNvPr id="19" name="Shape 17"/>
+          <p:cNvPr id="18" name="Shape 16"/>
           <p:cNvSpPr/>
           <p:nvPr/>
         </p:nvSpPr>
         <p:spPr>
           <a:xfrm>
-            <a:off x="615948" y="4394189"/>
-            <a:ext cx="10960073" cy="628648"/>
-          </a:xfrm>
-          <a:prstGeom prst="rect">
-            <a:avLst/>
-          </a:prstGeom>
-          <a:solidFill>
-            <a:srgbClr val="38B6FF">
-              <a:alpha val="11000"/>
-            </a:srgbClr>
-          </a:solidFill>
-          <a:ln/>
-        </p:spPr>
-      </p:sp>
-      <p:sp>
-        <p:nvSpPr>
-          <p:cNvPr id="20" name="Shape 18"/>
-          <p:cNvSpPr/>
-          <p:nvPr/>
-        </p:nvSpPr>
-        <p:spPr>
-          <a:xfrm>
-            <a:off x="609598" y="4394189"/>
-            <a:ext cx="10972773" cy="0"/>
-          </a:xfrm>
-          <a:prstGeom prst="line">
-            <a:avLst/>
-          </a:prstGeom>
-          <a:noFill/>
-          <a:ln w="9525">
+            <a:off x="6388084" y="2692393"/>
+            <a:ext cx="292099" cy="292099"/>
+          </a:xfrm>
+          <a:prstGeom prst="ellipse">
+            <a:avLst/>
+          </a:prstGeom>
+          <a:ln w="15240">
             <a:solidFill>
-              <a:srgbClr val="3A4152"/>
+              <a:srgbClr val="38B6FF"/>
             </a:solidFill>
             <a:prstDash val="solid"/>
           </a:ln>
@@ -9379,134 +10826,314 @@
       </p:sp>
       <p:sp>
         <p:nvSpPr>
+          <p:cNvPr id="19" name="Text 17"/>
+          <p:cNvSpPr txBox="1"/>
+          <p:nvPr/>
+        </p:nvSpPr>
+        <p:spPr>
+          <a:xfrm>
+            <a:off x="6388084" y="2692393"/>
+            <a:ext cx="292099" cy="292099"/>
+          </a:xfrm>
+          <a:prstGeom prst="rect">
+            <a:avLst/>
+          </a:prstGeom>
+          <a:noFill/>
+          <a:ln/>
+        </p:spPr>
+        <p:txBody>
+          <a:bodyPr wrap="square" lIns="0" tIns="0" rIns="0" bIns="0" rtlCol="0" anchor="ctr"/>
+          <a:lstStyle/>
+          <a:p>
+            <a:pPr algn="ctr" indent="0" marL="0">
+              <a:buNone/>
+            </a:pPr>
+            <a:r>
+              <a:rPr lang="en-US" sz="1000" b="1" dirty="0">
+                <a:solidFill>
+                  <a:srgbClr val="38B6FF"/>
+                </a:solidFill>
+                <a:latin typeface="Arial" pitchFamily="34" charset="0"/>
+                <a:ea typeface="Arial" pitchFamily="34" charset="-122"/>
+                <a:cs typeface="Arial" pitchFamily="34" charset="-120"/>
+              </a:rPr>
+              <a:t>3</a:t>
+            </a:r>
+            <a:endParaRPr lang="en-US" sz="1000" dirty="0"/>
+          </a:p>
+        </p:txBody>
+      </p:sp>
+      <p:sp>
+        <p:nvSpPr>
+          <p:cNvPr id="20" name="Text 18"/>
+          <p:cNvSpPr txBox="1"/>
+          <p:nvPr/>
+        </p:nvSpPr>
+        <p:spPr>
+          <a:xfrm>
+            <a:off x="6388084" y="3136892"/>
+            <a:ext cx="2197095" cy="406399"/>
+          </a:xfrm>
+          <a:prstGeom prst="rect">
+            <a:avLst/>
+          </a:prstGeom>
+          <a:noFill/>
+          <a:ln/>
+        </p:spPr>
+        <p:txBody>
+          <a:bodyPr wrap="square" lIns="0" tIns="0" rIns="0" bIns="0" rtlCol="0" anchor="t"/>
+          <a:lstStyle/>
+          <a:p>
+            <a:pPr indent="0" marL="0">
+              <a:lnSpc>
+                <a:spcPct val="115000"/>
+              </a:lnSpc>
+              <a:buNone/>
+            </a:pPr>
+            <a:r>
+              <a:rPr lang="en-US" sz="1150" b="1" dirty="0">
+                <a:solidFill>
+                  <a:srgbClr val="F2EFE6"/>
+                </a:solidFill>
+                <a:latin typeface="Arial" pitchFamily="34" charset="0"/>
+                <a:ea typeface="Arial" pitchFamily="34" charset="-122"/>
+                <a:cs typeface="Arial" pitchFamily="34" charset="-120"/>
+              </a:rPr>
+              <a:t>Wat een beldag is</a:t>
+            </a:r>
+            <a:endParaRPr lang="en-US" sz="1150" dirty="0"/>
+          </a:p>
+        </p:txBody>
+      </p:sp>
+      <p:sp>
+        <p:nvSpPr>
           <p:cNvPr id="21" name="Text 19"/>
           <p:cNvSpPr txBox="1"/>
           <p:nvPr/>
         </p:nvSpPr>
         <p:spPr>
           <a:xfrm>
-            <a:off x="888998" y="4394189"/>
-            <a:ext cx="2920993" cy="628648"/>
-          </a:xfrm>
-          <a:prstGeom prst="rect">
-            <a:avLst/>
-          </a:prstGeom>
-          <a:noFill/>
-          <a:ln/>
-        </p:spPr>
-        <p:txBody>
-          <a:bodyPr wrap="square" lIns="0" tIns="0" rIns="0" bIns="0" rtlCol="0" anchor="ctr"/>
+            <a:off x="6388084" y="3594091"/>
+            <a:ext cx="2197095" cy="1079497"/>
+          </a:xfrm>
+          <a:prstGeom prst="rect">
+            <a:avLst/>
+          </a:prstGeom>
+          <a:noFill/>
+          <a:ln/>
+        </p:spPr>
+        <p:txBody>
+          <a:bodyPr wrap="square" lIns="0" tIns="0" rIns="0" bIns="0" rtlCol="0" anchor="t"/>
           <a:lstStyle/>
           <a:p>
             <a:pPr indent="0" marL="0">
-              <a:buNone/>
-            </a:pPr>
-            <a:r>
-              <a:rPr lang="en-US" sz="1250" b="1" dirty="0">
-                <a:solidFill>
-                  <a:srgbClr val="F2EFE6"/>
-                </a:solidFill>
-                <a:latin typeface="Arial" pitchFamily="34" charset="0"/>
-                <a:ea typeface="Arial" pitchFamily="34" charset="-122"/>
-                <a:cs typeface="Arial" pitchFamily="34" charset="-120"/>
-              </a:rPr>
-              <a:t>8 beldagen of meer</a:t>
-            </a:r>
-            <a:endParaRPr lang="en-US" sz="1250" dirty="0"/>
-          </a:p>
-        </p:txBody>
-      </p:sp>
-      <p:sp>
-        <p:nvSpPr>
-          <p:cNvPr id="22" name="Text 20"/>
-          <p:cNvSpPr txBox="1"/>
-          <p:nvPr/>
-        </p:nvSpPr>
-        <p:spPr>
-          <a:xfrm>
-            <a:off x="3886190" y="4394189"/>
-            <a:ext cx="2349494" cy="628648"/>
-          </a:xfrm>
-          <a:prstGeom prst="rect">
-            <a:avLst/>
-          </a:prstGeom>
-          <a:noFill/>
-          <a:ln/>
-        </p:spPr>
-        <p:txBody>
-          <a:bodyPr wrap="square" lIns="0" tIns="0" rIns="0" bIns="0" rtlCol="0" anchor="ctr"/>
+              <a:lnSpc>
+                <a:spcPct val="130000"/>
+              </a:lnSpc>
+              <a:buNone/>
+            </a:pPr>
+            <a:r>
+              <a:rPr lang="en-US" sz="875" dirty="0">
+                <a:solidFill>
+                  <a:srgbClr val="C2C8D2"/>
+                </a:solidFill>
+                <a:latin typeface="Arial" pitchFamily="34" charset="0"/>
+                <a:ea typeface="Arial" pitchFamily="34" charset="-122"/>
+                <a:cs typeface="Arial" pitchFamily="34" charset="-120"/>
+              </a:rPr>
+              <a:t>Een volle dag bellen door één vaste beller: ongeveer honderd gesprekspogingen, alle notities vastgelegd en dezelfde dag overgedragen.</a:t>
+            </a:r>
+            <a:endParaRPr lang="en-US" sz="875" dirty="0"/>
+          </a:p>
+        </p:txBody>
+      </p:sp>
+      <p:sp>
+        <p:nvSpPr>
+          <p:cNvPr id="22" name="Shape 20"/>
+          <p:cNvSpPr/>
+          <p:nvPr/>
+        </p:nvSpPr>
+        <p:spPr>
+          <a:xfrm>
+            <a:off x="8953478" y="2463794"/>
+            <a:ext cx="2628893" cy="2362194"/>
+          </a:xfrm>
+          <a:prstGeom prst="roundRect">
+            <a:avLst>
+              <a:gd name="adj" fmla="val 4301"/>
+            </a:avLst>
+          </a:prstGeom>
+          <a:solidFill>
+            <a:srgbClr val="1B2130"/>
+          </a:solidFill>
+          <a:ln w="15240">
+            <a:solidFill>
+              <a:srgbClr val="38B6FF"/>
+            </a:solidFill>
+            <a:prstDash val="solid"/>
+          </a:ln>
+        </p:spPr>
+      </p:sp>
+      <p:sp>
+        <p:nvSpPr>
+          <p:cNvPr id="23" name="Shape 21"/>
+          <p:cNvSpPr/>
+          <p:nvPr/>
+        </p:nvSpPr>
+        <p:spPr>
+          <a:xfrm>
+            <a:off x="9169377" y="2692393"/>
+            <a:ext cx="292099" cy="292099"/>
+          </a:xfrm>
+          <a:prstGeom prst="ellipse">
+            <a:avLst/>
+          </a:prstGeom>
+          <a:ln w="15240">
+            <a:solidFill>
+              <a:srgbClr val="38B6FF"/>
+            </a:solidFill>
+            <a:prstDash val="solid"/>
+          </a:ln>
+        </p:spPr>
+      </p:sp>
+      <p:sp>
+        <p:nvSpPr>
+          <p:cNvPr id="24" name="Text 22"/>
+          <p:cNvSpPr txBox="1"/>
+          <p:nvPr/>
+        </p:nvSpPr>
+        <p:spPr>
+          <a:xfrm>
+            <a:off x="9169377" y="2692393"/>
+            <a:ext cx="292099" cy="292099"/>
+          </a:xfrm>
+          <a:prstGeom prst="rect">
+            <a:avLst/>
+          </a:prstGeom>
+          <a:noFill/>
+          <a:ln/>
+        </p:spPr>
+        <p:txBody>
+          <a:bodyPr wrap="square" lIns="0" tIns="0" rIns="0" bIns="0" rtlCol="0" anchor="ctr"/>
+          <a:lstStyle/>
+          <a:p>
+            <a:pPr algn="ctr" indent="0" marL="0">
+              <a:buNone/>
+            </a:pPr>
+            <a:r>
+              <a:rPr lang="en-US" sz="1000" b="1" dirty="0">
+                <a:solidFill>
+                  <a:srgbClr val="38B6FF"/>
+                </a:solidFill>
+                <a:latin typeface="Arial" pitchFamily="34" charset="0"/>
+                <a:ea typeface="Arial" pitchFamily="34" charset="-122"/>
+                <a:cs typeface="Arial" pitchFamily="34" charset="-120"/>
+              </a:rPr>
+              <a:t>4</a:t>
+            </a:r>
+            <a:endParaRPr lang="en-US" sz="1000" dirty="0"/>
+          </a:p>
+        </p:txBody>
+      </p:sp>
+      <p:sp>
+        <p:nvSpPr>
+          <p:cNvPr id="25" name="Text 23"/>
+          <p:cNvSpPr txBox="1"/>
+          <p:nvPr/>
+        </p:nvSpPr>
+        <p:spPr>
+          <a:xfrm>
+            <a:off x="9169377" y="3136892"/>
+            <a:ext cx="2197095" cy="406399"/>
+          </a:xfrm>
+          <a:prstGeom prst="rect">
+            <a:avLst/>
+          </a:prstGeom>
+          <a:noFill/>
+          <a:ln/>
+        </p:spPr>
+        <p:txBody>
+          <a:bodyPr wrap="square" lIns="0" tIns="0" rIns="0" bIns="0" rtlCol="0" anchor="t"/>
           <a:lstStyle/>
           <a:p>
             <a:pPr indent="0" marL="0">
-              <a:buNone/>
-            </a:pPr>
-            <a:r>
-              <a:rPr lang="en-US" sz="1250" b="1" dirty="0">
-                <a:solidFill>
-                  <a:srgbClr val="F2EFE6"/>
-                </a:solidFill>
-                <a:latin typeface="Arial" pitchFamily="34" charset="0"/>
-                <a:ea typeface="Arial" pitchFamily="34" charset="-122"/>
-                <a:cs typeface="Arial" pitchFamily="34" charset="-120"/>
-              </a:rPr>
-              <a:t>€ 500</a:t>
-            </a:r>
-            <a:endParaRPr lang="en-US" sz="1250" dirty="0"/>
-          </a:p>
-        </p:txBody>
-      </p:sp>
-      <p:sp>
-        <p:nvSpPr>
-          <p:cNvPr id="23" name="Text 21"/>
-          <p:cNvSpPr txBox="1"/>
-          <p:nvPr/>
-        </p:nvSpPr>
-        <p:spPr>
-          <a:xfrm>
-            <a:off x="6324584" y="4394189"/>
-            <a:ext cx="2349494" cy="628648"/>
-          </a:xfrm>
-          <a:prstGeom prst="rect">
-            <a:avLst/>
-          </a:prstGeom>
-          <a:noFill/>
-          <a:ln/>
-        </p:spPr>
-        <p:txBody>
-          <a:bodyPr wrap="square" lIns="0" tIns="0" rIns="0" bIns="0" rtlCol="0" anchor="ctr"/>
+              <a:lnSpc>
+                <a:spcPct val="115000"/>
+              </a:lnSpc>
+              <a:buNone/>
+            </a:pPr>
+            <a:r>
+              <a:rPr lang="en-US" sz="1150" b="1" dirty="0">
+                <a:solidFill>
+                  <a:srgbClr val="38B6FF"/>
+                </a:solidFill>
+                <a:latin typeface="Arial" pitchFamily="34" charset="0"/>
+                <a:ea typeface="Arial" pitchFamily="34" charset="-122"/>
+                <a:cs typeface="Arial" pitchFamily="34" charset="-120"/>
+              </a:rPr>
+              <a:t>Op- en afschalen</a:t>
+            </a:r>
+            <a:endParaRPr lang="en-US" sz="1150" dirty="0"/>
+          </a:p>
+        </p:txBody>
+      </p:sp>
+      <p:sp>
+        <p:nvSpPr>
+          <p:cNvPr id="26" name="Text 24"/>
+          <p:cNvSpPr txBox="1"/>
+          <p:nvPr/>
+        </p:nvSpPr>
+        <p:spPr>
+          <a:xfrm>
+            <a:off x="9169377" y="3594091"/>
+            <a:ext cx="2197095" cy="1079497"/>
+          </a:xfrm>
+          <a:prstGeom prst="rect">
+            <a:avLst/>
+          </a:prstGeom>
+          <a:noFill/>
+          <a:ln/>
+        </p:spPr>
+        <p:txBody>
+          <a:bodyPr wrap="square" lIns="0" tIns="0" rIns="0" bIns="0" rtlCol="0" anchor="t"/>
           <a:lstStyle/>
           <a:p>
             <a:pPr indent="0" marL="0">
-              <a:buNone/>
-            </a:pPr>
-            <a:r>
-              <a:rPr lang="en-US" sz="1250" b="1" dirty="0">
-                <a:solidFill>
-                  <a:srgbClr val="F2EFE6"/>
-                </a:solidFill>
-                <a:latin typeface="Arial" pitchFamily="34" charset="0"/>
-                <a:ea typeface="Arial" pitchFamily="34" charset="-122"/>
-                <a:cs typeface="Arial" pitchFamily="34" charset="-120"/>
-              </a:rPr>
-              <a:t>vanaf € 4.000</a:t>
-            </a:r>
-            <a:endParaRPr lang="en-US" sz="1250" dirty="0"/>
-          </a:p>
-        </p:txBody>
-      </p:sp>
-      <p:sp>
-        <p:nvSpPr>
-          <p:cNvPr id="24" name="Shape 22"/>
+              <a:lnSpc>
+                <a:spcPct val="130000"/>
+              </a:lnSpc>
+              <a:buNone/>
+            </a:pPr>
+            <a:r>
+              <a:rPr lang="en-US" sz="875" dirty="0">
+                <a:solidFill>
+                  <a:srgbClr val="C2C8D2"/>
+                </a:solidFill>
+                <a:latin typeface="Arial" pitchFamily="34" charset="0"/>
+                <a:ea typeface="Arial" pitchFamily="34" charset="-122"/>
+                <a:cs typeface="Arial" pitchFamily="34" charset="-120"/>
+              </a:rPr>
+              <a:t>Loopt het goed, dan zetten we er beldagen bij. Loopt het minder, dan schalen we terug naar twee. Vastgelegd met een maand opzegtermijn.</a:t>
+            </a:r>
+            <a:endParaRPr lang="en-US" sz="875" dirty="0"/>
+          </a:p>
+        </p:txBody>
+      </p:sp>
+      <p:sp>
+        <p:nvSpPr>
+          <p:cNvPr id="27" name="Shape 25"/>
           <p:cNvSpPr/>
           <p:nvPr/>
         </p:nvSpPr>
         <p:spPr>
           <a:xfrm>
-            <a:off x="609598" y="5854685"/>
-            <a:ext cx="76200" cy="76200"/>
-          </a:xfrm>
-          <a:prstGeom prst="ellipse">
-            <a:avLst/>
+            <a:off x="609598" y="5079987"/>
+            <a:ext cx="10972773" cy="1028697"/>
+          </a:xfrm>
+          <a:prstGeom prst="roundRect">
+            <a:avLst>
+              <a:gd name="adj" fmla="val 9877"/>
+            </a:avLst>
           </a:prstGeom>
           <a:solidFill>
             <a:srgbClr val="38B6FF"/>
@@ -9516,14 +11143,14 @@
       </p:sp>
       <p:sp>
         <p:nvSpPr>
-          <p:cNvPr id="25" name="Text 23"/>
-          <p:cNvSpPr txBox="1"/>
-          <p:nvPr/>
-        </p:nvSpPr>
-        <p:spPr>
-          <a:xfrm>
-            <a:off x="800098" y="5651486"/>
-            <a:ext cx="9905975" cy="482599"/>
+          <p:cNvPr id="28" name="Text 26"/>
+          <p:cNvSpPr txBox="1"/>
+          <p:nvPr/>
+        </p:nvSpPr>
+        <p:spPr>
+          <a:xfrm>
+            <a:off x="914398" y="5245087"/>
+            <a:ext cx="1904995" cy="165100"/>
           </a:xfrm>
           <a:prstGeom prst="rect">
             <a:avLst/>
@@ -9539,17 +11166,498 @@
               <a:buNone/>
             </a:pPr>
             <a:r>
-              <a:rPr lang="en-US" sz="1200" b="1" dirty="0">
-                <a:solidFill>
-                  <a:srgbClr val="F2EFE6"/>
-                </a:solidFill>
-                <a:latin typeface="Arial" pitchFamily="34" charset="0"/>
-                <a:ea typeface="Arial" pitchFamily="34" charset="-122"/>
-                <a:cs typeface="Arial" pitchFamily="34" charset="-120"/>
-              </a:rPr>
-              <a:t>Minimaal vier beldagen per periode van vier weken, vooraf gefactureerd, prijzen excl. btw. De staffel telt per klant. Zit een klant eenmaal op acht dagen, dan blijft die dagprijs staan.</a:t>
-            </a:r>
-            <a:endParaRPr lang="en-US" sz="1200" dirty="0"/>
+              <a:rPr lang="en-US" sz="800" b="1" spc="200" kern="0" dirty="0">
+                <a:solidFill>
+                  <a:srgbClr val="0D1420"/>
+                </a:solidFill>
+                <a:latin typeface="Arial" pitchFamily="34" charset="0"/>
+                <a:ea typeface="Arial" pitchFamily="34" charset="-122"/>
+                <a:cs typeface="Arial" pitchFamily="34" charset="-120"/>
+              </a:rPr>
+              <a:t>OPSTART PER KLANT</a:t>
+            </a:r>
+            <a:endParaRPr lang="en-US" sz="800" dirty="0"/>
+          </a:p>
+        </p:txBody>
+      </p:sp>
+      <p:sp>
+        <p:nvSpPr>
+          <p:cNvPr id="29" name="Text 27"/>
+          <p:cNvSpPr txBox="1"/>
+          <p:nvPr/>
+        </p:nvSpPr>
+        <p:spPr>
+          <a:xfrm>
+            <a:off x="914398" y="5410186"/>
+            <a:ext cx="1904995" cy="406399"/>
+          </a:xfrm>
+          <a:prstGeom prst="rect">
+            <a:avLst/>
+          </a:prstGeom>
+          <a:noFill/>
+          <a:ln/>
+        </p:spPr>
+        <p:txBody>
+          <a:bodyPr wrap="square" lIns="0" tIns="0" rIns="0" bIns="0" rtlCol="0" anchor="ctr"/>
+          <a:lstStyle/>
+          <a:p>
+            <a:pPr indent="0" marL="0">
+              <a:buNone/>
+            </a:pPr>
+            <a:r>
+              <a:rPr lang="en-US" sz="2900" b="1" dirty="0">
+                <a:solidFill>
+                  <a:srgbClr val="0D1420"/>
+                </a:solidFill>
+                <a:latin typeface="Arial" pitchFamily="34" charset="0"/>
+                <a:ea typeface="Arial" pitchFamily="34" charset="-122"/>
+                <a:cs typeface="Arial" pitchFamily="34" charset="-120"/>
+              </a:rPr>
+              <a:t>€ 695</a:t>
+            </a:r>
+            <a:endParaRPr lang="en-US" sz="2900" dirty="0"/>
+          </a:p>
+        </p:txBody>
+      </p:sp>
+      <p:sp>
+        <p:nvSpPr>
+          <p:cNvPr id="30" name="Text 28"/>
+          <p:cNvSpPr txBox="1"/>
+          <p:nvPr/>
+        </p:nvSpPr>
+        <p:spPr>
+          <a:xfrm>
+            <a:off x="914398" y="5829285"/>
+            <a:ext cx="2031995" cy="165100"/>
+          </a:xfrm>
+          <a:prstGeom prst="rect">
+            <a:avLst/>
+          </a:prstGeom>
+          <a:noFill/>
+          <a:ln/>
+        </p:spPr>
+        <p:txBody>
+          <a:bodyPr wrap="square" lIns="0" tIns="0" rIns="0" bIns="0" rtlCol="0" anchor="ctr"/>
+          <a:lstStyle/>
+          <a:p>
+            <a:pPr indent="0" marL="0">
+              <a:buNone/>
+            </a:pPr>
+            <a:r>
+              <a:rPr lang="en-US" sz="800" b="1" dirty="0">
+                <a:solidFill>
+                  <a:srgbClr val="0D1420"/>
+                </a:solidFill>
+                <a:latin typeface="Arial" pitchFamily="34" charset="0"/>
+                <a:ea typeface="Arial" pitchFamily="34" charset="-122"/>
+                <a:cs typeface="Arial" pitchFamily="34" charset="-120"/>
+              </a:rPr>
+              <a:t>eenmalig, excl. btw</a:t>
+            </a:r>
+            <a:endParaRPr lang="en-US" sz="800" dirty="0"/>
+          </a:p>
+        </p:txBody>
+      </p:sp>
+      <p:sp>
+        <p:nvSpPr>
+          <p:cNvPr id="31" name="Shape 29"/>
+          <p:cNvSpPr/>
+          <p:nvPr/>
+        </p:nvSpPr>
+        <p:spPr>
+          <a:xfrm>
+            <a:off x="3174992" y="5257787"/>
+            <a:ext cx="0" cy="673098"/>
+          </a:xfrm>
+          <a:prstGeom prst="line">
+            <a:avLst/>
+          </a:prstGeom>
+          <a:noFill/>
+          <a:ln w="9525">
+            <a:solidFill>
+              <a:srgbClr val="0D1420">
+                <a:alpha val="40000"/>
+              </a:srgbClr>
+            </a:solidFill>
+            <a:prstDash val="solid"/>
+          </a:ln>
+        </p:spPr>
+      </p:sp>
+      <p:pic>
+        <p:nvPicPr>
+          <p:cNvPr id="32" name="Image 0" descr="preencoded.png">    </p:cNvPr>
+          <p:cNvPicPr>
+            <a:picLocks noChangeAspect="1"/>
+          </p:cNvPicPr>
+          <p:nvPr/>
+        </p:nvPicPr>
+        <p:blipFill>
+          <a:blip r:embed="rId1"/>
+          <a:stretch>
+            <a:fillRect/>
+          </a:stretch>
+        </p:blipFill>
+        <p:spPr>
+          <a:xfrm>
+            <a:off x="3530591" y="5276837"/>
+            <a:ext cx="127000" cy="127000"/>
+          </a:xfrm>
+          <a:prstGeom prst="rect">
+            <a:avLst/>
+          </a:prstGeom>
+        </p:spPr>
+      </p:pic>
+      <p:sp>
+        <p:nvSpPr>
+          <p:cNvPr id="33" name="Text 30"/>
+          <p:cNvSpPr txBox="1"/>
+          <p:nvPr/>
+        </p:nvSpPr>
+        <p:spPr>
+          <a:xfrm>
+            <a:off x="3733791" y="5245087"/>
+            <a:ext cx="3555991" cy="215899"/>
+          </a:xfrm>
+          <a:prstGeom prst="rect">
+            <a:avLst/>
+          </a:prstGeom>
+          <a:noFill/>
+          <a:ln/>
+        </p:spPr>
+        <p:txBody>
+          <a:bodyPr wrap="square" lIns="0" tIns="0" rIns="0" bIns="0" rtlCol="0" anchor="ctr"/>
+          <a:lstStyle/>
+          <a:p>
+            <a:pPr indent="0" marL="0">
+              <a:buNone/>
+            </a:pPr>
+            <a:r>
+              <a:rPr lang="en-US" sz="900" b="1" dirty="0">
+                <a:solidFill>
+                  <a:srgbClr val="0D1420"/>
+                </a:solidFill>
+                <a:latin typeface="Arial" pitchFamily="34" charset="0"/>
+                <a:ea typeface="Arial" pitchFamily="34" charset="-122"/>
+                <a:cs typeface="Arial" pitchFamily="34" charset="-120"/>
+              </a:rPr>
+              <a:t>Kick-off met de klant</a:t>
+            </a:r>
+            <a:endParaRPr lang="en-US" sz="900" dirty="0"/>
+          </a:p>
+        </p:txBody>
+      </p:sp>
+      <p:pic>
+        <p:nvPicPr>
+          <p:cNvPr id="34" name="Image 1" descr="preencoded.png">    </p:cNvPr>
+          <p:cNvPicPr>
+            <a:picLocks noChangeAspect="1"/>
+          </p:cNvPicPr>
+          <p:nvPr/>
+        </p:nvPicPr>
+        <p:blipFill>
+          <a:blip r:embed="rId2"/>
+          <a:stretch>
+            <a:fillRect/>
+          </a:stretch>
+        </p:blipFill>
+        <p:spPr>
+          <a:xfrm>
+            <a:off x="7340582" y="5276837"/>
+            <a:ext cx="127000" cy="127000"/>
+          </a:xfrm>
+          <a:prstGeom prst="rect">
+            <a:avLst/>
+          </a:prstGeom>
+        </p:spPr>
+      </p:pic>
+      <p:sp>
+        <p:nvSpPr>
+          <p:cNvPr id="35" name="Text 31"/>
+          <p:cNvSpPr txBox="1"/>
+          <p:nvPr/>
+        </p:nvSpPr>
+        <p:spPr>
+          <a:xfrm>
+            <a:off x="7543781" y="5245087"/>
+            <a:ext cx="3555991" cy="215899"/>
+          </a:xfrm>
+          <a:prstGeom prst="rect">
+            <a:avLst/>
+          </a:prstGeom>
+          <a:noFill/>
+          <a:ln/>
+        </p:spPr>
+        <p:txBody>
+          <a:bodyPr wrap="square" lIns="0" tIns="0" rIns="0" bIns="0" rtlCol="0" anchor="ctr"/>
+          <a:lstStyle/>
+          <a:p>
+            <a:pPr indent="0" marL="0">
+              <a:buNone/>
+            </a:pPr>
+            <a:r>
+              <a:rPr lang="en-US" sz="900" b="1" dirty="0">
+                <a:solidFill>
+                  <a:srgbClr val="0D1420"/>
+                </a:solidFill>
+                <a:latin typeface="Arial" pitchFamily="34" charset="0"/>
+                <a:ea typeface="Arial" pitchFamily="34" charset="-122"/>
+                <a:cs typeface="Arial" pitchFamily="34" charset="-120"/>
+              </a:rPr>
+              <a:t>Belscript en bezwaren</a:t>
+            </a:r>
+            <a:endParaRPr lang="en-US" sz="900" dirty="0"/>
+          </a:p>
+        </p:txBody>
+      </p:sp>
+      <p:pic>
+        <p:nvPicPr>
+          <p:cNvPr id="36" name="Image 2" descr="preencoded.png">    </p:cNvPr>
+          <p:cNvPicPr>
+            <a:picLocks noChangeAspect="1"/>
+          </p:cNvPicPr>
+          <p:nvPr/>
+        </p:nvPicPr>
+        <p:blipFill>
+          <a:blip r:embed="rId3"/>
+          <a:stretch>
+            <a:fillRect/>
+          </a:stretch>
+        </p:blipFill>
+        <p:spPr>
+          <a:xfrm>
+            <a:off x="3530591" y="5530836"/>
+            <a:ext cx="127000" cy="127000"/>
+          </a:xfrm>
+          <a:prstGeom prst="rect">
+            <a:avLst/>
+          </a:prstGeom>
+        </p:spPr>
+      </p:pic>
+      <p:sp>
+        <p:nvSpPr>
+          <p:cNvPr id="37" name="Text 32"/>
+          <p:cNvSpPr txBox="1"/>
+          <p:nvPr/>
+        </p:nvSpPr>
+        <p:spPr>
+          <a:xfrm>
+            <a:off x="3733791" y="5499086"/>
+            <a:ext cx="3555991" cy="215899"/>
+          </a:xfrm>
+          <a:prstGeom prst="rect">
+            <a:avLst/>
+          </a:prstGeom>
+          <a:noFill/>
+          <a:ln/>
+        </p:spPr>
+        <p:txBody>
+          <a:bodyPr wrap="square" lIns="0" tIns="0" rIns="0" bIns="0" rtlCol="0" anchor="ctr"/>
+          <a:lstStyle/>
+          <a:p>
+            <a:pPr indent="0" marL="0">
+              <a:buNone/>
+            </a:pPr>
+            <a:r>
+              <a:rPr lang="en-US" sz="900" b="1" dirty="0">
+                <a:solidFill>
+                  <a:srgbClr val="0D1420"/>
+                </a:solidFill>
+                <a:latin typeface="Arial" pitchFamily="34" charset="0"/>
+                <a:ea typeface="Arial" pitchFamily="34" charset="-122"/>
+                <a:cs typeface="Arial" pitchFamily="34" charset="-120"/>
+              </a:rPr>
+              <a:t>Bellijst en uitsluitingen</a:t>
+            </a:r>
+            <a:endParaRPr lang="en-US" sz="900" dirty="0"/>
+          </a:p>
+        </p:txBody>
+      </p:sp>
+      <p:pic>
+        <p:nvPicPr>
+          <p:cNvPr id="38" name="Image 3" descr="preencoded.png">    </p:cNvPr>
+          <p:cNvPicPr>
+            <a:picLocks noChangeAspect="1"/>
+          </p:cNvPicPr>
+          <p:nvPr/>
+        </p:nvPicPr>
+        <p:blipFill>
+          <a:blip r:embed="rId4"/>
+          <a:stretch>
+            <a:fillRect/>
+          </a:stretch>
+        </p:blipFill>
+        <p:spPr>
+          <a:xfrm>
+            <a:off x="7340582" y="5530836"/>
+            <a:ext cx="127000" cy="127000"/>
+          </a:xfrm>
+          <a:prstGeom prst="rect">
+            <a:avLst/>
+          </a:prstGeom>
+        </p:spPr>
+      </p:pic>
+      <p:sp>
+        <p:nvSpPr>
+          <p:cNvPr id="39" name="Text 33"/>
+          <p:cNvSpPr txBox="1"/>
+          <p:nvPr/>
+        </p:nvSpPr>
+        <p:spPr>
+          <a:xfrm>
+            <a:off x="7543781" y="5499086"/>
+            <a:ext cx="3555991" cy="215899"/>
+          </a:xfrm>
+          <a:prstGeom prst="rect">
+            <a:avLst/>
+          </a:prstGeom>
+          <a:noFill/>
+          <a:ln/>
+        </p:spPr>
+        <p:txBody>
+          <a:bodyPr wrap="square" lIns="0" tIns="0" rIns="0" bIns="0" rtlCol="0" anchor="ctr"/>
+          <a:lstStyle/>
+          <a:p>
+            <a:pPr indent="0" marL="0">
+              <a:buNone/>
+            </a:pPr>
+            <a:r>
+              <a:rPr lang="en-US" sz="900" b="1" dirty="0">
+                <a:solidFill>
+                  <a:srgbClr val="0D1420"/>
+                </a:solidFill>
+                <a:latin typeface="Arial" pitchFamily="34" charset="0"/>
+                <a:ea typeface="Arial" pitchFamily="34" charset="-122"/>
+                <a:cs typeface="Arial" pitchFamily="34" charset="-120"/>
+              </a:rPr>
+              <a:t>Belsysteem en regionaal nummer</a:t>
+            </a:r>
+            <a:endParaRPr lang="en-US" sz="900" dirty="0"/>
+          </a:p>
+        </p:txBody>
+      </p:sp>
+      <p:pic>
+        <p:nvPicPr>
+          <p:cNvPr id="40" name="Image 4" descr="preencoded.png">    </p:cNvPr>
+          <p:cNvPicPr>
+            <a:picLocks noChangeAspect="1"/>
+          </p:cNvPicPr>
+          <p:nvPr/>
+        </p:nvPicPr>
+        <p:blipFill>
+          <a:blip r:embed="rId5"/>
+          <a:stretch>
+            <a:fillRect/>
+          </a:stretch>
+        </p:blipFill>
+        <p:spPr>
+          <a:xfrm>
+            <a:off x="3530591" y="5784836"/>
+            <a:ext cx="127000" cy="127000"/>
+          </a:xfrm>
+          <a:prstGeom prst="rect">
+            <a:avLst/>
+          </a:prstGeom>
+        </p:spPr>
+      </p:pic>
+      <p:sp>
+        <p:nvSpPr>
+          <p:cNvPr id="41" name="Text 34"/>
+          <p:cNvSpPr txBox="1"/>
+          <p:nvPr/>
+        </p:nvSpPr>
+        <p:spPr>
+          <a:xfrm>
+            <a:off x="3733791" y="5753086"/>
+            <a:ext cx="3555991" cy="215899"/>
+          </a:xfrm>
+          <a:prstGeom prst="rect">
+            <a:avLst/>
+          </a:prstGeom>
+          <a:noFill/>
+          <a:ln/>
+        </p:spPr>
+        <p:txBody>
+          <a:bodyPr wrap="square" lIns="0" tIns="0" rIns="0" bIns="0" rtlCol="0" anchor="ctr"/>
+          <a:lstStyle/>
+          <a:p>
+            <a:pPr indent="0" marL="0">
+              <a:buNone/>
+            </a:pPr>
+            <a:r>
+              <a:rPr lang="en-US" sz="900" b="1" dirty="0">
+                <a:solidFill>
+                  <a:srgbClr val="0D1420"/>
+                </a:solidFill>
+                <a:latin typeface="Arial" pitchFamily="34" charset="0"/>
+                <a:ea typeface="Arial" pitchFamily="34" charset="-122"/>
+                <a:cs typeface="Arial" pitchFamily="34" charset="-120"/>
+              </a:rPr>
+              <a:t>Koppeling met jullie leads</a:t>
+            </a:r>
+            <a:endParaRPr lang="en-US" sz="900" dirty="0"/>
+          </a:p>
+        </p:txBody>
+      </p:sp>
+      <p:pic>
+        <p:nvPicPr>
+          <p:cNvPr id="42" name="Image 5" descr="preencoded.png">    </p:cNvPr>
+          <p:cNvPicPr>
+            <a:picLocks noChangeAspect="1"/>
+          </p:cNvPicPr>
+          <p:nvPr/>
+        </p:nvPicPr>
+        <p:blipFill>
+          <a:blip r:embed="rId6"/>
+          <a:stretch>
+            <a:fillRect/>
+          </a:stretch>
+        </p:blipFill>
+        <p:spPr>
+          <a:xfrm>
+            <a:off x="7340582" y="5784836"/>
+            <a:ext cx="127000" cy="127000"/>
+          </a:xfrm>
+          <a:prstGeom prst="rect">
+            <a:avLst/>
+          </a:prstGeom>
+        </p:spPr>
+      </p:pic>
+      <p:sp>
+        <p:nvSpPr>
+          <p:cNvPr id="43" name="Text 35"/>
+          <p:cNvSpPr txBox="1"/>
+          <p:nvPr/>
+        </p:nvSpPr>
+        <p:spPr>
+          <a:xfrm>
+            <a:off x="7543781" y="5753086"/>
+            <a:ext cx="3555991" cy="215899"/>
+          </a:xfrm>
+          <a:prstGeom prst="rect">
+            <a:avLst/>
+          </a:prstGeom>
+          <a:noFill/>
+          <a:ln/>
+        </p:spPr>
+        <p:txBody>
+          <a:bodyPr wrap="square" lIns="0" tIns="0" rIns="0" bIns="0" rtlCol="0" anchor="ctr"/>
+          <a:lstStyle/>
+          <a:p>
+            <a:pPr indent="0" marL="0">
+              <a:buNone/>
+            </a:pPr>
+            <a:r>
+              <a:rPr lang="en-US" sz="900" b="1" dirty="0">
+                <a:solidFill>
+                  <a:srgbClr val="0D1420"/>
+                </a:solidFill>
+                <a:latin typeface="Arial" pitchFamily="34" charset="0"/>
+                <a:ea typeface="Arial" pitchFamily="34" charset="-122"/>
+                <a:cs typeface="Arial" pitchFamily="34" charset="-120"/>
+              </a:rPr>
+              <a:t>Daarna vanaf twee beldagen</a:t>
+            </a:r>
+            <a:endParaRPr lang="en-US" sz="900" dirty="0"/>
           </a:p>
         </p:txBody>
       </p:sp>
@@ -9567,7 +11675,7 @@
     <p:bg>
       <p:bgPr>
         <a:solidFill>
-          <a:srgbClr val="E9E0CD"/>
+          <a:srgbClr val="141821"/>
         </a:solidFill>
       </p:bgPr>
     </p:bg>
@@ -9612,7 +11720,7 @@
             <a:r>
               <a:rPr lang="en-US" sz="1800" b="1" dirty="0">
                 <a:solidFill>
-                  <a:srgbClr val="1C2230"/>
+                  <a:srgbClr val="F2EFE6"/>
                 </a:solidFill>
                 <a:latin typeface="Arial" pitchFamily="34" charset="0"/>
                 <a:ea typeface="Arial" pitchFamily="34" charset="-122"/>
@@ -9665,7 +11773,7 @@
             <a:r>
               <a:rPr lang="en-US" sz="750" b="1" spc="100" kern="0" dirty="0">
                 <a:solidFill>
-                  <a:srgbClr val="6F6A5C"/>
+                  <a:srgbClr val="BDC3CE"/>
                 </a:solidFill>
                 <a:latin typeface="Arial" pitchFamily="34" charset="0"/>
                 <a:ea typeface="Arial" pitchFamily="34" charset="-122"/>
@@ -9704,13 +11812,13 @@
             <a:r>
               <a:rPr lang="en-US" sz="750" b="1" spc="100" kern="0" dirty="0">
                 <a:solidFill>
-                  <a:srgbClr val="6F6A5C"/>
-                </a:solidFill>
-                <a:latin typeface="Arial" pitchFamily="34" charset="0"/>
-                <a:ea typeface="Arial" pitchFamily="34" charset="-122"/>
-                <a:cs typeface="Arial" pitchFamily="34" charset="-120"/>
-              </a:rPr>
-              <a:t>8 / 10</a:t>
+                  <a:srgbClr val="BDC3CE"/>
+                </a:solidFill>
+                <a:latin typeface="Arial" pitchFamily="34" charset="0"/>
+                <a:ea typeface="Arial" pitchFamily="34" charset="-122"/>
+                <a:cs typeface="Arial" pitchFamily="34" charset="-120"/>
+              </a:rPr>
+              <a:t>8 / 11</a:t>
             </a:r>
             <a:endParaRPr lang="en-US" sz="750" dirty="0"/>
           </a:p>
@@ -9749,7 +11857,7 @@
                 <a:ea typeface="Arial" pitchFamily="34" charset="-122"/>
                 <a:cs typeface="Arial" pitchFamily="34" charset="-120"/>
               </a:rPr>
-              <a:t>WAT WE VAN CENTREBLOCK NODIG HEBBEN</a:t>
+              <a:t>DE BELDAGEN</a:t>
             </a:r>
             <a:endParaRPr lang="en-US" sz="950" dirty="0"/>
           </a:p>
@@ -9785,13 +11893,13 @@
             <a:r>
               <a:rPr lang="en-US" sz="3200" b="1" dirty="0">
                 <a:solidFill>
-                  <a:srgbClr val="1C2230"/>
-                </a:solidFill>
-                <a:latin typeface="Arial" pitchFamily="34" charset="0"/>
-                <a:ea typeface="Arial" pitchFamily="34" charset="-122"/>
-                <a:cs typeface="Arial" pitchFamily="34" charset="-120"/>
-              </a:rPr>
-              <a:t>Leads met context, dan </a:t>
+                  <a:srgbClr val="F2EFE6"/>
+                </a:solidFill>
+                <a:latin typeface="Arial" pitchFamily="34" charset="0"/>
+                <a:ea typeface="Arial" pitchFamily="34" charset="-122"/>
+                <a:cs typeface="Arial" pitchFamily="34" charset="-120"/>
+              </a:rPr>
+              <a:t>Vanaf twee beldagen. Hoe meer dagen, hoe lager de </a:t>
             </a:r>
             <a:pPr algn="l" indent="0" marL="0">
               <a:lnSpc>
@@ -9802,13 +11910,13 @@
             <a:r>
               <a:rPr lang="en-US" sz="3000" i="1" dirty="0">
                 <a:solidFill>
-                  <a:srgbClr val="1C2230"/>
+                  <a:srgbClr val="F2EFE6"/>
                 </a:solidFill>
                 <a:latin typeface="Georgia" pitchFamily="34" charset="0"/>
                 <a:ea typeface="Georgia" pitchFamily="34" charset="-122"/>
                 <a:cs typeface="Georgia" pitchFamily="34" charset="-120"/>
               </a:rPr>
-              <a:t>draaien wij</a:t>
+              <a:t>dagprijs</a:t>
             </a:r>
             <a:pPr algn="l" indent="0" marL="0">
               <a:lnSpc>
@@ -9819,7 +11927,7 @@
             <a:r>
               <a:rPr lang="en-US" sz="3200" b="1" dirty="0">
                 <a:solidFill>
-                  <a:srgbClr val="1C2230"/>
+                  <a:srgbClr val="F2EFE6"/>
                 </a:solidFill>
                 <a:latin typeface="Arial" pitchFamily="34" charset="0"/>
                 <a:ea typeface="Arial" pitchFamily="34" charset="-122"/>
@@ -9839,76 +11947,611 @@
         </p:nvSpPr>
         <p:spPr>
           <a:xfrm>
-            <a:off x="609598" y="2793993"/>
-            <a:ext cx="5397487" cy="1530346"/>
+            <a:off x="609598" y="2666993"/>
+            <a:ext cx="10972773" cy="2355844"/>
           </a:xfrm>
           <a:prstGeom prst="roundRect">
             <a:avLst>
-              <a:gd name="adj" fmla="val 6639"/>
+              <a:gd name="adj" fmla="val 4313"/>
             </a:avLst>
           </a:prstGeom>
+          <a:ln w="9525">
+            <a:solidFill>
+              <a:srgbClr val="3A4152"/>
+            </a:solidFill>
+            <a:prstDash val="solid"/>
+          </a:ln>
+        </p:spPr>
+      </p:sp>
+      <p:sp>
+        <p:nvSpPr>
+          <p:cNvPr id="8" name="Text 6"/>
+          <p:cNvSpPr txBox="1"/>
+          <p:nvPr/>
+        </p:nvSpPr>
+        <p:spPr>
+          <a:xfrm>
+            <a:off x="888998" y="2666993"/>
+            <a:ext cx="2920993" cy="469899"/>
+          </a:xfrm>
+          <a:prstGeom prst="rect">
+            <a:avLst/>
+          </a:prstGeom>
+          <a:noFill/>
+          <a:ln/>
+        </p:spPr>
+        <p:txBody>
+          <a:bodyPr wrap="square" lIns="0" tIns="0" rIns="0" bIns="0" rtlCol="0" anchor="ctr"/>
+          <a:lstStyle/>
+          <a:p>
+            <a:pPr indent="0" marL="0">
+              <a:buNone/>
+            </a:pPr>
+            <a:r>
+              <a:rPr lang="en-US" sz="800" b="1" spc="160" kern="0" dirty="0">
+                <a:solidFill>
+                  <a:srgbClr val="C2C8D2"/>
+                </a:solidFill>
+                <a:latin typeface="Arial" pitchFamily="34" charset="0"/>
+                <a:ea typeface="Arial" pitchFamily="34" charset="-122"/>
+                <a:cs typeface="Arial" pitchFamily="34" charset="-120"/>
+              </a:rPr>
+              <a:t>BELDAGEN PER 4 WEKEN</a:t>
+            </a:r>
+            <a:endParaRPr lang="en-US" sz="800" dirty="0"/>
+          </a:p>
+        </p:txBody>
+      </p:sp>
+      <p:sp>
+        <p:nvSpPr>
+          <p:cNvPr id="9" name="Text 7"/>
+          <p:cNvSpPr txBox="1"/>
+          <p:nvPr/>
+        </p:nvSpPr>
+        <p:spPr>
+          <a:xfrm>
+            <a:off x="3886190" y="2666993"/>
+            <a:ext cx="2349494" cy="469899"/>
+          </a:xfrm>
+          <a:prstGeom prst="rect">
+            <a:avLst/>
+          </a:prstGeom>
+          <a:noFill/>
+          <a:ln/>
+        </p:spPr>
+        <p:txBody>
+          <a:bodyPr wrap="square" lIns="0" tIns="0" rIns="0" bIns="0" rtlCol="0" anchor="ctr"/>
+          <a:lstStyle/>
+          <a:p>
+            <a:pPr indent="0" marL="0">
+              <a:buNone/>
+            </a:pPr>
+            <a:r>
+              <a:rPr lang="en-US" sz="800" b="1" spc="160" kern="0" dirty="0">
+                <a:solidFill>
+                  <a:srgbClr val="C2C8D2"/>
+                </a:solidFill>
+                <a:latin typeface="Arial" pitchFamily="34" charset="0"/>
+                <a:ea typeface="Arial" pitchFamily="34" charset="-122"/>
+                <a:cs typeface="Arial" pitchFamily="34" charset="-120"/>
+              </a:rPr>
+              <a:t>PRIJS PER BELDAG</a:t>
+            </a:r>
+            <a:endParaRPr lang="en-US" sz="800" dirty="0"/>
+          </a:p>
+        </p:txBody>
+      </p:sp>
+      <p:sp>
+        <p:nvSpPr>
+          <p:cNvPr id="10" name="Text 8"/>
+          <p:cNvSpPr txBox="1"/>
+          <p:nvPr/>
+        </p:nvSpPr>
+        <p:spPr>
+          <a:xfrm>
+            <a:off x="6324584" y="2666993"/>
+            <a:ext cx="2349494" cy="469899"/>
+          </a:xfrm>
+          <a:prstGeom prst="rect">
+            <a:avLst/>
+          </a:prstGeom>
+          <a:noFill/>
+          <a:ln/>
+        </p:spPr>
+        <p:txBody>
+          <a:bodyPr wrap="square" lIns="0" tIns="0" rIns="0" bIns="0" rtlCol="0" anchor="ctr"/>
+          <a:lstStyle/>
+          <a:p>
+            <a:pPr indent="0" marL="0">
+              <a:buNone/>
+            </a:pPr>
+            <a:r>
+              <a:rPr lang="en-US" sz="800" b="1" spc="160" kern="0" dirty="0">
+                <a:solidFill>
+                  <a:srgbClr val="C2C8D2"/>
+                </a:solidFill>
+                <a:latin typeface="Arial" pitchFamily="34" charset="0"/>
+                <a:ea typeface="Arial" pitchFamily="34" charset="-122"/>
+                <a:cs typeface="Arial" pitchFamily="34" charset="-120"/>
+              </a:rPr>
+              <a:t>PER 4 WEKEN</a:t>
+            </a:r>
+            <a:endParaRPr lang="en-US" sz="800" dirty="0"/>
+          </a:p>
+        </p:txBody>
+      </p:sp>
+      <p:sp>
+        <p:nvSpPr>
+          <p:cNvPr id="11" name="Shape 9"/>
+          <p:cNvSpPr/>
+          <p:nvPr/>
+        </p:nvSpPr>
+        <p:spPr>
+          <a:xfrm>
+            <a:off x="609598" y="3136892"/>
+            <a:ext cx="10972773" cy="0"/>
+          </a:xfrm>
+          <a:prstGeom prst="line">
+            <a:avLst/>
+          </a:prstGeom>
+          <a:noFill/>
+          <a:ln w="9525">
+            <a:solidFill>
+              <a:srgbClr val="3A4152"/>
+            </a:solidFill>
+            <a:prstDash val="solid"/>
+          </a:ln>
+        </p:spPr>
+      </p:sp>
+      <p:sp>
+        <p:nvSpPr>
+          <p:cNvPr id="12" name="Text 10"/>
+          <p:cNvSpPr txBox="1"/>
+          <p:nvPr/>
+        </p:nvSpPr>
+        <p:spPr>
+          <a:xfrm>
+            <a:off x="888998" y="3136892"/>
+            <a:ext cx="2920993" cy="628648"/>
+          </a:xfrm>
+          <a:prstGeom prst="rect">
+            <a:avLst/>
+          </a:prstGeom>
+          <a:noFill/>
+          <a:ln/>
+        </p:spPr>
+        <p:txBody>
+          <a:bodyPr wrap="square" lIns="0" tIns="0" rIns="0" bIns="0" rtlCol="0" anchor="ctr"/>
+          <a:lstStyle/>
+          <a:p>
+            <a:pPr indent="0" marL="0">
+              <a:buNone/>
+            </a:pPr>
+            <a:r>
+              <a:rPr lang="en-US" sz="1250" b="1" dirty="0">
+                <a:solidFill>
+                  <a:srgbClr val="F2EFE6"/>
+                </a:solidFill>
+                <a:latin typeface="Arial" pitchFamily="34" charset="0"/>
+                <a:ea typeface="Arial" pitchFamily="34" charset="-122"/>
+                <a:cs typeface="Arial" pitchFamily="34" charset="-120"/>
+              </a:rPr>
+              <a:t>2 tot 4 beldagen</a:t>
+            </a:r>
+            <a:endParaRPr lang="en-US" sz="1250" dirty="0"/>
+          </a:p>
+        </p:txBody>
+      </p:sp>
+      <p:sp>
+        <p:nvSpPr>
+          <p:cNvPr id="13" name="Text 11"/>
+          <p:cNvSpPr txBox="1"/>
+          <p:nvPr/>
+        </p:nvSpPr>
+        <p:spPr>
+          <a:xfrm>
+            <a:off x="3886190" y="3136892"/>
+            <a:ext cx="2349494" cy="628648"/>
+          </a:xfrm>
+          <a:prstGeom prst="rect">
+            <a:avLst/>
+          </a:prstGeom>
+          <a:noFill/>
+          <a:ln/>
+        </p:spPr>
+        <p:txBody>
+          <a:bodyPr wrap="square" lIns="0" tIns="0" rIns="0" bIns="0" rtlCol="0" anchor="ctr"/>
+          <a:lstStyle/>
+          <a:p>
+            <a:pPr indent="0" marL="0">
+              <a:buNone/>
+            </a:pPr>
+            <a:r>
+              <a:rPr lang="en-US" sz="1250" b="1" dirty="0">
+                <a:solidFill>
+                  <a:srgbClr val="F2EFE6"/>
+                </a:solidFill>
+                <a:latin typeface="Arial" pitchFamily="34" charset="0"/>
+                <a:ea typeface="Arial" pitchFamily="34" charset="-122"/>
+                <a:cs typeface="Arial" pitchFamily="34" charset="-120"/>
+              </a:rPr>
+              <a:t>€ 600</a:t>
+            </a:r>
+            <a:endParaRPr lang="en-US" sz="1250" dirty="0"/>
+          </a:p>
+        </p:txBody>
+      </p:sp>
+      <p:sp>
+        <p:nvSpPr>
+          <p:cNvPr id="14" name="Text 12"/>
+          <p:cNvSpPr txBox="1"/>
+          <p:nvPr/>
+        </p:nvSpPr>
+        <p:spPr>
+          <a:xfrm>
+            <a:off x="6324584" y="3136892"/>
+            <a:ext cx="2349494" cy="628648"/>
+          </a:xfrm>
+          <a:prstGeom prst="rect">
+            <a:avLst/>
+          </a:prstGeom>
+          <a:noFill/>
+          <a:ln/>
+        </p:spPr>
+        <p:txBody>
+          <a:bodyPr wrap="square" lIns="0" tIns="0" rIns="0" bIns="0" rtlCol="0" anchor="ctr"/>
+          <a:lstStyle/>
+          <a:p>
+            <a:pPr indent="0" marL="0">
+              <a:buNone/>
+            </a:pPr>
+            <a:r>
+              <a:rPr lang="en-US" sz="1250" b="1" dirty="0">
+                <a:solidFill>
+                  <a:srgbClr val="F2EFE6"/>
+                </a:solidFill>
+                <a:latin typeface="Arial" pitchFamily="34" charset="0"/>
+                <a:ea typeface="Arial" pitchFamily="34" charset="-122"/>
+                <a:cs typeface="Arial" pitchFamily="34" charset="-120"/>
+              </a:rPr>
+              <a:t>€ 1.200 tot € 2.400</a:t>
+            </a:r>
+            <a:endParaRPr lang="en-US" sz="1250" dirty="0"/>
+          </a:p>
+        </p:txBody>
+      </p:sp>
+      <p:sp>
+        <p:nvSpPr>
+          <p:cNvPr id="15" name="Shape 13"/>
+          <p:cNvSpPr/>
+          <p:nvPr/>
+        </p:nvSpPr>
+        <p:spPr>
+          <a:xfrm>
+            <a:off x="609598" y="3765541"/>
+            <a:ext cx="10972773" cy="0"/>
+          </a:xfrm>
+          <a:prstGeom prst="line">
+            <a:avLst/>
+          </a:prstGeom>
+          <a:noFill/>
+          <a:ln w="9525">
+            <a:solidFill>
+              <a:srgbClr val="3A4152"/>
+            </a:solidFill>
+            <a:prstDash val="solid"/>
+          </a:ln>
+        </p:spPr>
+      </p:sp>
+      <p:sp>
+        <p:nvSpPr>
+          <p:cNvPr id="16" name="Text 14"/>
+          <p:cNvSpPr txBox="1"/>
+          <p:nvPr/>
+        </p:nvSpPr>
+        <p:spPr>
+          <a:xfrm>
+            <a:off x="888998" y="3765541"/>
+            <a:ext cx="2920993" cy="628648"/>
+          </a:xfrm>
+          <a:prstGeom prst="rect">
+            <a:avLst/>
+          </a:prstGeom>
+          <a:noFill/>
+          <a:ln/>
+        </p:spPr>
+        <p:txBody>
+          <a:bodyPr wrap="square" lIns="0" tIns="0" rIns="0" bIns="0" rtlCol="0" anchor="ctr"/>
+          <a:lstStyle/>
+          <a:p>
+            <a:pPr indent="0" marL="0">
+              <a:buNone/>
+            </a:pPr>
+            <a:r>
+              <a:rPr lang="en-US" sz="1250" b="1" dirty="0">
+                <a:solidFill>
+                  <a:srgbClr val="F2EFE6"/>
+                </a:solidFill>
+                <a:latin typeface="Arial" pitchFamily="34" charset="0"/>
+                <a:ea typeface="Arial" pitchFamily="34" charset="-122"/>
+                <a:cs typeface="Arial" pitchFamily="34" charset="-120"/>
+              </a:rPr>
+              <a:t>5 tot 7 beldagen</a:t>
+            </a:r>
+            <a:endParaRPr lang="en-US" sz="1250" dirty="0"/>
+          </a:p>
+        </p:txBody>
+      </p:sp>
+      <p:sp>
+        <p:nvSpPr>
+          <p:cNvPr id="17" name="Text 15"/>
+          <p:cNvSpPr txBox="1"/>
+          <p:nvPr/>
+        </p:nvSpPr>
+        <p:spPr>
+          <a:xfrm>
+            <a:off x="3886190" y="3765541"/>
+            <a:ext cx="2349494" cy="628648"/>
+          </a:xfrm>
+          <a:prstGeom prst="rect">
+            <a:avLst/>
+          </a:prstGeom>
+          <a:noFill/>
+          <a:ln/>
+        </p:spPr>
+        <p:txBody>
+          <a:bodyPr wrap="square" lIns="0" tIns="0" rIns="0" bIns="0" rtlCol="0" anchor="ctr"/>
+          <a:lstStyle/>
+          <a:p>
+            <a:pPr indent="0" marL="0">
+              <a:buNone/>
+            </a:pPr>
+            <a:r>
+              <a:rPr lang="en-US" sz="1250" b="1" dirty="0">
+                <a:solidFill>
+                  <a:srgbClr val="F2EFE6"/>
+                </a:solidFill>
+                <a:latin typeface="Arial" pitchFamily="34" charset="0"/>
+                <a:ea typeface="Arial" pitchFamily="34" charset="-122"/>
+                <a:cs typeface="Arial" pitchFamily="34" charset="-120"/>
+              </a:rPr>
+              <a:t>€ 550</a:t>
+            </a:r>
+            <a:endParaRPr lang="en-US" sz="1250" dirty="0"/>
+          </a:p>
+        </p:txBody>
+      </p:sp>
+      <p:sp>
+        <p:nvSpPr>
+          <p:cNvPr id="18" name="Text 16"/>
+          <p:cNvSpPr txBox="1"/>
+          <p:nvPr/>
+        </p:nvSpPr>
+        <p:spPr>
+          <a:xfrm>
+            <a:off x="6324584" y="3765541"/>
+            <a:ext cx="2349494" cy="628648"/>
+          </a:xfrm>
+          <a:prstGeom prst="rect">
+            <a:avLst/>
+          </a:prstGeom>
+          <a:noFill/>
+          <a:ln/>
+        </p:spPr>
+        <p:txBody>
+          <a:bodyPr wrap="square" lIns="0" tIns="0" rIns="0" bIns="0" rtlCol="0" anchor="ctr"/>
+          <a:lstStyle/>
+          <a:p>
+            <a:pPr indent="0" marL="0">
+              <a:buNone/>
+            </a:pPr>
+            <a:r>
+              <a:rPr lang="en-US" sz="1250" b="1" dirty="0">
+                <a:solidFill>
+                  <a:srgbClr val="F2EFE6"/>
+                </a:solidFill>
+                <a:latin typeface="Arial" pitchFamily="34" charset="0"/>
+                <a:ea typeface="Arial" pitchFamily="34" charset="-122"/>
+                <a:cs typeface="Arial" pitchFamily="34" charset="-120"/>
+              </a:rPr>
+              <a:t>€ 2.750 tot € 3.850</a:t>
+            </a:r>
+            <a:endParaRPr lang="en-US" sz="1250" dirty="0"/>
+          </a:p>
+        </p:txBody>
+      </p:sp>
+      <p:sp>
+        <p:nvSpPr>
+          <p:cNvPr id="19" name="Shape 17"/>
+          <p:cNvSpPr/>
+          <p:nvPr/>
+        </p:nvSpPr>
+        <p:spPr>
+          <a:xfrm>
+            <a:off x="615948" y="4394189"/>
+            <a:ext cx="10960073" cy="628648"/>
+          </a:xfrm>
+          <a:prstGeom prst="rect">
+            <a:avLst/>
+          </a:prstGeom>
           <a:solidFill>
-            <a:srgbClr val="F8F4EB"/>
+            <a:srgbClr val="38B6FF">
+              <a:alpha val="11000"/>
+            </a:srgbClr>
           </a:solidFill>
           <a:ln/>
         </p:spPr>
       </p:sp>
       <p:sp>
         <p:nvSpPr>
-          <p:cNvPr id="8" name="Shape 6"/>
+          <p:cNvPr id="20" name="Shape 18"/>
           <p:cNvSpPr/>
           <p:nvPr/>
         </p:nvSpPr>
         <p:spPr>
           <a:xfrm>
-            <a:off x="939798" y="3098792"/>
-            <a:ext cx="380999" cy="380999"/>
-          </a:xfrm>
-          <a:prstGeom prst="roundRect">
-            <a:avLst>
-              <a:gd name="adj" fmla="val 23333"/>
-            </a:avLst>
+            <a:off x="609598" y="4394189"/>
+            <a:ext cx="10972773" cy="0"/>
+          </a:xfrm>
+          <a:prstGeom prst="line">
+            <a:avLst/>
+          </a:prstGeom>
+          <a:noFill/>
+          <a:ln w="9525">
+            <a:solidFill>
+              <a:srgbClr val="3A4152"/>
+            </a:solidFill>
+            <a:prstDash val="solid"/>
+          </a:ln>
+        </p:spPr>
+      </p:sp>
+      <p:sp>
+        <p:nvSpPr>
+          <p:cNvPr id="21" name="Text 19"/>
+          <p:cNvSpPr txBox="1"/>
+          <p:nvPr/>
+        </p:nvSpPr>
+        <p:spPr>
+          <a:xfrm>
+            <a:off x="888998" y="4394189"/>
+            <a:ext cx="2920993" cy="628648"/>
+          </a:xfrm>
+          <a:prstGeom prst="rect">
+            <a:avLst/>
+          </a:prstGeom>
+          <a:noFill/>
+          <a:ln/>
+        </p:spPr>
+        <p:txBody>
+          <a:bodyPr wrap="square" lIns="0" tIns="0" rIns="0" bIns="0" rtlCol="0" anchor="ctr"/>
+          <a:lstStyle/>
+          <a:p>
+            <a:pPr indent="0" marL="0">
+              <a:buNone/>
+            </a:pPr>
+            <a:r>
+              <a:rPr lang="en-US" sz="1250" b="1" dirty="0">
+                <a:solidFill>
+                  <a:srgbClr val="F2EFE6"/>
+                </a:solidFill>
+                <a:latin typeface="Arial" pitchFamily="34" charset="0"/>
+                <a:ea typeface="Arial" pitchFamily="34" charset="-122"/>
+                <a:cs typeface="Arial" pitchFamily="34" charset="-120"/>
+              </a:rPr>
+              <a:t>8 beldagen of meer</a:t>
+            </a:r>
+            <a:endParaRPr lang="en-US" sz="1250" dirty="0"/>
+          </a:p>
+        </p:txBody>
+      </p:sp>
+      <p:sp>
+        <p:nvSpPr>
+          <p:cNvPr id="22" name="Text 20"/>
+          <p:cNvSpPr txBox="1"/>
+          <p:nvPr/>
+        </p:nvSpPr>
+        <p:spPr>
+          <a:xfrm>
+            <a:off x="3886190" y="4394189"/>
+            <a:ext cx="2349494" cy="628648"/>
+          </a:xfrm>
+          <a:prstGeom prst="rect">
+            <a:avLst/>
+          </a:prstGeom>
+          <a:noFill/>
+          <a:ln/>
+        </p:spPr>
+        <p:txBody>
+          <a:bodyPr wrap="square" lIns="0" tIns="0" rIns="0" bIns="0" rtlCol="0" anchor="ctr"/>
+          <a:lstStyle/>
+          <a:p>
+            <a:pPr indent="0" marL="0">
+              <a:buNone/>
+            </a:pPr>
+            <a:r>
+              <a:rPr lang="en-US" sz="1250" b="1" dirty="0">
+                <a:solidFill>
+                  <a:srgbClr val="F2EFE6"/>
+                </a:solidFill>
+                <a:latin typeface="Arial" pitchFamily="34" charset="0"/>
+                <a:ea typeface="Arial" pitchFamily="34" charset="-122"/>
+                <a:cs typeface="Arial" pitchFamily="34" charset="-120"/>
+              </a:rPr>
+              <a:t>€ 500</a:t>
+            </a:r>
+            <a:endParaRPr lang="en-US" sz="1250" dirty="0"/>
+          </a:p>
+        </p:txBody>
+      </p:sp>
+      <p:sp>
+        <p:nvSpPr>
+          <p:cNvPr id="23" name="Text 21"/>
+          <p:cNvSpPr txBox="1"/>
+          <p:nvPr/>
+        </p:nvSpPr>
+        <p:spPr>
+          <a:xfrm>
+            <a:off x="6324584" y="4394189"/>
+            <a:ext cx="2349494" cy="628648"/>
+          </a:xfrm>
+          <a:prstGeom prst="rect">
+            <a:avLst/>
+          </a:prstGeom>
+          <a:noFill/>
+          <a:ln/>
+        </p:spPr>
+        <p:txBody>
+          <a:bodyPr wrap="square" lIns="0" tIns="0" rIns="0" bIns="0" rtlCol="0" anchor="ctr"/>
+          <a:lstStyle/>
+          <a:p>
+            <a:pPr indent="0" marL="0">
+              <a:buNone/>
+            </a:pPr>
+            <a:r>
+              <a:rPr lang="en-US" sz="1250" b="1" dirty="0">
+                <a:solidFill>
+                  <a:srgbClr val="F2EFE6"/>
+                </a:solidFill>
+                <a:latin typeface="Arial" pitchFamily="34" charset="0"/>
+                <a:ea typeface="Arial" pitchFamily="34" charset="-122"/>
+                <a:cs typeface="Arial" pitchFamily="34" charset="-120"/>
+              </a:rPr>
+              <a:t>vanaf € 4.000</a:t>
+            </a:r>
+            <a:endParaRPr lang="en-US" sz="1250" dirty="0"/>
+          </a:p>
+        </p:txBody>
+      </p:sp>
+      <p:sp>
+        <p:nvSpPr>
+          <p:cNvPr id="24" name="Shape 22"/>
+          <p:cNvSpPr/>
+          <p:nvPr/>
+        </p:nvSpPr>
+        <p:spPr>
+          <a:xfrm>
+            <a:off x="609598" y="5854685"/>
+            <a:ext cx="76200" cy="76200"/>
+          </a:xfrm>
+          <a:prstGeom prst="ellipse">
+            <a:avLst/>
           </a:prstGeom>
           <a:solidFill>
-            <a:srgbClr val="DDEBF3"/>
+            <a:srgbClr val="38B6FF"/>
           </a:solidFill>
           <a:ln/>
         </p:spPr>
       </p:sp>
-      <p:pic>
-        <p:nvPicPr>
-          <p:cNvPr id="9" name="Image 0" descr="preencoded.png">    </p:cNvPr>
-          <p:cNvPicPr>
-            <a:picLocks noChangeAspect="1"/>
-          </p:cNvPicPr>
-          <p:nvPr/>
-        </p:nvPicPr>
-        <p:blipFill>
-          <a:blip r:embed="rId1"/>
-          <a:stretch>
-            <a:fillRect/>
-          </a:stretch>
-        </p:blipFill>
-        <p:spPr>
-          <a:xfrm>
-            <a:off x="1035047" y="3194042"/>
-            <a:ext cx="190500" cy="190500"/>
-          </a:xfrm>
-          <a:prstGeom prst="rect">
-            <a:avLst/>
-          </a:prstGeom>
-        </p:spPr>
-      </p:pic>
-      <p:sp>
-        <p:nvSpPr>
-          <p:cNvPr id="10" name="Text 7"/>
-          <p:cNvSpPr txBox="1"/>
-          <p:nvPr/>
-        </p:nvSpPr>
-        <p:spPr>
-          <a:xfrm>
-            <a:off x="1549396" y="3073392"/>
-            <a:ext cx="4127490" cy="279399"/>
+      <p:sp>
+        <p:nvSpPr>
+          <p:cNvPr id="25" name="Text 23"/>
+          <p:cNvSpPr txBox="1"/>
+          <p:nvPr/>
+        </p:nvSpPr>
+        <p:spPr>
+          <a:xfrm>
+            <a:off x="800098" y="5651486"/>
+            <a:ext cx="9905975" cy="482599"/>
           </a:xfrm>
           <a:prstGeom prst="rect">
             <a:avLst/>
@@ -9924,506 +12567,17 @@
               <a:buNone/>
             </a:pPr>
             <a:r>
-              <a:rPr lang="en-US" sz="1450" b="1" dirty="0">
-                <a:solidFill>
-                  <a:srgbClr val="1C2230"/>
-                </a:solidFill>
-                <a:latin typeface="Arial" pitchFamily="34" charset="0"/>
-                <a:ea typeface="Arial" pitchFamily="34" charset="-122"/>
-                <a:cs typeface="Arial" pitchFamily="34" charset="-120"/>
-              </a:rPr>
-              <a:t>Kick-off per klant</a:t>
-            </a:r>
-            <a:endParaRPr lang="en-US" sz="1450" dirty="0"/>
-          </a:p>
-        </p:txBody>
-      </p:sp>
-      <p:sp>
-        <p:nvSpPr>
-          <p:cNvPr id="11" name="Text 8"/>
-          <p:cNvSpPr txBox="1"/>
-          <p:nvPr/>
-        </p:nvSpPr>
-        <p:spPr>
-          <a:xfrm>
-            <a:off x="1549396" y="3403591"/>
-            <a:ext cx="4063990" cy="698498"/>
-          </a:xfrm>
-          <a:prstGeom prst="rect">
-            <a:avLst/>
-          </a:prstGeom>
-          <a:noFill/>
-          <a:ln/>
-        </p:spPr>
-        <p:txBody>
-          <a:bodyPr wrap="square" lIns="0" tIns="0" rIns="0" bIns="0" rtlCol="0" anchor="t"/>
-          <a:lstStyle/>
-          <a:p>
-            <a:pPr indent="0" marL="0">
-              <a:lnSpc>
-                <a:spcPct val="135000"/>
-              </a:lnSpc>
-              <a:buNone/>
-            </a:pPr>
-            <a:r>
-              <a:rPr lang="en-US" sz="1050" dirty="0">
-                <a:solidFill>
-                  <a:srgbClr val="6F6A5C"/>
-                </a:solidFill>
-                <a:latin typeface="Arial" pitchFamily="34" charset="0"/>
-                <a:ea typeface="Arial" pitchFamily="34" charset="-122"/>
-                <a:cs typeface="Arial" pitchFamily="34" charset="-120"/>
-              </a:rPr>
-              <a:t>Anderhalf tot twee uur met de klant en degene die de afspraken gaat voeren. Kees of een collega sluit aan.</a:t>
-            </a:r>
-            <a:endParaRPr lang="en-US" sz="1050" dirty="0"/>
-          </a:p>
-        </p:txBody>
-      </p:sp>
-      <p:sp>
-        <p:nvSpPr>
-          <p:cNvPr id="12" name="Shape 9"/>
-          <p:cNvSpPr/>
-          <p:nvPr/>
-        </p:nvSpPr>
-        <p:spPr>
-          <a:xfrm>
-            <a:off x="6184885" y="2793993"/>
-            <a:ext cx="5397487" cy="1530346"/>
-          </a:xfrm>
-          <a:prstGeom prst="roundRect">
-            <a:avLst>
-              <a:gd name="adj" fmla="val 6639"/>
-            </a:avLst>
-          </a:prstGeom>
-          <a:solidFill>
-            <a:srgbClr val="F8F4EB"/>
-          </a:solidFill>
-          <a:ln/>
-        </p:spPr>
-      </p:sp>
-      <p:sp>
-        <p:nvSpPr>
-          <p:cNvPr id="13" name="Shape 10"/>
-          <p:cNvSpPr/>
-          <p:nvPr/>
-        </p:nvSpPr>
-        <p:spPr>
-          <a:xfrm>
-            <a:off x="6515084" y="3098792"/>
-            <a:ext cx="380999" cy="380999"/>
-          </a:xfrm>
-          <a:prstGeom prst="roundRect">
-            <a:avLst>
-              <a:gd name="adj" fmla="val 23333"/>
-            </a:avLst>
-          </a:prstGeom>
-          <a:solidFill>
-            <a:srgbClr val="DDEBF3"/>
-          </a:solidFill>
-          <a:ln/>
-        </p:spPr>
-      </p:sp>
-      <p:pic>
-        <p:nvPicPr>
-          <p:cNvPr id="14" name="Image 1" descr="preencoded.png">    </p:cNvPr>
-          <p:cNvPicPr>
-            <a:picLocks noChangeAspect="1"/>
-          </p:cNvPicPr>
-          <p:nvPr/>
-        </p:nvPicPr>
-        <p:blipFill>
-          <a:blip r:embed="rId2"/>
-          <a:stretch>
-            <a:fillRect/>
-          </a:stretch>
-        </p:blipFill>
-        <p:spPr>
-          <a:xfrm>
-            <a:off x="6610333" y="3194042"/>
-            <a:ext cx="190500" cy="190500"/>
-          </a:xfrm>
-          <a:prstGeom prst="rect">
-            <a:avLst/>
-          </a:prstGeom>
-        </p:spPr>
-      </p:pic>
-      <p:sp>
-        <p:nvSpPr>
-          <p:cNvPr id="15" name="Text 11"/>
-          <p:cNvSpPr txBox="1"/>
-          <p:nvPr/>
-        </p:nvSpPr>
-        <p:spPr>
-          <a:xfrm>
-            <a:off x="7124682" y="3073392"/>
-            <a:ext cx="4127490" cy="279399"/>
-          </a:xfrm>
-          <a:prstGeom prst="rect">
-            <a:avLst/>
-          </a:prstGeom>
-          <a:noFill/>
-          <a:ln/>
-        </p:spPr>
-        <p:txBody>
-          <a:bodyPr wrap="square" lIns="0" tIns="0" rIns="0" bIns="0" rtlCol="0" anchor="ctr"/>
-          <a:lstStyle/>
-          <a:p>
-            <a:pPr indent="0" marL="0">
-              <a:buNone/>
-            </a:pPr>
-            <a:r>
-              <a:rPr lang="en-US" sz="1450" b="1" dirty="0">
-                <a:solidFill>
-                  <a:srgbClr val="1C2230"/>
-                </a:solidFill>
-                <a:latin typeface="Arial" pitchFamily="34" charset="0"/>
-                <a:ea typeface="Arial" pitchFamily="34" charset="-122"/>
-                <a:cs typeface="Arial" pitchFamily="34" charset="-120"/>
-              </a:rPr>
-              <a:t>Leads met context</a:t>
-            </a:r>
-            <a:endParaRPr lang="en-US" sz="1450" dirty="0"/>
-          </a:p>
-        </p:txBody>
-      </p:sp>
-      <p:sp>
-        <p:nvSpPr>
-          <p:cNvPr id="16" name="Text 12"/>
-          <p:cNvSpPr txBox="1"/>
-          <p:nvPr/>
-        </p:nvSpPr>
-        <p:spPr>
-          <a:xfrm>
-            <a:off x="7124682" y="3403591"/>
-            <a:ext cx="4063990" cy="698498"/>
-          </a:xfrm>
-          <a:prstGeom prst="rect">
-            <a:avLst/>
-          </a:prstGeom>
-          <a:noFill/>
-          <a:ln/>
-        </p:spPr>
-        <p:txBody>
-          <a:bodyPr wrap="square" lIns="0" tIns="0" rIns="0" bIns="0" rtlCol="0" anchor="t"/>
-          <a:lstStyle/>
-          <a:p>
-            <a:pPr indent="0" marL="0">
-              <a:lnSpc>
-                <a:spcPct val="135000"/>
-              </a:lnSpc>
-              <a:buNone/>
-            </a:pPr>
-            <a:r>
-              <a:rPr lang="en-US" sz="1050" dirty="0">
-                <a:solidFill>
-                  <a:srgbClr val="6F6A5C"/>
-                </a:solidFill>
-                <a:latin typeface="Arial" pitchFamily="34" charset="0"/>
-                <a:ea typeface="Arial" pitchFamily="34" charset="-122"/>
-                <a:cs typeface="Arial" pitchFamily="34" charset="-120"/>
-              </a:rPr>
-              <a:t>De lead plus wat jullie erover weten: het bedrijf, de campagne en waar de interesse vandaan komt. In welk formaat dan ook, wij sluiten aan.</a:t>
-            </a:r>
-            <a:endParaRPr lang="en-US" sz="1050" dirty="0"/>
-          </a:p>
-        </p:txBody>
-      </p:sp>
-      <p:sp>
-        <p:nvSpPr>
-          <p:cNvPr id="17" name="Shape 13"/>
-          <p:cNvSpPr/>
-          <p:nvPr/>
-        </p:nvSpPr>
-        <p:spPr>
-          <a:xfrm>
-            <a:off x="609598" y="4502139"/>
-            <a:ext cx="5397487" cy="1530346"/>
-          </a:xfrm>
-          <a:prstGeom prst="roundRect">
-            <a:avLst>
-              <a:gd name="adj" fmla="val 6639"/>
-            </a:avLst>
-          </a:prstGeom>
-          <a:solidFill>
-            <a:srgbClr val="F8F4EB"/>
-          </a:solidFill>
-          <a:ln/>
-        </p:spPr>
-      </p:sp>
-      <p:sp>
-        <p:nvSpPr>
-          <p:cNvPr id="18" name="Shape 14"/>
-          <p:cNvSpPr/>
-          <p:nvPr/>
-        </p:nvSpPr>
-        <p:spPr>
-          <a:xfrm>
-            <a:off x="939798" y="4806938"/>
-            <a:ext cx="380999" cy="380999"/>
-          </a:xfrm>
-          <a:prstGeom prst="roundRect">
-            <a:avLst>
-              <a:gd name="adj" fmla="val 23333"/>
-            </a:avLst>
-          </a:prstGeom>
-          <a:solidFill>
-            <a:srgbClr val="DDEBF3"/>
-          </a:solidFill>
-          <a:ln/>
-        </p:spPr>
-      </p:sp>
-      <p:pic>
-        <p:nvPicPr>
-          <p:cNvPr id="19" name="Image 2" descr="preencoded.png">    </p:cNvPr>
-          <p:cNvPicPr>
-            <a:picLocks noChangeAspect="1"/>
-          </p:cNvPicPr>
-          <p:nvPr/>
-        </p:nvPicPr>
-        <p:blipFill>
-          <a:blip r:embed="rId3"/>
-          <a:stretch>
-            <a:fillRect/>
-          </a:stretch>
-        </p:blipFill>
-        <p:spPr>
-          <a:xfrm>
-            <a:off x="1035047" y="4902188"/>
-            <a:ext cx="190500" cy="190500"/>
-          </a:xfrm>
-          <a:prstGeom prst="rect">
-            <a:avLst/>
-          </a:prstGeom>
-        </p:spPr>
-      </p:pic>
-      <p:sp>
-        <p:nvSpPr>
-          <p:cNvPr id="20" name="Text 15"/>
-          <p:cNvSpPr txBox="1"/>
-          <p:nvPr/>
-        </p:nvSpPr>
-        <p:spPr>
-          <a:xfrm>
-            <a:off x="1549396" y="4781538"/>
-            <a:ext cx="4127490" cy="279399"/>
-          </a:xfrm>
-          <a:prstGeom prst="rect">
-            <a:avLst/>
-          </a:prstGeom>
-          <a:noFill/>
-          <a:ln/>
-        </p:spPr>
-        <p:txBody>
-          <a:bodyPr wrap="square" lIns="0" tIns="0" rIns="0" bIns="0" rtlCol="0" anchor="ctr"/>
-          <a:lstStyle/>
-          <a:p>
-            <a:pPr indent="0" marL="0">
-              <a:buNone/>
-            </a:pPr>
-            <a:r>
-              <a:rPr lang="en-US" sz="1450" b="1" dirty="0">
-                <a:solidFill>
-                  <a:srgbClr val="1C2230"/>
-                </a:solidFill>
-                <a:latin typeface="Arial" pitchFamily="34" charset="0"/>
-                <a:ea typeface="Arial" pitchFamily="34" charset="-122"/>
-                <a:cs typeface="Arial" pitchFamily="34" charset="-120"/>
-              </a:rPr>
-              <a:t>Uitsluitlijst</a:t>
-            </a:r>
-            <a:endParaRPr lang="en-US" sz="1450" dirty="0"/>
-          </a:p>
-        </p:txBody>
-      </p:sp>
-      <p:sp>
-        <p:nvSpPr>
-          <p:cNvPr id="21" name="Text 16"/>
-          <p:cNvSpPr txBox="1"/>
-          <p:nvPr/>
-        </p:nvSpPr>
-        <p:spPr>
-          <a:xfrm>
-            <a:off x="1549396" y="5111737"/>
-            <a:ext cx="4063990" cy="698498"/>
-          </a:xfrm>
-          <a:prstGeom prst="rect">
-            <a:avLst/>
-          </a:prstGeom>
-          <a:noFill/>
-          <a:ln/>
-        </p:spPr>
-        <p:txBody>
-          <a:bodyPr wrap="square" lIns="0" tIns="0" rIns="0" bIns="0" rtlCol="0" anchor="t"/>
-          <a:lstStyle/>
-          <a:p>
-            <a:pPr indent="0" marL="0">
-              <a:lnSpc>
-                <a:spcPct val="135000"/>
-              </a:lnSpc>
-              <a:buNone/>
-            </a:pPr>
-            <a:r>
-              <a:rPr lang="en-US" sz="1050" dirty="0">
-                <a:solidFill>
-                  <a:srgbClr val="6F6A5C"/>
-                </a:solidFill>
-                <a:latin typeface="Arial" pitchFamily="34" charset="0"/>
-                <a:ea typeface="Arial" pitchFamily="34" charset="-122"/>
-                <a:cs typeface="Arial" pitchFamily="34" charset="-120"/>
-              </a:rPr>
-              <a:t>Bestaande klanten, lopende gesprekken en bedrijven die we niet mogen benaderen.</a:t>
-            </a:r>
-            <a:endParaRPr lang="en-US" sz="1050" dirty="0"/>
-          </a:p>
-        </p:txBody>
-      </p:sp>
-      <p:sp>
-        <p:nvSpPr>
-          <p:cNvPr id="22" name="Shape 17"/>
-          <p:cNvSpPr/>
-          <p:nvPr/>
-        </p:nvSpPr>
-        <p:spPr>
-          <a:xfrm>
-            <a:off x="6184885" y="4502139"/>
-            <a:ext cx="5397487" cy="1530346"/>
-          </a:xfrm>
-          <a:prstGeom prst="roundRect">
-            <a:avLst>
-              <a:gd name="adj" fmla="val 6639"/>
-            </a:avLst>
-          </a:prstGeom>
-          <a:solidFill>
-            <a:srgbClr val="F8F4EB"/>
-          </a:solidFill>
-          <a:ln/>
-        </p:spPr>
-      </p:sp>
-      <p:sp>
-        <p:nvSpPr>
-          <p:cNvPr id="23" name="Shape 18"/>
-          <p:cNvSpPr/>
-          <p:nvPr/>
-        </p:nvSpPr>
-        <p:spPr>
-          <a:xfrm>
-            <a:off x="6515084" y="4806938"/>
-            <a:ext cx="380999" cy="380999"/>
-          </a:xfrm>
-          <a:prstGeom prst="roundRect">
-            <a:avLst>
-              <a:gd name="adj" fmla="val 23333"/>
-            </a:avLst>
-          </a:prstGeom>
-          <a:solidFill>
-            <a:srgbClr val="DDEBF3"/>
-          </a:solidFill>
-          <a:ln/>
-        </p:spPr>
-      </p:sp>
-      <p:pic>
-        <p:nvPicPr>
-          <p:cNvPr id="24" name="Image 3" descr="preencoded.png">    </p:cNvPr>
-          <p:cNvPicPr>
-            <a:picLocks noChangeAspect="1"/>
-          </p:cNvPicPr>
-          <p:nvPr/>
-        </p:nvPicPr>
-        <p:blipFill>
-          <a:blip r:embed="rId4"/>
-          <a:stretch>
-            <a:fillRect/>
-          </a:stretch>
-        </p:blipFill>
-        <p:spPr>
-          <a:xfrm>
-            <a:off x="6610333" y="4902188"/>
-            <a:ext cx="190500" cy="190500"/>
-          </a:xfrm>
-          <a:prstGeom prst="rect">
-            <a:avLst/>
-          </a:prstGeom>
-        </p:spPr>
-      </p:pic>
-      <p:sp>
-        <p:nvSpPr>
-          <p:cNvPr id="25" name="Text 19"/>
-          <p:cNvSpPr txBox="1"/>
-          <p:nvPr/>
-        </p:nvSpPr>
-        <p:spPr>
-          <a:xfrm>
-            <a:off x="7124682" y="4781538"/>
-            <a:ext cx="4127490" cy="279399"/>
-          </a:xfrm>
-          <a:prstGeom prst="rect">
-            <a:avLst/>
-          </a:prstGeom>
-          <a:noFill/>
-          <a:ln/>
-        </p:spPr>
-        <p:txBody>
-          <a:bodyPr wrap="square" lIns="0" tIns="0" rIns="0" bIns="0" rtlCol="0" anchor="ctr"/>
-          <a:lstStyle/>
-          <a:p>
-            <a:pPr indent="0" marL="0">
-              <a:buNone/>
-            </a:pPr>
-            <a:r>
-              <a:rPr lang="en-US" sz="1450" b="1" dirty="0">
-                <a:solidFill>
-                  <a:srgbClr val="1C2230"/>
-                </a:solidFill>
-                <a:latin typeface="Arial" pitchFamily="34" charset="0"/>
-                <a:ea typeface="Arial" pitchFamily="34" charset="-122"/>
-                <a:cs typeface="Arial" pitchFamily="34" charset="-120"/>
-              </a:rPr>
-              <a:t>Eén aanspreekpunt</a:t>
-            </a:r>
-            <a:endParaRPr lang="en-US" sz="1450" dirty="0"/>
-          </a:p>
-        </p:txBody>
-      </p:sp>
-      <p:sp>
-        <p:nvSpPr>
-          <p:cNvPr id="26" name="Text 20"/>
-          <p:cNvSpPr txBox="1"/>
-          <p:nvPr/>
-        </p:nvSpPr>
-        <p:spPr>
-          <a:xfrm>
-            <a:off x="7124682" y="5111737"/>
-            <a:ext cx="4063990" cy="698498"/>
-          </a:xfrm>
-          <a:prstGeom prst="rect">
-            <a:avLst/>
-          </a:prstGeom>
-          <a:noFill/>
-          <a:ln/>
-        </p:spPr>
-        <p:txBody>
-          <a:bodyPr wrap="square" lIns="0" tIns="0" rIns="0" bIns="0" rtlCol="0" anchor="t"/>
-          <a:lstStyle/>
-          <a:p>
-            <a:pPr indent="0" marL="0">
-              <a:lnSpc>
-                <a:spcPct val="135000"/>
-              </a:lnSpc>
-              <a:buNone/>
-            </a:pPr>
-            <a:r>
-              <a:rPr lang="en-US" sz="1050" dirty="0">
-                <a:solidFill>
-                  <a:srgbClr val="6F6A5C"/>
-                </a:solidFill>
-                <a:latin typeface="Arial" pitchFamily="34" charset="0"/>
-                <a:ea typeface="Arial" pitchFamily="34" charset="-122"/>
-                <a:cs typeface="Arial" pitchFamily="34" charset="-120"/>
-              </a:rPr>
-              <a:t>Eén vaste persoon bij CentreBlock voor de afstemming, en per klant iemand die de afspraken voert.</a:t>
-            </a:r>
-            <a:endParaRPr lang="en-US" sz="1050" dirty="0"/>
+              <a:rPr lang="en-US" sz="1200" b="1" dirty="0">
+                <a:solidFill>
+                  <a:srgbClr val="F2EFE6"/>
+                </a:solidFill>
+                <a:latin typeface="Arial" pitchFamily="34" charset="0"/>
+                <a:ea typeface="Arial" pitchFamily="34" charset="-122"/>
+                <a:cs typeface="Arial" pitchFamily="34" charset="-120"/>
+              </a:rPr>
+              <a:t>Minimaal twee beldagen per periode van vier weken, speciaal voor het partnership. Normaal ligt onze ondergrens op vier. Vooraf gefactureerd, prijzen excl. btw, de staffel telt per klant.</a:t>
+            </a:r>
+            <a:endParaRPr lang="en-US" sz="1200" dirty="0"/>
           </a:p>
         </p:txBody>
       </p:sp>
@@ -10584,7 +12738,7 @@
                 <a:ea typeface="Arial" pitchFamily="34" charset="-122"/>
                 <a:cs typeface="Arial" pitchFamily="34" charset="-120"/>
               </a:rPr>
-              <a:t>9 / 10</a:t>
+              <a:t>9 / 11</a:t>
             </a:r>
             <a:endParaRPr lang="en-US" sz="750" dirty="0"/>
           </a:p>
@@ -10623,7 +12777,7 @@
                 <a:ea typeface="Arial" pitchFamily="34" charset="-122"/>
                 <a:cs typeface="Arial" pitchFamily="34" charset="-120"/>
               </a:rPr>
-              <a:t>SPELREGELS</a:t>
+              <a:t>WAT WE VAN CENTREBLOCK NODIG HEBBEN</a:t>
             </a:r>
             <a:endParaRPr lang="en-US" sz="950" dirty="0"/>
           </a:p>
@@ -10665,7 +12819,7 @@
                 <a:ea typeface="Arial" pitchFamily="34" charset="-122"/>
                 <a:cs typeface="Arial" pitchFamily="34" charset="-120"/>
               </a:rPr>
-              <a:t>Transparant en zonder </a:t>
+              <a:t>Leads met context, dan </a:t>
             </a:r>
             <a:pPr algn="l" indent="0" marL="0">
               <a:lnSpc>
@@ -10682,7 +12836,7 @@
                 <a:ea typeface="Georgia" pitchFamily="34" charset="-122"/>
                 <a:cs typeface="Georgia" pitchFamily="34" charset="-120"/>
               </a:rPr>
-              <a:t>kleine lettertjes</a:t>
+              <a:t>draaien wij</a:t>
             </a:r>
             <a:pPr algn="l" indent="0" marL="0">
               <a:lnSpc>
@@ -10713,12 +12867,34 @@
         </p:nvSpPr>
         <p:spPr>
           <a:xfrm>
-            <a:off x="609598" y="2819393"/>
-            <a:ext cx="253999" cy="253999"/>
+            <a:off x="609598" y="2793993"/>
+            <a:ext cx="5397487" cy="1530346"/>
           </a:xfrm>
           <a:prstGeom prst="roundRect">
             <a:avLst>
-              <a:gd name="adj" fmla="val 25000"/>
+              <a:gd name="adj" fmla="val 6639"/>
+            </a:avLst>
+          </a:prstGeom>
+          <a:solidFill>
+            <a:srgbClr val="F8F4EB"/>
+          </a:solidFill>
+          <a:ln/>
+        </p:spPr>
+      </p:sp>
+      <p:sp>
+        <p:nvSpPr>
+          <p:cNvPr id="8" name="Shape 6"/>
+          <p:cNvSpPr/>
+          <p:nvPr/>
+        </p:nvSpPr>
+        <p:spPr>
+          <a:xfrm>
+            <a:off x="939798" y="3098792"/>
+            <a:ext cx="380999" cy="380999"/>
+          </a:xfrm>
+          <a:prstGeom prst="roundRect">
+            <a:avLst>
+              <a:gd name="adj" fmla="val 23333"/>
             </a:avLst>
           </a:prstGeom>
           <a:solidFill>
@@ -10729,7 +12905,7 @@
       </p:sp>
       <p:pic>
         <p:nvPicPr>
-          <p:cNvPr id="8" name="Image 0" descr="preencoded.png">    </p:cNvPr>
+          <p:cNvPr id="9" name="Image 0" descr="preencoded.png">    </p:cNvPr>
           <p:cNvPicPr>
             <a:picLocks noChangeAspect="1"/>
           </p:cNvPicPr>
@@ -10743,8 +12919,8 @@
         </p:blipFill>
         <p:spPr>
           <a:xfrm>
-            <a:off x="666748" y="2876543"/>
-            <a:ext cx="139700" cy="139700"/>
+            <a:off x="1035047" y="3194042"/>
+            <a:ext cx="190500" cy="190500"/>
           </a:xfrm>
           <a:prstGeom prst="rect">
             <a:avLst/>
@@ -10753,14 +12929,14 @@
       </p:pic>
       <p:sp>
         <p:nvSpPr>
-          <p:cNvPr id="9" name="Text 6"/>
-          <p:cNvSpPr txBox="1"/>
-          <p:nvPr/>
-        </p:nvSpPr>
-        <p:spPr>
-          <a:xfrm>
-            <a:off x="1015997" y="2793993"/>
-            <a:ext cx="4825988" cy="228599"/>
+          <p:cNvPr id="10" name="Text 7"/>
+          <p:cNvSpPr txBox="1"/>
+          <p:nvPr/>
+        </p:nvSpPr>
+        <p:spPr>
+          <a:xfrm>
+            <a:off x="1549396" y="3073392"/>
+            <a:ext cx="4127490" cy="279399"/>
           </a:xfrm>
           <a:prstGeom prst="rect">
             <a:avLst/>
@@ -10776,7 +12952,7 @@
               <a:buNone/>
             </a:pPr>
             <a:r>
-              <a:rPr lang="en-US" sz="1200" b="1" dirty="0">
+              <a:rPr lang="en-US" sz="1450" b="1" dirty="0">
                 <a:solidFill>
                   <a:srgbClr val="1C2230"/>
                 </a:solidFill>
@@ -10784,22 +12960,22 @@
                 <a:ea typeface="Arial" pitchFamily="34" charset="-122"/>
                 <a:cs typeface="Arial" pitchFamily="34" charset="-120"/>
               </a:rPr>
-              <a:t>Geen pilot vooraf</a:t>
-            </a:r>
-            <a:endParaRPr lang="en-US" sz="1200" dirty="0"/>
-          </a:p>
-        </p:txBody>
-      </p:sp>
-      <p:sp>
-        <p:nvSpPr>
-          <p:cNvPr id="10" name="Text 7"/>
-          <p:cNvSpPr txBox="1"/>
-          <p:nvPr/>
-        </p:nvSpPr>
-        <p:spPr>
-          <a:xfrm>
-            <a:off x="1015997" y="3035292"/>
-            <a:ext cx="4825988" cy="355599"/>
+              <a:t>Kick-off per klant</a:t>
+            </a:r>
+            <a:endParaRPr lang="en-US" sz="1450" dirty="0"/>
+          </a:p>
+        </p:txBody>
+      </p:sp>
+      <p:sp>
+        <p:nvSpPr>
+          <p:cNvPr id="11" name="Text 8"/>
+          <p:cNvSpPr txBox="1"/>
+          <p:nvPr/>
+        </p:nvSpPr>
+        <p:spPr>
+          <a:xfrm>
+            <a:off x="1549396" y="3403591"/>
+            <a:ext cx="4063990" cy="698498"/>
           </a:xfrm>
           <a:prstGeom prst="rect">
             <a:avLst/>
@@ -10813,12 +12989,12 @@
           <a:p>
             <a:pPr indent="0" marL="0">
               <a:lnSpc>
-                <a:spcPct val="130000"/>
+                <a:spcPct val="135000"/>
               </a:lnSpc>
               <a:buNone/>
             </a:pPr>
             <a:r>
-              <a:rPr lang="en-US" sz="950" dirty="0">
+              <a:rPr lang="en-US" sz="1050" dirty="0">
                 <a:solidFill>
                   <a:srgbClr val="6F6A5C"/>
                 </a:solidFill>
@@ -10826,26 +13002,48 @@
                 <a:ea typeface="Arial" pitchFamily="34" charset="-122"/>
                 <a:cs typeface="Arial" pitchFamily="34" charset="-120"/>
               </a:rPr>
-              <a:t>We starten direct met beldagen, tegen de opstartfee van € 695.</a:t>
-            </a:r>
-            <a:endParaRPr lang="en-US" sz="950" dirty="0"/>
-          </a:p>
-        </p:txBody>
-      </p:sp>
-      <p:sp>
-        <p:nvSpPr>
-          <p:cNvPr id="11" name="Shape 8"/>
+              <a:t>Anderhalf tot twee uur met de klant en degene die de afspraken gaat voeren. Kees of een collega sluit aan.</a:t>
+            </a:r>
+            <a:endParaRPr lang="en-US" sz="1050" dirty="0"/>
+          </a:p>
+        </p:txBody>
+      </p:sp>
+      <p:sp>
+        <p:nvSpPr>
+          <p:cNvPr id="12" name="Shape 9"/>
           <p:cNvSpPr/>
           <p:nvPr/>
         </p:nvSpPr>
         <p:spPr>
           <a:xfrm>
-            <a:off x="6349984" y="2819393"/>
-            <a:ext cx="253999" cy="253999"/>
+            <a:off x="6184885" y="2793993"/>
+            <a:ext cx="5397487" cy="1530346"/>
           </a:xfrm>
           <a:prstGeom prst="roundRect">
             <a:avLst>
-              <a:gd name="adj" fmla="val 25000"/>
+              <a:gd name="adj" fmla="val 6639"/>
+            </a:avLst>
+          </a:prstGeom>
+          <a:solidFill>
+            <a:srgbClr val="F8F4EB"/>
+          </a:solidFill>
+          <a:ln/>
+        </p:spPr>
+      </p:sp>
+      <p:sp>
+        <p:nvSpPr>
+          <p:cNvPr id="13" name="Shape 10"/>
+          <p:cNvSpPr/>
+          <p:nvPr/>
+        </p:nvSpPr>
+        <p:spPr>
+          <a:xfrm>
+            <a:off x="6515084" y="3098792"/>
+            <a:ext cx="380999" cy="380999"/>
+          </a:xfrm>
+          <a:prstGeom prst="roundRect">
+            <a:avLst>
+              <a:gd name="adj" fmla="val 23333"/>
             </a:avLst>
           </a:prstGeom>
           <a:solidFill>
@@ -10856,7 +13054,7 @@
       </p:sp>
       <p:pic>
         <p:nvPicPr>
-          <p:cNvPr id="12" name="Image 1" descr="preencoded.png">    </p:cNvPr>
+          <p:cNvPr id="14" name="Image 1" descr="preencoded.png">    </p:cNvPr>
           <p:cNvPicPr>
             <a:picLocks noChangeAspect="1"/>
           </p:cNvPicPr>
@@ -10870,8 +13068,8 @@
         </p:blipFill>
         <p:spPr>
           <a:xfrm>
-            <a:off x="6407134" y="2876543"/>
-            <a:ext cx="139700" cy="139700"/>
+            <a:off x="6610333" y="3194042"/>
+            <a:ext cx="190500" cy="190500"/>
           </a:xfrm>
           <a:prstGeom prst="rect">
             <a:avLst/>
@@ -10880,14 +13078,14 @@
       </p:pic>
       <p:sp>
         <p:nvSpPr>
-          <p:cNvPr id="13" name="Text 9"/>
-          <p:cNvSpPr txBox="1"/>
-          <p:nvPr/>
-        </p:nvSpPr>
-        <p:spPr>
-          <a:xfrm>
-            <a:off x="6756383" y="2793993"/>
-            <a:ext cx="4825988" cy="228599"/>
+          <p:cNvPr id="15" name="Text 11"/>
+          <p:cNvSpPr txBox="1"/>
+          <p:nvPr/>
+        </p:nvSpPr>
+        <p:spPr>
+          <a:xfrm>
+            <a:off x="7124682" y="3073392"/>
+            <a:ext cx="4127490" cy="279399"/>
           </a:xfrm>
           <a:prstGeom prst="rect">
             <a:avLst/>
@@ -10903,7 +13101,7 @@
               <a:buNone/>
             </a:pPr>
             <a:r>
-              <a:rPr lang="en-US" sz="1200" b="1" dirty="0">
+              <a:rPr lang="en-US" sz="1450" b="1" dirty="0">
                 <a:solidFill>
                   <a:srgbClr val="1C2230"/>
                 </a:solidFill>
@@ -10911,22 +13109,22 @@
                 <a:ea typeface="Arial" pitchFamily="34" charset="-122"/>
                 <a:cs typeface="Arial" pitchFamily="34" charset="-120"/>
               </a:rPr>
-              <a:t>Maand opzegtermijn</a:t>
-            </a:r>
-            <a:endParaRPr lang="en-US" sz="1200" dirty="0"/>
-          </a:p>
-        </p:txBody>
-      </p:sp>
-      <p:sp>
-        <p:nvSpPr>
-          <p:cNvPr id="14" name="Text 10"/>
-          <p:cNvSpPr txBox="1"/>
-          <p:nvPr/>
-        </p:nvSpPr>
-        <p:spPr>
-          <a:xfrm>
-            <a:off x="6756383" y="3035292"/>
-            <a:ext cx="4825988" cy="355599"/>
+              <a:t>Leads met context</a:t>
+            </a:r>
+            <a:endParaRPr lang="en-US" sz="1450" dirty="0"/>
+          </a:p>
+        </p:txBody>
+      </p:sp>
+      <p:sp>
+        <p:nvSpPr>
+          <p:cNvPr id="16" name="Text 12"/>
+          <p:cNvSpPr txBox="1"/>
+          <p:nvPr/>
+        </p:nvSpPr>
+        <p:spPr>
+          <a:xfrm>
+            <a:off x="7124682" y="3403591"/>
+            <a:ext cx="4063990" cy="698498"/>
           </a:xfrm>
           <a:prstGeom prst="rect">
             <a:avLst/>
@@ -10940,12 +13138,12 @@
           <a:p>
             <a:pPr indent="0" marL="0">
               <a:lnSpc>
-                <a:spcPct val="130000"/>
+                <a:spcPct val="135000"/>
               </a:lnSpc>
               <a:buNone/>
             </a:pPr>
             <a:r>
-              <a:rPr lang="en-US" sz="950" dirty="0">
+              <a:rPr lang="en-US" sz="1050" dirty="0">
                 <a:solidFill>
                   <a:srgbClr val="6F6A5C"/>
                 </a:solidFill>
@@ -10953,49 +13151,48 @@
                 <a:ea typeface="Arial" pitchFamily="34" charset="-122"/>
                 <a:cs typeface="Arial" pitchFamily="34" charset="-120"/>
               </a:rPr>
-              <a:t>Vastgelegd, met een maand opzegtermijn. Geen jaarcontract.</a:t>
-            </a:r>
-            <a:endParaRPr lang="en-US" sz="950" dirty="0"/>
-          </a:p>
-        </p:txBody>
-      </p:sp>
-      <p:sp>
-        <p:nvSpPr>
-          <p:cNvPr id="15" name="Shape 11"/>
+              <a:t>De lead plus wat jullie erover weten: het bedrijf, de campagne en waar de interesse vandaan komt. In welk formaat dan ook, wij sluiten aan.</a:t>
+            </a:r>
+            <a:endParaRPr lang="en-US" sz="1050" dirty="0"/>
+          </a:p>
+        </p:txBody>
+      </p:sp>
+      <p:sp>
+        <p:nvSpPr>
+          <p:cNvPr id="17" name="Shape 13"/>
           <p:cNvSpPr/>
           <p:nvPr/>
         </p:nvSpPr>
         <p:spPr>
           <a:xfrm>
-            <a:off x="609598" y="3428991"/>
-            <a:ext cx="5232387" cy="0"/>
-          </a:xfrm>
-          <a:prstGeom prst="line">
-            <a:avLst/>
-          </a:prstGeom>
-          <a:noFill/>
-          <a:ln w="6350">
-            <a:solidFill>
-              <a:srgbClr val="C9C2B2"/>
-            </a:solidFill>
-            <a:prstDash val="solid"/>
-          </a:ln>
-        </p:spPr>
-      </p:sp>
-      <p:sp>
-        <p:nvSpPr>
-          <p:cNvPr id="16" name="Shape 12"/>
-          <p:cNvSpPr/>
-          <p:nvPr/>
-        </p:nvSpPr>
-        <p:spPr>
-          <a:xfrm>
-            <a:off x="609598" y="3530591"/>
-            <a:ext cx="253999" cy="253999"/>
+            <a:off x="609598" y="4502139"/>
+            <a:ext cx="5397487" cy="1530346"/>
           </a:xfrm>
           <a:prstGeom prst="roundRect">
             <a:avLst>
-              <a:gd name="adj" fmla="val 25000"/>
+              <a:gd name="adj" fmla="val 6639"/>
+            </a:avLst>
+          </a:prstGeom>
+          <a:solidFill>
+            <a:srgbClr val="F8F4EB"/>
+          </a:solidFill>
+          <a:ln/>
+        </p:spPr>
+      </p:sp>
+      <p:sp>
+        <p:nvSpPr>
+          <p:cNvPr id="18" name="Shape 14"/>
+          <p:cNvSpPr/>
+          <p:nvPr/>
+        </p:nvSpPr>
+        <p:spPr>
+          <a:xfrm>
+            <a:off x="939798" y="4806938"/>
+            <a:ext cx="380999" cy="380999"/>
+          </a:xfrm>
+          <a:prstGeom prst="roundRect">
+            <a:avLst>
+              <a:gd name="adj" fmla="val 23333"/>
             </a:avLst>
           </a:prstGeom>
           <a:solidFill>
@@ -11006,7 +13203,7 @@
       </p:sp>
       <p:pic>
         <p:nvPicPr>
-          <p:cNvPr id="17" name="Image 2" descr="preencoded.png">    </p:cNvPr>
+          <p:cNvPr id="19" name="Image 2" descr="preencoded.png">    </p:cNvPr>
           <p:cNvPicPr>
             <a:picLocks noChangeAspect="1"/>
           </p:cNvPicPr>
@@ -11020,8 +13217,8 @@
         </p:blipFill>
         <p:spPr>
           <a:xfrm>
-            <a:off x="666748" y="3587741"/>
-            <a:ext cx="139700" cy="139700"/>
+            <a:off x="1035047" y="4902188"/>
+            <a:ext cx="190500" cy="190500"/>
           </a:xfrm>
           <a:prstGeom prst="rect">
             <a:avLst/>
@@ -11030,14 +13227,14 @@
       </p:pic>
       <p:sp>
         <p:nvSpPr>
-          <p:cNvPr id="18" name="Text 13"/>
-          <p:cNvSpPr txBox="1"/>
-          <p:nvPr/>
-        </p:nvSpPr>
-        <p:spPr>
-          <a:xfrm>
-            <a:off x="1015997" y="3505191"/>
-            <a:ext cx="4825988" cy="228599"/>
+          <p:cNvPr id="20" name="Text 15"/>
+          <p:cNvSpPr txBox="1"/>
+          <p:nvPr/>
+        </p:nvSpPr>
+        <p:spPr>
+          <a:xfrm>
+            <a:off x="1549396" y="4781538"/>
+            <a:ext cx="4127490" cy="279399"/>
           </a:xfrm>
           <a:prstGeom prst="rect">
             <a:avLst/>
@@ -11053,7 +13250,7 @@
               <a:buNone/>
             </a:pPr>
             <a:r>
-              <a:rPr lang="en-US" sz="1200" b="1" dirty="0">
+              <a:rPr lang="en-US" sz="1450" b="1" dirty="0">
                 <a:solidFill>
                   <a:srgbClr val="1C2230"/>
                 </a:solidFill>
@@ -11061,22 +13258,22 @@
                 <a:ea typeface="Arial" pitchFamily="34" charset="-122"/>
                 <a:cs typeface="Arial" pitchFamily="34" charset="-120"/>
               </a:rPr>
-              <a:t>Werkperiodes van 4 weken</a:t>
-            </a:r>
-            <a:endParaRPr lang="en-US" sz="1200" dirty="0"/>
-          </a:p>
-        </p:txBody>
-      </p:sp>
-      <p:sp>
-        <p:nvSpPr>
-          <p:cNvPr id="19" name="Text 14"/>
-          <p:cNvSpPr txBox="1"/>
-          <p:nvPr/>
-        </p:nvSpPr>
-        <p:spPr>
-          <a:xfrm>
-            <a:off x="1015997" y="3746491"/>
-            <a:ext cx="4825988" cy="355599"/>
+              <a:t>Uitsluitlijst</a:t>
+            </a:r>
+            <a:endParaRPr lang="en-US" sz="1450" dirty="0"/>
+          </a:p>
+        </p:txBody>
+      </p:sp>
+      <p:sp>
+        <p:nvSpPr>
+          <p:cNvPr id="21" name="Text 16"/>
+          <p:cNvSpPr txBox="1"/>
+          <p:nvPr/>
+        </p:nvSpPr>
+        <p:spPr>
+          <a:xfrm>
+            <a:off x="1549396" y="5111737"/>
+            <a:ext cx="4063990" cy="698498"/>
           </a:xfrm>
           <a:prstGeom prst="rect">
             <a:avLst/>
@@ -11090,12 +13287,12 @@
           <a:p>
             <a:pPr indent="0" marL="0">
               <a:lnSpc>
-                <a:spcPct val="130000"/>
+                <a:spcPct val="135000"/>
               </a:lnSpc>
               <a:buNone/>
             </a:pPr>
             <a:r>
-              <a:rPr lang="en-US" sz="950" dirty="0">
+              <a:rPr lang="en-US" sz="1050" dirty="0">
                 <a:solidFill>
                   <a:srgbClr val="6F6A5C"/>
                 </a:solidFill>
@@ -11103,49 +13300,48 @@
                 <a:ea typeface="Arial" pitchFamily="34" charset="-122"/>
                 <a:cs typeface="Arial" pitchFamily="34" charset="-120"/>
               </a:rPr>
-              <a:t>Vooraf gefactureerd, per werkperiode.</a:t>
-            </a:r>
-            <a:endParaRPr lang="en-US" sz="950" dirty="0"/>
-          </a:p>
-        </p:txBody>
-      </p:sp>
-      <p:sp>
-        <p:nvSpPr>
-          <p:cNvPr id="20" name="Shape 15"/>
+              <a:t>Bestaande klanten, lopende gesprekken en bedrijven die we niet mogen benaderen.</a:t>
+            </a:r>
+            <a:endParaRPr lang="en-US" sz="1050" dirty="0"/>
+          </a:p>
+        </p:txBody>
+      </p:sp>
+      <p:sp>
+        <p:nvSpPr>
+          <p:cNvPr id="22" name="Shape 17"/>
           <p:cNvSpPr/>
           <p:nvPr/>
         </p:nvSpPr>
         <p:spPr>
           <a:xfrm>
-            <a:off x="6349984" y="3428991"/>
-            <a:ext cx="5232387" cy="0"/>
-          </a:xfrm>
-          <a:prstGeom prst="line">
-            <a:avLst/>
-          </a:prstGeom>
-          <a:noFill/>
-          <a:ln w="6350">
-            <a:solidFill>
-              <a:srgbClr val="C9C2B2"/>
-            </a:solidFill>
-            <a:prstDash val="solid"/>
-          </a:ln>
-        </p:spPr>
-      </p:sp>
-      <p:sp>
-        <p:nvSpPr>
-          <p:cNvPr id="21" name="Shape 16"/>
-          <p:cNvSpPr/>
-          <p:nvPr/>
-        </p:nvSpPr>
-        <p:spPr>
-          <a:xfrm>
-            <a:off x="6349984" y="3530591"/>
-            <a:ext cx="253999" cy="253999"/>
+            <a:off x="6184885" y="4502139"/>
+            <a:ext cx="5397487" cy="1530346"/>
           </a:xfrm>
           <a:prstGeom prst="roundRect">
             <a:avLst>
-              <a:gd name="adj" fmla="val 25000"/>
+              <a:gd name="adj" fmla="val 6639"/>
+            </a:avLst>
+          </a:prstGeom>
+          <a:solidFill>
+            <a:srgbClr val="F8F4EB"/>
+          </a:solidFill>
+          <a:ln/>
+        </p:spPr>
+      </p:sp>
+      <p:sp>
+        <p:nvSpPr>
+          <p:cNvPr id="23" name="Shape 18"/>
+          <p:cNvSpPr/>
+          <p:nvPr/>
+        </p:nvSpPr>
+        <p:spPr>
+          <a:xfrm>
+            <a:off x="6515084" y="4806938"/>
+            <a:ext cx="380999" cy="380999"/>
+          </a:xfrm>
+          <a:prstGeom prst="roundRect">
+            <a:avLst>
+              <a:gd name="adj" fmla="val 23333"/>
             </a:avLst>
           </a:prstGeom>
           <a:solidFill>
@@ -11156,7 +13352,7 @@
       </p:sp>
       <p:pic>
         <p:nvPicPr>
-          <p:cNvPr id="22" name="Image 3" descr="preencoded.png">    </p:cNvPr>
+          <p:cNvPr id="24" name="Image 3" descr="preencoded.png">    </p:cNvPr>
           <p:cNvPicPr>
             <a:picLocks noChangeAspect="1"/>
           </p:cNvPicPr>
@@ -11170,8 +13366,8 @@
         </p:blipFill>
         <p:spPr>
           <a:xfrm>
-            <a:off x="6407134" y="3587741"/>
-            <a:ext cx="139700" cy="139700"/>
+            <a:off x="6610333" y="4902188"/>
+            <a:ext cx="190500" cy="190500"/>
           </a:xfrm>
           <a:prstGeom prst="rect">
             <a:avLst/>
@@ -11180,14 +13376,14 @@
       </p:pic>
       <p:sp>
         <p:nvSpPr>
-          <p:cNvPr id="23" name="Text 17"/>
-          <p:cNvSpPr txBox="1"/>
-          <p:nvPr/>
-        </p:nvSpPr>
-        <p:spPr>
-          <a:xfrm>
-            <a:off x="6756383" y="3505191"/>
-            <a:ext cx="4825988" cy="228599"/>
+          <p:cNvPr id="25" name="Text 19"/>
+          <p:cNvSpPr txBox="1"/>
+          <p:nvPr/>
+        </p:nvSpPr>
+        <p:spPr>
+          <a:xfrm>
+            <a:off x="7124682" y="4781538"/>
+            <a:ext cx="4127490" cy="279399"/>
           </a:xfrm>
           <a:prstGeom prst="rect">
             <a:avLst/>
@@ -11203,7 +13399,7 @@
               <a:buNone/>
             </a:pPr>
             <a:r>
-              <a:rPr lang="en-US" sz="1200" b="1" dirty="0">
+              <a:rPr lang="en-US" sz="1450" b="1" dirty="0">
                 <a:solidFill>
                   <a:srgbClr val="1C2230"/>
                 </a:solidFill>
@@ -11211,22 +13407,22 @@
                 <a:ea typeface="Arial" pitchFamily="34" charset="-122"/>
                 <a:cs typeface="Arial" pitchFamily="34" charset="-120"/>
               </a:rPr>
-              <a:t>Bestaande relaties blijven van de klant</a:t>
-            </a:r>
-            <a:endParaRPr lang="en-US" sz="1200" dirty="0"/>
-          </a:p>
-        </p:txBody>
-      </p:sp>
-      <p:sp>
-        <p:nvSpPr>
-          <p:cNvPr id="24" name="Text 18"/>
-          <p:cNvSpPr txBox="1"/>
-          <p:nvPr/>
-        </p:nvSpPr>
-        <p:spPr>
-          <a:xfrm>
-            <a:off x="6756383" y="3746491"/>
-            <a:ext cx="4825988" cy="355599"/>
+              <a:t>Eén aanspreekpunt</a:t>
+            </a:r>
+            <a:endParaRPr lang="en-US" sz="1450" dirty="0"/>
+          </a:p>
+        </p:txBody>
+      </p:sp>
+      <p:sp>
+        <p:nvSpPr>
+          <p:cNvPr id="26" name="Text 20"/>
+          <p:cNvSpPr txBox="1"/>
+          <p:nvPr/>
+        </p:nvSpPr>
+        <p:spPr>
+          <a:xfrm>
+            <a:off x="7124682" y="5111737"/>
+            <a:ext cx="4063990" cy="698498"/>
           </a:xfrm>
           <a:prstGeom prst="rect">
             <a:avLst/>
@@ -11240,12 +13436,12 @@
           <a:p>
             <a:pPr indent="0" marL="0">
               <a:lnSpc>
-                <a:spcPct val="130000"/>
+                <a:spcPct val="135000"/>
               </a:lnSpc>
               <a:buNone/>
             </a:pPr>
             <a:r>
-              <a:rPr lang="en-US" sz="950" dirty="0">
+              <a:rPr lang="en-US" sz="1050" dirty="0">
                 <a:solidFill>
                   <a:srgbClr val="6F6A5C"/>
                 </a:solidFill>
@@ -11253,609 +13449,9 @@
                 <a:ea typeface="Arial" pitchFamily="34" charset="-122"/>
                 <a:cs typeface="Arial" pitchFamily="34" charset="-120"/>
               </a:rPr>
-              <a:t>Uitsluitlijst vooraf, die bedrijven benaderen wij niet.</a:t>
-            </a:r>
-            <a:endParaRPr lang="en-US" sz="950" dirty="0"/>
-          </a:p>
-        </p:txBody>
-      </p:sp>
-      <p:sp>
-        <p:nvSpPr>
-          <p:cNvPr id="25" name="Shape 19"/>
-          <p:cNvSpPr/>
-          <p:nvPr/>
-        </p:nvSpPr>
-        <p:spPr>
-          <a:xfrm>
-            <a:off x="609598" y="4140190"/>
-            <a:ext cx="5232387" cy="0"/>
-          </a:xfrm>
-          <a:prstGeom prst="line">
-            <a:avLst/>
-          </a:prstGeom>
-          <a:noFill/>
-          <a:ln w="6350">
-            <a:solidFill>
-              <a:srgbClr val="C9C2B2"/>
-            </a:solidFill>
-            <a:prstDash val="solid"/>
-          </a:ln>
-        </p:spPr>
-      </p:sp>
-      <p:sp>
-        <p:nvSpPr>
-          <p:cNvPr id="26" name="Shape 20"/>
-          <p:cNvSpPr/>
-          <p:nvPr/>
-        </p:nvSpPr>
-        <p:spPr>
-          <a:xfrm>
-            <a:off x="609598" y="4241789"/>
-            <a:ext cx="253999" cy="253999"/>
-          </a:xfrm>
-          <a:prstGeom prst="roundRect">
-            <a:avLst>
-              <a:gd name="adj" fmla="val 25000"/>
-            </a:avLst>
-          </a:prstGeom>
-          <a:solidFill>
-            <a:srgbClr val="DDEBF3"/>
-          </a:solidFill>
-          <a:ln/>
-        </p:spPr>
-      </p:sp>
-      <p:pic>
-        <p:nvPicPr>
-          <p:cNvPr id="27" name="Image 4" descr="preencoded.png">    </p:cNvPr>
-          <p:cNvPicPr>
-            <a:picLocks noChangeAspect="1"/>
-          </p:cNvPicPr>
-          <p:nvPr/>
-        </p:nvPicPr>
-        <p:blipFill>
-          <a:blip r:embed="rId5"/>
-          <a:stretch>
-            <a:fillRect/>
-          </a:stretch>
-        </p:blipFill>
-        <p:spPr>
-          <a:xfrm>
-            <a:off x="666748" y="4298939"/>
-            <a:ext cx="139700" cy="139700"/>
-          </a:xfrm>
-          <a:prstGeom prst="rect">
-            <a:avLst/>
-          </a:prstGeom>
-        </p:spPr>
-      </p:pic>
-      <p:sp>
-        <p:nvSpPr>
-          <p:cNvPr id="28" name="Text 21"/>
-          <p:cNvSpPr txBox="1"/>
-          <p:nvPr/>
-        </p:nvSpPr>
-        <p:spPr>
-          <a:xfrm>
-            <a:off x="1015997" y="4216389"/>
-            <a:ext cx="4825988" cy="228599"/>
-          </a:xfrm>
-          <a:prstGeom prst="rect">
-            <a:avLst/>
-          </a:prstGeom>
-          <a:noFill/>
-          <a:ln/>
-        </p:spPr>
-        <p:txBody>
-          <a:bodyPr wrap="square" lIns="0" tIns="0" rIns="0" bIns="0" rtlCol="0" anchor="ctr"/>
-          <a:lstStyle/>
-          <a:p>
-            <a:pPr indent="0" marL="0">
-              <a:buNone/>
-            </a:pPr>
-            <a:r>
-              <a:rPr lang="en-US" sz="1200" b="1" dirty="0">
-                <a:solidFill>
-                  <a:srgbClr val="1C2230"/>
-                </a:solidFill>
-                <a:latin typeface="Arial" pitchFamily="34" charset="0"/>
-                <a:ea typeface="Arial" pitchFamily="34" charset="-122"/>
-                <a:cs typeface="Arial" pitchFamily="34" charset="-120"/>
-              </a:rPr>
-              <a:t>Wekelijkse rapportage</a:t>
-            </a:r>
-            <a:endParaRPr lang="en-US" sz="1200" dirty="0"/>
-          </a:p>
-        </p:txBody>
-      </p:sp>
-      <p:sp>
-        <p:nvSpPr>
-          <p:cNvPr id="29" name="Text 22"/>
-          <p:cNvSpPr txBox="1"/>
-          <p:nvPr/>
-        </p:nvSpPr>
-        <p:spPr>
-          <a:xfrm>
-            <a:off x="1015997" y="4457689"/>
-            <a:ext cx="4825988" cy="355599"/>
-          </a:xfrm>
-          <a:prstGeom prst="rect">
-            <a:avLst/>
-          </a:prstGeom>
-          <a:noFill/>
-          <a:ln/>
-        </p:spPr>
-        <p:txBody>
-          <a:bodyPr wrap="square" lIns="0" tIns="0" rIns="0" bIns="0" rtlCol="0" anchor="t"/>
-          <a:lstStyle/>
-          <a:p>
-            <a:pPr indent="0" marL="0">
-              <a:lnSpc>
-                <a:spcPct val="130000"/>
-              </a:lnSpc>
-              <a:buNone/>
-            </a:pPr>
-            <a:r>
-              <a:rPr lang="en-US" sz="950" dirty="0">
-                <a:solidFill>
-                  <a:srgbClr val="6F6A5C"/>
-                </a:solidFill>
-                <a:latin typeface="Arial" pitchFamily="34" charset="0"/>
-                <a:ea typeface="Arial" pitchFamily="34" charset="-122"/>
-                <a:cs typeface="Arial" pitchFamily="34" charset="-120"/>
-              </a:rPr>
-              <a:t>Elke week zicht op wat er gebeurd is, voor de klant en voor CentreBlock.</a:t>
-            </a:r>
-            <a:endParaRPr lang="en-US" sz="950" dirty="0"/>
-          </a:p>
-        </p:txBody>
-      </p:sp>
-      <p:sp>
-        <p:nvSpPr>
-          <p:cNvPr id="30" name="Shape 23"/>
-          <p:cNvSpPr/>
-          <p:nvPr/>
-        </p:nvSpPr>
-        <p:spPr>
-          <a:xfrm>
-            <a:off x="6349984" y="4140190"/>
-            <a:ext cx="5232387" cy="0"/>
-          </a:xfrm>
-          <a:prstGeom prst="line">
-            <a:avLst/>
-          </a:prstGeom>
-          <a:noFill/>
-          <a:ln w="6350">
-            <a:solidFill>
-              <a:srgbClr val="C9C2B2"/>
-            </a:solidFill>
-            <a:prstDash val="solid"/>
-          </a:ln>
-        </p:spPr>
-      </p:sp>
-      <p:sp>
-        <p:nvSpPr>
-          <p:cNvPr id="31" name="Shape 24"/>
-          <p:cNvSpPr/>
-          <p:nvPr/>
-        </p:nvSpPr>
-        <p:spPr>
-          <a:xfrm>
-            <a:off x="6349984" y="4241789"/>
-            <a:ext cx="253999" cy="253999"/>
-          </a:xfrm>
-          <a:prstGeom prst="roundRect">
-            <a:avLst>
-              <a:gd name="adj" fmla="val 25000"/>
-            </a:avLst>
-          </a:prstGeom>
-          <a:solidFill>
-            <a:srgbClr val="DDEBF3"/>
-          </a:solidFill>
-          <a:ln/>
-        </p:spPr>
-      </p:sp>
-      <p:pic>
-        <p:nvPicPr>
-          <p:cNvPr id="32" name="Image 5" descr="preencoded.png">    </p:cNvPr>
-          <p:cNvPicPr>
-            <a:picLocks noChangeAspect="1"/>
-          </p:cNvPicPr>
-          <p:nvPr/>
-        </p:nvPicPr>
-        <p:blipFill>
-          <a:blip r:embed="rId6"/>
-          <a:stretch>
-            <a:fillRect/>
-          </a:stretch>
-        </p:blipFill>
-        <p:spPr>
-          <a:xfrm>
-            <a:off x="6407134" y="4298939"/>
-            <a:ext cx="139700" cy="139700"/>
-          </a:xfrm>
-          <a:prstGeom prst="rect">
-            <a:avLst/>
-          </a:prstGeom>
-        </p:spPr>
-      </p:pic>
-      <p:sp>
-        <p:nvSpPr>
-          <p:cNvPr id="33" name="Text 25"/>
-          <p:cNvSpPr txBox="1"/>
-          <p:nvPr/>
-        </p:nvSpPr>
-        <p:spPr>
-          <a:xfrm>
-            <a:off x="6756383" y="4216389"/>
-            <a:ext cx="4825988" cy="228599"/>
-          </a:xfrm>
-          <a:prstGeom prst="rect">
-            <a:avLst/>
-          </a:prstGeom>
-          <a:noFill/>
-          <a:ln/>
-        </p:spPr>
-        <p:txBody>
-          <a:bodyPr wrap="square" lIns="0" tIns="0" rIns="0" bIns="0" rtlCol="0" anchor="ctr"/>
-          <a:lstStyle/>
-          <a:p>
-            <a:pPr indent="0" marL="0">
-              <a:buNone/>
-            </a:pPr>
-            <a:r>
-              <a:rPr lang="en-US" sz="1200" b="1" dirty="0">
-                <a:solidFill>
-                  <a:srgbClr val="1C2230"/>
-                </a:solidFill>
-                <a:latin typeface="Arial" pitchFamily="34" charset="0"/>
-                <a:ea typeface="Arial" pitchFamily="34" charset="-122"/>
-                <a:cs typeface="Arial" pitchFamily="34" charset="-120"/>
-              </a:rPr>
-              <a:t>Hun naam, onze uitvoering</a:t>
-            </a:r>
-            <a:endParaRPr lang="en-US" sz="1200" dirty="0"/>
-          </a:p>
-        </p:txBody>
-      </p:sp>
-      <p:sp>
-        <p:nvSpPr>
-          <p:cNvPr id="34" name="Text 26"/>
-          <p:cNvSpPr txBox="1"/>
-          <p:nvPr/>
-        </p:nvSpPr>
-        <p:spPr>
-          <a:xfrm>
-            <a:off x="6756383" y="4457689"/>
-            <a:ext cx="4825988" cy="355599"/>
-          </a:xfrm>
-          <a:prstGeom prst="rect">
-            <a:avLst/>
-          </a:prstGeom>
-          <a:noFill/>
-          <a:ln/>
-        </p:spPr>
-        <p:txBody>
-          <a:bodyPr wrap="square" lIns="0" tIns="0" rIns="0" bIns="0" rtlCol="0" anchor="t"/>
-          <a:lstStyle/>
-          <a:p>
-            <a:pPr indent="0" marL="0">
-              <a:lnSpc>
-                <a:spcPct val="130000"/>
-              </a:lnSpc>
-              <a:buNone/>
-            </a:pPr>
-            <a:r>
-              <a:rPr lang="en-US" sz="950" dirty="0">
-                <a:solidFill>
-                  <a:srgbClr val="6F6A5C"/>
-                </a:solidFill>
-                <a:latin typeface="Arial" pitchFamily="34" charset="0"/>
-                <a:ea typeface="Arial" pitchFamily="34" charset="-122"/>
-                <a:cs typeface="Arial" pitchFamily="34" charset="-120"/>
-              </a:rPr>
-              <a:t>Regionaal nummer en de stijl van de klant, wij voeren uit.</a:t>
-            </a:r>
-            <a:endParaRPr lang="en-US" sz="950" dirty="0"/>
-          </a:p>
-        </p:txBody>
-      </p:sp>
-      <p:sp>
-        <p:nvSpPr>
-          <p:cNvPr id="35" name="Shape 27"/>
-          <p:cNvSpPr/>
-          <p:nvPr/>
-        </p:nvSpPr>
-        <p:spPr>
-          <a:xfrm>
-            <a:off x="609598" y="4851388"/>
-            <a:ext cx="5232387" cy="0"/>
-          </a:xfrm>
-          <a:prstGeom prst="line">
-            <a:avLst/>
-          </a:prstGeom>
-          <a:noFill/>
-          <a:ln w="6350">
-            <a:solidFill>
-              <a:srgbClr val="C9C2B2"/>
-            </a:solidFill>
-            <a:prstDash val="solid"/>
-          </a:ln>
-        </p:spPr>
-      </p:sp>
-      <p:sp>
-        <p:nvSpPr>
-          <p:cNvPr id="36" name="Shape 28"/>
-          <p:cNvSpPr/>
-          <p:nvPr/>
-        </p:nvSpPr>
-        <p:spPr>
-          <a:xfrm>
-            <a:off x="609598" y="4952988"/>
-            <a:ext cx="253999" cy="253999"/>
-          </a:xfrm>
-          <a:prstGeom prst="roundRect">
-            <a:avLst>
-              <a:gd name="adj" fmla="val 25000"/>
-            </a:avLst>
-          </a:prstGeom>
-          <a:solidFill>
-            <a:srgbClr val="DDEBF3"/>
-          </a:solidFill>
-          <a:ln/>
-        </p:spPr>
-      </p:sp>
-      <p:pic>
-        <p:nvPicPr>
-          <p:cNvPr id="37" name="Image 6" descr="preencoded.png">    </p:cNvPr>
-          <p:cNvPicPr>
-            <a:picLocks noChangeAspect="1"/>
-          </p:cNvPicPr>
-          <p:nvPr/>
-        </p:nvPicPr>
-        <p:blipFill>
-          <a:blip r:embed="rId7"/>
-          <a:stretch>
-            <a:fillRect/>
-          </a:stretch>
-        </p:blipFill>
-        <p:spPr>
-          <a:xfrm>
-            <a:off x="666748" y="5010137"/>
-            <a:ext cx="139700" cy="139700"/>
-          </a:xfrm>
-          <a:prstGeom prst="rect">
-            <a:avLst/>
-          </a:prstGeom>
-        </p:spPr>
-      </p:pic>
-      <p:sp>
-        <p:nvSpPr>
-          <p:cNvPr id="38" name="Text 29"/>
-          <p:cNvSpPr txBox="1"/>
-          <p:nvPr/>
-        </p:nvSpPr>
-        <p:spPr>
-          <a:xfrm>
-            <a:off x="1015997" y="4927588"/>
-            <a:ext cx="4825988" cy="228599"/>
-          </a:xfrm>
-          <a:prstGeom prst="rect">
-            <a:avLst/>
-          </a:prstGeom>
-          <a:noFill/>
-          <a:ln/>
-        </p:spPr>
-        <p:txBody>
-          <a:bodyPr wrap="square" lIns="0" tIns="0" rIns="0" bIns="0" rtlCol="0" anchor="ctr"/>
-          <a:lstStyle/>
-          <a:p>
-            <a:pPr indent="0" marL="0">
-              <a:buNone/>
-            </a:pPr>
-            <a:r>
-              <a:rPr lang="en-US" sz="1200" b="1" dirty="0">
-                <a:solidFill>
-                  <a:srgbClr val="1C2230"/>
-                </a:solidFill>
-                <a:latin typeface="Arial" pitchFamily="34" charset="0"/>
-                <a:ea typeface="Arial" pitchFamily="34" charset="-122"/>
-                <a:cs typeface="Arial" pitchFamily="34" charset="-120"/>
-              </a:rPr>
-              <a:t>Gegevens veilig</a:t>
-            </a:r>
-            <a:endParaRPr lang="en-US" sz="1200" dirty="0"/>
-          </a:p>
-        </p:txBody>
-      </p:sp>
-      <p:sp>
-        <p:nvSpPr>
-          <p:cNvPr id="39" name="Text 30"/>
-          <p:cNvSpPr txBox="1"/>
-          <p:nvPr/>
-        </p:nvSpPr>
-        <p:spPr>
-          <a:xfrm>
-            <a:off x="1015997" y="5168887"/>
-            <a:ext cx="4825988" cy="355599"/>
-          </a:xfrm>
-          <a:prstGeom prst="rect">
-            <a:avLst/>
-          </a:prstGeom>
-          <a:noFill/>
-          <a:ln/>
-        </p:spPr>
-        <p:txBody>
-          <a:bodyPr wrap="square" lIns="0" tIns="0" rIns="0" bIns="0" rtlCol="0" anchor="t"/>
-          <a:lstStyle/>
-          <a:p>
-            <a:pPr indent="0" marL="0">
-              <a:lnSpc>
-                <a:spcPct val="130000"/>
-              </a:lnSpc>
-              <a:buNone/>
-            </a:pPr>
-            <a:r>
-              <a:rPr lang="en-US" sz="950" dirty="0">
-                <a:solidFill>
-                  <a:srgbClr val="6F6A5C"/>
-                </a:solidFill>
-                <a:latin typeface="Arial" pitchFamily="34" charset="0"/>
-                <a:ea typeface="Arial" pitchFamily="34" charset="-122"/>
-                <a:cs typeface="Arial" pitchFamily="34" charset="-120"/>
-              </a:rPr>
-              <a:t>Vastgelegd in een verwerkersovereenkomst, per klant.</a:t>
-            </a:r>
-            <a:endParaRPr lang="en-US" sz="950" dirty="0"/>
-          </a:p>
-        </p:txBody>
-      </p:sp>
-      <p:sp>
-        <p:nvSpPr>
-          <p:cNvPr id="40" name="Shape 31"/>
-          <p:cNvSpPr/>
-          <p:nvPr/>
-        </p:nvSpPr>
-        <p:spPr>
-          <a:xfrm>
-            <a:off x="6349984" y="4851388"/>
-            <a:ext cx="5232387" cy="0"/>
-          </a:xfrm>
-          <a:prstGeom prst="line">
-            <a:avLst/>
-          </a:prstGeom>
-          <a:noFill/>
-          <a:ln w="6350">
-            <a:solidFill>
-              <a:srgbClr val="C9C2B2"/>
-            </a:solidFill>
-            <a:prstDash val="solid"/>
-          </a:ln>
-        </p:spPr>
-      </p:sp>
-      <p:sp>
-        <p:nvSpPr>
-          <p:cNvPr id="41" name="Shape 32"/>
-          <p:cNvSpPr/>
-          <p:nvPr/>
-        </p:nvSpPr>
-        <p:spPr>
-          <a:xfrm>
-            <a:off x="6349984" y="4952988"/>
-            <a:ext cx="253999" cy="253999"/>
-          </a:xfrm>
-          <a:prstGeom prst="roundRect">
-            <a:avLst>
-              <a:gd name="adj" fmla="val 25000"/>
-            </a:avLst>
-          </a:prstGeom>
-          <a:solidFill>
-            <a:srgbClr val="DDEBF3"/>
-          </a:solidFill>
-          <a:ln/>
-        </p:spPr>
-      </p:sp>
-      <p:pic>
-        <p:nvPicPr>
-          <p:cNvPr id="42" name="Image 7" descr="preencoded.png">    </p:cNvPr>
-          <p:cNvPicPr>
-            <a:picLocks noChangeAspect="1"/>
-          </p:cNvPicPr>
-          <p:nvPr/>
-        </p:nvPicPr>
-        <p:blipFill>
-          <a:blip r:embed="rId8"/>
-          <a:stretch>
-            <a:fillRect/>
-          </a:stretch>
-        </p:blipFill>
-        <p:spPr>
-          <a:xfrm>
-            <a:off x="6407134" y="5010137"/>
-            <a:ext cx="139700" cy="139700"/>
-          </a:xfrm>
-          <a:prstGeom prst="rect">
-            <a:avLst/>
-          </a:prstGeom>
-        </p:spPr>
-      </p:pic>
-      <p:sp>
-        <p:nvSpPr>
-          <p:cNvPr id="43" name="Text 33"/>
-          <p:cNvSpPr txBox="1"/>
-          <p:nvPr/>
-        </p:nvSpPr>
-        <p:spPr>
-          <a:xfrm>
-            <a:off x="6756383" y="4927588"/>
-            <a:ext cx="4825988" cy="228599"/>
-          </a:xfrm>
-          <a:prstGeom prst="rect">
-            <a:avLst/>
-          </a:prstGeom>
-          <a:noFill/>
-          <a:ln/>
-        </p:spPr>
-        <p:txBody>
-          <a:bodyPr wrap="square" lIns="0" tIns="0" rIns="0" bIns="0" rtlCol="0" anchor="ctr"/>
-          <a:lstStyle/>
-          <a:p>
-            <a:pPr indent="0" marL="0">
-              <a:buNone/>
-            </a:pPr>
-            <a:r>
-              <a:rPr lang="en-US" sz="1200" b="1" dirty="0">
-                <a:solidFill>
-                  <a:srgbClr val="1C2230"/>
-                </a:solidFill>
-                <a:latin typeface="Arial" pitchFamily="34" charset="0"/>
-                <a:ea typeface="Arial" pitchFamily="34" charset="-122"/>
-                <a:cs typeface="Arial" pitchFamily="34" charset="-120"/>
-              </a:rPr>
-              <a:t>Alles op papier</a:t>
-            </a:r>
-            <a:endParaRPr lang="en-US" sz="1200" dirty="0"/>
-          </a:p>
-        </p:txBody>
-      </p:sp>
-      <p:sp>
-        <p:nvSpPr>
-          <p:cNvPr id="44" name="Text 34"/>
-          <p:cNvSpPr txBox="1"/>
-          <p:nvPr/>
-        </p:nvSpPr>
-        <p:spPr>
-          <a:xfrm>
-            <a:off x="6756383" y="5168887"/>
-            <a:ext cx="4825988" cy="355599"/>
-          </a:xfrm>
-          <a:prstGeom prst="rect">
-            <a:avLst/>
-          </a:prstGeom>
-          <a:noFill/>
-          <a:ln/>
-        </p:spPr>
-        <p:txBody>
-          <a:bodyPr wrap="square" lIns="0" tIns="0" rIns="0" bIns="0" rtlCol="0" anchor="t"/>
-          <a:lstStyle/>
-          <a:p>
-            <a:pPr indent="0" marL="0">
-              <a:lnSpc>
-                <a:spcPct val="130000"/>
-              </a:lnSpc>
-              <a:buNone/>
-            </a:pPr>
-            <a:r>
-              <a:rPr lang="en-US" sz="950" dirty="0">
-                <a:solidFill>
-                  <a:srgbClr val="6F6A5C"/>
-                </a:solidFill>
-                <a:latin typeface="Arial" pitchFamily="34" charset="0"/>
-                <a:ea typeface="Arial" pitchFamily="34" charset="-122"/>
-                <a:cs typeface="Arial" pitchFamily="34" charset="-120"/>
-              </a:rPr>
-              <a:t>Vastgelegd in een korte samenwerkingsovereenkomst met CentreBlock.</a:t>
-            </a:r>
-            <a:endParaRPr lang="en-US" sz="950" dirty="0"/>
+              <a:t>Eén vaste persoon bij CentreBlock voor de afstemming, en per klant iemand die de afspraken voert.</a:t>
+            </a:r>
+            <a:endParaRPr lang="en-US" sz="1050" dirty="0"/>
           </a:p>
         </p:txBody>
       </p:sp>

--- a/output/LINK. voorstel CentreBlock.pptx
+++ b/output/LINK. voorstel CentreBlock.pptx
@@ -5589,7 +5589,7 @@
                 <a:ea typeface="Arial" pitchFamily="34" charset="-122"/>
                 <a:cs typeface="Arial" pitchFamily="34" charset="-120"/>
               </a:rPr>
-              <a:t>Eén persoon die jullie campagne kent, van script tot rapportage.</a:t>
+              <a:t>Eén persoon die jullie campagne kent, van kick-off tot rapportage.</a:t>
             </a:r>
             <a:endParaRPr lang="en-US" sz="950" dirty="0"/>
           </a:p>
@@ -7062,7 +7062,7 @@
                 <a:ea typeface="Arial" pitchFamily="34" charset="-122"/>
                 <a:cs typeface="Arial" pitchFamily="34" charset="-120"/>
               </a:rPr>
-              <a:t>Per klant een korte sessie: doelgroep, propositie, bezwaren en wat een goede afspraak is. Wij schrijven het belscript, de klant keurt goed.</a:t>
+              <a:t>Per klant een korte sessie: doelgroep, propositie, bezwaren en wat een goede afspraak is. Wij leggen de USP's vast, de klant keurt ze goed.</a:t>
             </a:r>
             <a:endParaRPr lang="en-US" sz="900" dirty="0"/>
           </a:p>
@@ -10597,7 +10597,7 @@
                 <a:ea typeface="Arial" pitchFamily="34" charset="-122"/>
                 <a:cs typeface="Arial" pitchFamily="34" charset="-120"/>
               </a:rPr>
-              <a:t>€ 695 per klant. Kick-off, belscript, inrichting van het belsysteem en een regionaal nummer op naam van de klant. Eén keer, daarna nooit meer.</a:t>
+              <a:t>€ 695 per klant. Kick-off, USP's, inrichting van het belsysteem en een regionaal nummer op naam van de klant. Eén keer, daarna nooit meer.</a:t>
             </a:r>
             <a:endParaRPr lang="en-US" sz="875" dirty="0"/>
           </a:p>
@@ -11316,7 +11316,7 @@
         <p:spPr>
           <a:xfrm>
             <a:off x="3733791" y="5245087"/>
-            <a:ext cx="3555991" cy="215899"/>
+            <a:ext cx="3746491" cy="215899"/>
           </a:xfrm>
           <a:prstGeom prst="rect">
             <a:avLst/>
@@ -11362,7 +11362,7 @@
         </p:blipFill>
         <p:spPr>
           <a:xfrm>
-            <a:off x="7340582" y="5276837"/>
+            <a:off x="7556481" y="5276837"/>
             <a:ext cx="127000" cy="127000"/>
           </a:xfrm>
           <a:prstGeom prst="rect">
@@ -11378,8 +11378,8 @@
         </p:nvSpPr>
         <p:spPr>
           <a:xfrm>
-            <a:off x="7543781" y="5245087"/>
-            <a:ext cx="3555991" cy="215899"/>
+            <a:off x="7759681" y="5245087"/>
+            <a:ext cx="3746491" cy="215899"/>
           </a:xfrm>
           <a:prstGeom prst="rect">
             <a:avLst/>
@@ -11403,7 +11403,7 @@
                 <a:ea typeface="Arial" pitchFamily="34" charset="-122"/>
                 <a:cs typeface="Arial" pitchFamily="34" charset="-120"/>
               </a:rPr>
-              <a:t>Belscript en bezwaren</a:t>
+              <a:t>USP's en bezwaren</a:t>
             </a:r>
             <a:endParaRPr lang="en-US" sz="900" dirty="0"/>
           </a:p>
@@ -11442,7 +11442,7 @@
         <p:spPr>
           <a:xfrm>
             <a:off x="3733791" y="5499086"/>
-            <a:ext cx="3555991" cy="215899"/>
+            <a:ext cx="3746491" cy="215899"/>
           </a:xfrm>
           <a:prstGeom prst="rect">
             <a:avLst/>
@@ -11488,7 +11488,7 @@
         </p:blipFill>
         <p:spPr>
           <a:xfrm>
-            <a:off x="7340582" y="5530836"/>
+            <a:off x="7556481" y="5530836"/>
             <a:ext cx="127000" cy="127000"/>
           </a:xfrm>
           <a:prstGeom prst="rect">
@@ -11504,8 +11504,8 @@
         </p:nvSpPr>
         <p:spPr>
           <a:xfrm>
-            <a:off x="7543781" y="5499086"/>
-            <a:ext cx="3555991" cy="215899"/>
+            <a:off x="7759681" y="5499086"/>
+            <a:ext cx="3746491" cy="215899"/>
           </a:xfrm>
           <a:prstGeom prst="rect">
             <a:avLst/>
@@ -11568,7 +11568,7 @@
         <p:spPr>
           <a:xfrm>
             <a:off x="3733791" y="5753086"/>
-            <a:ext cx="3555991" cy="215899"/>
+            <a:ext cx="3746491" cy="215899"/>
           </a:xfrm>
           <a:prstGeom prst="rect">
             <a:avLst/>
@@ -11614,7 +11614,7 @@
         </p:blipFill>
         <p:spPr>
           <a:xfrm>
-            <a:off x="7340582" y="5784836"/>
+            <a:off x="7556481" y="5784836"/>
             <a:ext cx="127000" cy="127000"/>
           </a:xfrm>
           <a:prstGeom prst="rect">
@@ -11630,8 +11630,8 @@
         </p:nvSpPr>
         <p:spPr>
           <a:xfrm>
-            <a:off x="7543781" y="5753086"/>
-            <a:ext cx="3555991" cy="215899"/>
+            <a:off x="7759681" y="5753086"/>
+            <a:ext cx="3746491" cy="215899"/>
           </a:xfrm>
           <a:prstGeom prst="rect">
             <a:avLst/>
